--- a/docs/Аудитор_ИИ-агент_презентация.pptx
+++ b/docs/Аудитор_ИИ-агент_презентация.pptx
@@ -5,27 +5,27 @@
     <p:sldMasterId id="2147483648" r:id="rId1"/>
   </p:sldMasterIdLst>
   <p:sldIdLst>
-    <p:sldId id="256" r:id="rId7"/>
-    <p:sldId id="257" r:id="rId8"/>
-    <p:sldId id="258" r:id="rId9"/>
-    <p:sldId id="259" r:id="rId10"/>
-    <p:sldId id="260" r:id="rId11"/>
-    <p:sldId id="261" r:id="rId12"/>
-    <p:sldId id="262" r:id="rId13"/>
-    <p:sldId id="263" r:id="rId14"/>
-    <p:sldId id="264" r:id="rId15"/>
-    <p:sldId id="265" r:id="rId16"/>
-    <p:sldId id="266" r:id="rId17"/>
-    <p:sldId id="267" r:id="rId18"/>
-    <p:sldId id="268" r:id="rId19"/>
-    <p:sldId id="269" r:id="rId20"/>
-    <p:sldId id="270" r:id="rId21"/>
-    <p:sldId id="271" r:id="rId22"/>
-    <p:sldId id="272" r:id="rId23"/>
-    <p:sldId id="273" r:id="rId24"/>
-    <p:sldId id="274" r:id="rId25"/>
+    <p:sldId id="256" r:id="rId2"/>
+    <p:sldId id="257" r:id="rId3"/>
+    <p:sldId id="258" r:id="rId4"/>
+    <p:sldId id="259" r:id="rId5"/>
+    <p:sldId id="260" r:id="rId6"/>
+    <p:sldId id="261" r:id="rId7"/>
+    <p:sldId id="262" r:id="rId8"/>
+    <p:sldId id="263" r:id="rId9"/>
+    <p:sldId id="264" r:id="rId10"/>
+    <p:sldId id="265" r:id="rId11"/>
+    <p:sldId id="266" r:id="rId12"/>
+    <p:sldId id="267" r:id="rId13"/>
+    <p:sldId id="268" r:id="rId14"/>
+    <p:sldId id="269" r:id="rId15"/>
+    <p:sldId id="270" r:id="rId16"/>
+    <p:sldId id="271" r:id="rId17"/>
+    <p:sldId id="272" r:id="rId18"/>
+    <p:sldId id="273" r:id="rId19"/>
+    <p:sldId id="274" r:id="rId20"/>
   </p:sldIdLst>
-  <p:sldSz cx="12191695" cy="6858000" type="screen4x3"/>
+  <p:sldSz cx="12192000" cy="6858000"/>
   <p:notesSz cx="6858000" cy="9144000"/>
   <p:defaultTextStyle>
     <a:defPPr>
@@ -122,6 +122,22 @@
       </a:defRPr>
     </a:lvl9pPr>
   </p:defaultTextStyle>
+  <p:extLst>
+    <p:ext uri="{EFAFB233-063F-42B5-8137-9DF3F51BA10A}">
+      <p15:sldGuideLst xmlns:p15="http://schemas.microsoft.com/office/powerpoint/2012/main">
+        <p15:guide id="1" orient="horz" pos="2160">
+          <p15:clr>
+            <a:srgbClr val="A4A3A4"/>
+          </p15:clr>
+        </p15:guide>
+        <p15:guide id="2" pos="2880">
+          <p15:clr>
+            <a:srgbClr val="A4A3A4"/>
+          </p15:clr>
+        </p15:guide>
+      </p15:sldGuideLst>
+    </p:ext>
+  </p:extLst>
 </p:presentation>
 </file>
 
@@ -306,7 +322,7 @@
           <a:p>
             <a:fld id="{5BCAD085-E8A6-8845-BD4E-CB4CCA059FC4}" type="datetimeFigureOut">
               <a:rPr lang="en-US" smtClean="0"/>
-              <a:t>1/27/13</a:t>
+              <a:t>8/27/2026</a:t>
             </a:fld>
             <a:endParaRPr lang="en-US"/>
           </a:p>
@@ -476,7 +492,7 @@
           <a:p>
             <a:fld id="{5BCAD085-E8A6-8845-BD4E-CB4CCA059FC4}" type="datetimeFigureOut">
               <a:rPr lang="en-US" smtClean="0"/>
-              <a:t>1/27/13</a:t>
+              <a:t>8/27/2026</a:t>
             </a:fld>
             <a:endParaRPr lang="en-US"/>
           </a:p>
@@ -656,7 +672,7 @@
           <a:p>
             <a:fld id="{5BCAD085-E8A6-8845-BD4E-CB4CCA059FC4}" type="datetimeFigureOut">
               <a:rPr lang="en-US" smtClean="0"/>
-              <a:t>1/27/13</a:t>
+              <a:t>8/27/2026</a:t>
             </a:fld>
             <a:endParaRPr lang="en-US"/>
           </a:p>
@@ -826,7 +842,7 @@
           <a:p>
             <a:fld id="{5BCAD085-E8A6-8845-BD4E-CB4CCA059FC4}" type="datetimeFigureOut">
               <a:rPr lang="en-US" smtClean="0"/>
-              <a:t>1/27/13</a:t>
+              <a:t>8/27/2026</a:t>
             </a:fld>
             <a:endParaRPr lang="en-US"/>
           </a:p>
@@ -1072,7 +1088,7 @@
           <a:p>
             <a:fld id="{5BCAD085-E8A6-8845-BD4E-CB4CCA059FC4}" type="datetimeFigureOut">
               <a:rPr lang="en-US" smtClean="0"/>
-              <a:t>1/27/13</a:t>
+              <a:t>8/27/2026</a:t>
             </a:fld>
             <a:endParaRPr lang="en-US"/>
           </a:p>
@@ -1360,7 +1376,7 @@
           <a:p>
             <a:fld id="{5BCAD085-E8A6-8845-BD4E-CB4CCA059FC4}" type="datetimeFigureOut">
               <a:rPr lang="en-US" smtClean="0"/>
-              <a:t>1/27/13</a:t>
+              <a:t>8/27/2026</a:t>
             </a:fld>
             <a:endParaRPr lang="en-US"/>
           </a:p>
@@ -1782,7 +1798,7 @@
           <a:p>
             <a:fld id="{5BCAD085-E8A6-8845-BD4E-CB4CCA059FC4}" type="datetimeFigureOut">
               <a:rPr lang="en-US" smtClean="0"/>
-              <a:t>1/27/13</a:t>
+              <a:t>8/27/2026</a:t>
             </a:fld>
             <a:endParaRPr lang="en-US"/>
           </a:p>
@@ -1900,7 +1916,7 @@
           <a:p>
             <a:fld id="{5BCAD085-E8A6-8845-BD4E-CB4CCA059FC4}" type="datetimeFigureOut">
               <a:rPr lang="en-US" smtClean="0"/>
-              <a:t>1/27/13</a:t>
+              <a:t>8/27/2026</a:t>
             </a:fld>
             <a:endParaRPr lang="en-US"/>
           </a:p>
@@ -1995,7 +2011,7 @@
           <a:p>
             <a:fld id="{5BCAD085-E8A6-8845-BD4E-CB4CCA059FC4}" type="datetimeFigureOut">
               <a:rPr lang="en-US" smtClean="0"/>
-              <a:t>1/27/13</a:t>
+              <a:t>8/27/2026</a:t>
             </a:fld>
             <a:endParaRPr lang="en-US"/>
           </a:p>
@@ -2272,7 +2288,7 @@
           <a:p>
             <a:fld id="{5BCAD085-E8A6-8845-BD4E-CB4CCA059FC4}" type="datetimeFigureOut">
               <a:rPr lang="en-US" smtClean="0"/>
-              <a:t>1/27/13</a:t>
+              <a:t>8/27/2026</a:t>
             </a:fld>
             <a:endParaRPr lang="en-US"/>
           </a:p>
@@ -2525,7 +2541,7 @@
           <a:p>
             <a:fld id="{5BCAD085-E8A6-8845-BD4E-CB4CCA059FC4}" type="datetimeFigureOut">
               <a:rPr lang="en-US" smtClean="0"/>
-              <a:t>1/27/13</a:t>
+              <a:t>8/27/2026</a:t>
             </a:fld>
             <a:endParaRPr lang="en-US"/>
           </a:p>
@@ -2738,7 +2754,7 @@
           <a:p>
             <a:fld id="{5BCAD085-E8A6-8845-BD4E-CB4CCA059FC4}" type="datetimeFigureOut">
               <a:rPr lang="en-US" smtClean="0"/>
-              <a:t>1/27/13</a:t>
+              <a:t>8/27/2026</a:t>
             </a:fld>
             <a:endParaRPr lang="en-US"/>
           </a:p>
@@ -3097,7 +3113,7 @@
 </file>
 
 <file path=ppt/slides/slide1.xml><?xml version="1.0" encoding="utf-8"?>
-<p:sld xmlns:a="http://schemas.openxmlformats.org/drawingml/2006/main" xmlns:p="http://schemas.openxmlformats.org/presentationml/2006/main" xmlns:r="http://schemas.openxmlformats.org/officeDocument/2006/relationships">
+<p:sld xmlns:a="http://schemas.openxmlformats.org/drawingml/2006/main" xmlns:r="http://schemas.openxmlformats.org/officeDocument/2006/relationships" xmlns:p="http://schemas.openxmlformats.org/presentationml/2006/main">
   <p:cSld>
     <p:spTree>
       <p:nvGrpSpPr>
@@ -3105,7 +3121,14 @@
         <p:cNvGrpSpPr/>
         <p:nvPr/>
       </p:nvGrpSpPr>
-      <p:grpSpPr/>
+      <p:grpSpPr>
+        <a:xfrm>
+          <a:off x="0" y="0"/>
+          <a:ext cx="0" cy="0"/>
+          <a:chOff x="0" y="0"/>
+          <a:chExt cx="0" cy="0"/>
+        </a:xfrm>
+      </p:grpSpPr>
       <p:sp>
         <p:nvSpPr>
           <p:cNvPr id="2" name="Rectangle 1"/>
@@ -3147,6 +3170,7 @@
           <a:lstStyle/>
           <a:p>
             <a:pPr algn="ctr"/>
+            <a:endParaRPr/>
           </a:p>
         </p:txBody>
       </p:sp>
@@ -3191,6 +3215,7 @@
           <a:lstStyle/>
           <a:p>
             <a:pPr algn="ctr"/>
+            <a:endParaRPr/>
           </a:p>
         </p:txBody>
       </p:sp>
@@ -3235,6 +3260,7 @@
           <a:lstStyle/>
           <a:p>
             <a:pPr algn="ctr"/>
+            <a:endParaRPr/>
           </a:p>
         </p:txBody>
       </p:sp>
@@ -3279,6 +3305,7 @@
           <a:lstStyle/>
           <a:p>
             <a:pPr algn="ctr"/>
+            <a:endParaRPr/>
           </a:p>
         </p:txBody>
       </p:sp>
@@ -3291,7 +3318,7 @@
         <p:spPr>
           <a:xfrm>
             <a:off x="640080" y="1234440"/>
-            <a:ext cx="10972800" cy="320040"/>
+            <a:ext cx="10972800" cy="276999"/>
           </a:xfrm>
           <a:prstGeom prst="rect">
             <a:avLst/>
@@ -3306,7 +3333,7 @@
           <a:p>
             <a:pPr algn="l"/>
             <a:r>
-              <a:rPr sz="1200" b="1" i="0">
+              <a:rPr sz="1200" b="1" i="0" dirty="0">
                 <a:solidFill>
                   <a:srgbClr val="C4962C"/>
                 </a:solidFill>
@@ -3314,7 +3341,29 @@
                 <a:ea typeface="Calibri"/>
                 <a:cs typeface="Calibri"/>
               </a:rPr>
-              <a:t>ВНУТРЕННИЙ АУДИТ  ·  БАНК РБ  ·  ОН-ПРЕМ  ·  OPEN WEBUI PIPE</a:t>
+              <a:t>ВНУТРЕННИЙ АУДИТ  </a:t>
+            </a:r>
+            <a:r>
+              <a:rPr sz="1200" b="1" i="0" dirty="0" smtClean="0">
+                <a:solidFill>
+                  <a:srgbClr val="C4962C"/>
+                </a:solidFill>
+                <a:latin typeface="Calibri"/>
+                <a:ea typeface="Calibri"/>
+                <a:cs typeface="Calibri"/>
+              </a:rPr>
+              <a:t>·  </a:t>
+            </a:r>
+            <a:r>
+              <a:rPr sz="1200" b="1" i="0" dirty="0">
+                <a:solidFill>
+                  <a:srgbClr val="C4962C"/>
+                </a:solidFill>
+                <a:latin typeface="Calibri"/>
+                <a:ea typeface="Calibri"/>
+                <a:cs typeface="Calibri"/>
+              </a:rPr>
+              <a:t>OPEN WEBUI PIPE</a:t>
             </a:r>
           </a:p>
         </p:txBody>
@@ -3433,7 +3482,7 @@
           </a:fontRef>
         </p:style>
         <p:txBody>
-          <a:bodyPr rtlCol="0" anchor="ctr" wrap="square" lIns="164592" tIns="146304"/>
+          <a:bodyPr wrap="square" lIns="164592" tIns="146304" rtlCol="0" anchor="ctr"/>
           <a:lstStyle/>
           <a:p>
             <a:pPr algn="l"/>
@@ -3511,7 +3560,7 @@
           </a:fontRef>
         </p:style>
         <p:txBody>
-          <a:bodyPr rtlCol="0" anchor="ctr" wrap="square" lIns="164592" tIns="146304"/>
+          <a:bodyPr wrap="square" lIns="164592" tIns="146304" rtlCol="0" anchor="ctr"/>
           <a:lstStyle/>
           <a:p>
             <a:pPr algn="l"/>
@@ -3589,7 +3638,7 @@
           </a:fontRef>
         </p:style>
         <p:txBody>
-          <a:bodyPr rtlCol="0" anchor="ctr" wrap="square" lIns="164592" tIns="146304"/>
+          <a:bodyPr wrap="square" lIns="164592" tIns="146304" rtlCol="0" anchor="ctr"/>
           <a:lstStyle/>
           <a:p>
             <a:pPr algn="l"/>
@@ -3667,7 +3716,7 @@
           </a:fontRef>
         </p:style>
         <p:txBody>
-          <a:bodyPr rtlCol="0" anchor="ctr" wrap="square" lIns="164592" tIns="146304"/>
+          <a:bodyPr wrap="square" lIns="164592" tIns="146304" rtlCol="0" anchor="ctr"/>
           <a:lstStyle/>
           <a:p>
             <a:pPr algn="l"/>
@@ -3789,7 +3838,7 @@
 </file>
 
 <file path=ppt/slides/slide10.xml><?xml version="1.0" encoding="utf-8"?>
-<p:sld xmlns:a="http://schemas.openxmlformats.org/drawingml/2006/main" xmlns:p="http://schemas.openxmlformats.org/presentationml/2006/main" xmlns:r="http://schemas.openxmlformats.org/officeDocument/2006/relationships">
+<p:sld xmlns:a="http://schemas.openxmlformats.org/drawingml/2006/main" xmlns:r="http://schemas.openxmlformats.org/officeDocument/2006/relationships" xmlns:p="http://schemas.openxmlformats.org/presentationml/2006/main">
   <p:cSld>
     <p:spTree>
       <p:nvGrpSpPr>
@@ -3797,7 +3846,14 @@
         <p:cNvGrpSpPr/>
         <p:nvPr/>
       </p:nvGrpSpPr>
-      <p:grpSpPr/>
+      <p:grpSpPr>
+        <a:xfrm>
+          <a:off x="0" y="0"/>
+          <a:ext cx="0" cy="0"/>
+          <a:chOff x="0" y="0"/>
+          <a:chExt cx="0" cy="0"/>
+        </a:xfrm>
+      </p:grpSpPr>
       <p:sp>
         <p:nvSpPr>
           <p:cNvPr id="2" name="Rectangle 1"/>
@@ -3839,6 +3895,7 @@
           <a:lstStyle/>
           <a:p>
             <a:pPr algn="ctr"/>
+            <a:endParaRPr/>
           </a:p>
         </p:txBody>
       </p:sp>
@@ -3883,6 +3940,7 @@
           <a:lstStyle/>
           <a:p>
             <a:pPr algn="ctr"/>
+            <a:endParaRPr/>
           </a:p>
         </p:txBody>
       </p:sp>
@@ -3927,6 +3985,7 @@
           <a:lstStyle/>
           <a:p>
             <a:pPr algn="ctr"/>
+            <a:endParaRPr/>
           </a:p>
         </p:txBody>
       </p:sp>
@@ -3971,6 +4030,7 @@
           <a:lstStyle/>
           <a:p>
             <a:pPr algn="ctr"/>
+            <a:endParaRPr/>
           </a:p>
         </p:txBody>
       </p:sp>
@@ -4015,6 +4075,7 @@
           <a:lstStyle/>
           <a:p>
             <a:pPr algn="ctr"/>
+            <a:endParaRPr/>
           </a:p>
         </p:txBody>
       </p:sp>
@@ -4131,7 +4192,7 @@
           </a:fontRef>
         </p:style>
         <p:txBody>
-          <a:bodyPr rtlCol="0" anchor="ctr" wrap="square" lIns="320040" tIns="146304"/>
+          <a:bodyPr wrap="square" lIns="320040" tIns="146304" rtlCol="0" anchor="ctr"/>
           <a:lstStyle/>
           <a:p>
             <a:pPr algn="l"/>
@@ -4209,7 +4270,7 @@
           </a:fontRef>
         </p:style>
         <p:txBody>
-          <a:bodyPr rtlCol="0" anchor="ctr" wrap="square" lIns="320040" tIns="146304"/>
+          <a:bodyPr wrap="square" lIns="320040" tIns="146304" rtlCol="0" anchor="ctr"/>
           <a:lstStyle/>
           <a:p>
             <a:pPr algn="l"/>
@@ -4287,7 +4348,7 @@
           </a:fontRef>
         </p:style>
         <p:txBody>
-          <a:bodyPr rtlCol="0" anchor="ctr" wrap="square" lIns="320040" tIns="146304"/>
+          <a:bodyPr wrap="square" lIns="320040" tIns="146304" rtlCol="0" anchor="ctr"/>
           <a:lstStyle/>
           <a:p>
             <a:pPr algn="l"/>
@@ -4365,12 +4426,12 @@
           </a:fontRef>
         </p:style>
         <p:txBody>
-          <a:bodyPr rtlCol="0" anchor="ctr" wrap="square" lIns="320040" tIns="146304"/>
+          <a:bodyPr wrap="square" lIns="320040" tIns="146304" rtlCol="0" anchor="ctr"/>
           <a:lstStyle/>
           <a:p>
             <a:pPr algn="l"/>
             <a:r>
-              <a:rPr sz="1200" b="1" i="0">
+              <a:rPr sz="1200" b="1" i="0" dirty="0">
                 <a:solidFill>
                   <a:srgbClr val="E8C96A"/>
                 </a:solidFill>
@@ -4391,7 +4452,7 @@
               </a:spcAft>
             </a:pPr>
             <a:r>
-              <a:rPr sz="1600" b="0" i="0">
+              <a:rPr sz="1600" b="0" i="0" dirty="0" err="1">
                 <a:solidFill>
                   <a:srgbClr val="FFFFFF"/>
                 </a:solidFill>
@@ -4399,7 +4460,106 @@
                 <a:ea typeface="Calibri"/>
                 <a:cs typeface="Calibri"/>
               </a:rPr>
-              <a:t>Ollama (LLM + embed) · SearXNG (allowlist) · диск кейса. DuckDB — план.</a:t>
+              <a:t>Ollama</a:t>
+            </a:r>
+            <a:r>
+              <a:rPr sz="1600" b="0" i="0" dirty="0">
+                <a:solidFill>
+                  <a:srgbClr val="FFFFFF"/>
+                </a:solidFill>
+                <a:latin typeface="Calibri"/>
+                <a:ea typeface="Calibri"/>
+                <a:cs typeface="Calibri"/>
+              </a:rPr>
+              <a:t> (LLM + embed) · </a:t>
+            </a:r>
+            <a:r>
+              <a:rPr sz="1600" b="0" i="0" dirty="0" err="1">
+                <a:solidFill>
+                  <a:srgbClr val="FFFFFF"/>
+                </a:solidFill>
+                <a:latin typeface="Calibri"/>
+                <a:ea typeface="Calibri"/>
+                <a:cs typeface="Calibri"/>
+              </a:rPr>
+              <a:t>SearXNG</a:t>
+            </a:r>
+            <a:r>
+              <a:rPr sz="1600" b="0" i="0" dirty="0">
+                <a:solidFill>
+                  <a:srgbClr val="FFFFFF"/>
+                </a:solidFill>
+                <a:latin typeface="Calibri"/>
+                <a:ea typeface="Calibri"/>
+                <a:cs typeface="Calibri"/>
+              </a:rPr>
+              <a:t> (</a:t>
+            </a:r>
+            <a:r>
+              <a:rPr sz="1600" b="0" i="0" dirty="0" err="1">
+                <a:solidFill>
+                  <a:srgbClr val="FFFFFF"/>
+                </a:solidFill>
+                <a:latin typeface="Calibri"/>
+                <a:ea typeface="Calibri"/>
+                <a:cs typeface="Calibri"/>
+              </a:rPr>
+              <a:t>allowlist</a:t>
+            </a:r>
+            <a:r>
+              <a:rPr sz="1600" b="0" i="0" dirty="0">
+                <a:solidFill>
+                  <a:srgbClr val="FFFFFF"/>
+                </a:solidFill>
+                <a:latin typeface="Calibri"/>
+                <a:ea typeface="Calibri"/>
+                <a:cs typeface="Calibri"/>
+              </a:rPr>
+              <a:t>) · </a:t>
+            </a:r>
+            <a:r>
+              <a:rPr sz="1600" b="0" i="0" dirty="0" err="1">
+                <a:solidFill>
+                  <a:srgbClr val="FFFFFF"/>
+                </a:solidFill>
+                <a:latin typeface="Calibri"/>
+                <a:ea typeface="Calibri"/>
+                <a:cs typeface="Calibri"/>
+              </a:rPr>
+              <a:t>диск</a:t>
+            </a:r>
+            <a:r>
+              <a:rPr sz="1600" b="0" i="0" dirty="0">
+                <a:solidFill>
+                  <a:srgbClr val="FFFFFF"/>
+                </a:solidFill>
+                <a:latin typeface="Calibri"/>
+                <a:ea typeface="Calibri"/>
+                <a:cs typeface="Calibri"/>
+              </a:rPr>
+              <a:t> </a:t>
+            </a:r>
+            <a:r>
+              <a:rPr sz="1600" b="0" i="0" dirty="0" err="1">
+                <a:solidFill>
+                  <a:srgbClr val="FFFFFF"/>
+                </a:solidFill>
+                <a:latin typeface="Calibri"/>
+                <a:ea typeface="Calibri"/>
+                <a:cs typeface="Calibri"/>
+              </a:rPr>
+              <a:t>кейса</a:t>
+            </a:r>
+            <a:r>
+              <a:rPr sz="1600" b="0" i="0" dirty="0">
+                <a:solidFill>
+                  <a:srgbClr val="FFFFFF"/>
+                </a:solidFill>
+                <a:latin typeface="Calibri"/>
+                <a:ea typeface="Calibri"/>
+                <a:cs typeface="Calibri"/>
+              </a:rPr>
+              <a:t>. </a:t>
             </a:r>
           </a:p>
         </p:txBody>
@@ -4487,7 +4647,7 @@
 </file>
 
 <file path=ppt/slides/slide11.xml><?xml version="1.0" encoding="utf-8"?>
-<p:sld xmlns:a="http://schemas.openxmlformats.org/drawingml/2006/main" xmlns:p="http://schemas.openxmlformats.org/presentationml/2006/main" xmlns:r="http://schemas.openxmlformats.org/officeDocument/2006/relationships">
+<p:sld xmlns:a="http://schemas.openxmlformats.org/drawingml/2006/main" xmlns:r="http://schemas.openxmlformats.org/officeDocument/2006/relationships" xmlns:p="http://schemas.openxmlformats.org/presentationml/2006/main">
   <p:cSld>
     <p:spTree>
       <p:nvGrpSpPr>
@@ -4495,7 +4655,14 @@
         <p:cNvGrpSpPr/>
         <p:nvPr/>
       </p:nvGrpSpPr>
-      <p:grpSpPr/>
+      <p:grpSpPr>
+        <a:xfrm>
+          <a:off x="0" y="0"/>
+          <a:ext cx="0" cy="0"/>
+          <a:chOff x="0" y="0"/>
+          <a:chExt cx="0" cy="0"/>
+        </a:xfrm>
+      </p:grpSpPr>
       <p:sp>
         <p:nvSpPr>
           <p:cNvPr id="2" name="Rectangle 1"/>
@@ -4537,6 +4704,7 @@
           <a:lstStyle/>
           <a:p>
             <a:pPr algn="ctr"/>
+            <a:endParaRPr/>
           </a:p>
         </p:txBody>
       </p:sp>
@@ -4581,6 +4749,7 @@
           <a:lstStyle/>
           <a:p>
             <a:pPr algn="ctr"/>
+            <a:endParaRPr/>
           </a:p>
         </p:txBody>
       </p:sp>
@@ -4625,6 +4794,7 @@
           <a:lstStyle/>
           <a:p>
             <a:pPr algn="ctr"/>
+            <a:endParaRPr/>
           </a:p>
         </p:txBody>
       </p:sp>
@@ -4669,6 +4839,7 @@
           <a:lstStyle/>
           <a:p>
             <a:pPr algn="ctr"/>
+            <a:endParaRPr/>
           </a:p>
         </p:txBody>
       </p:sp>
@@ -4713,6 +4884,7 @@
           <a:lstStyle/>
           <a:p>
             <a:pPr algn="ctr"/>
+            <a:endParaRPr/>
           </a:p>
         </p:txBody>
       </p:sp>
@@ -4835,6 +5007,7 @@
           <a:lstStyle/>
           <a:p>
             <a:pPr algn="ctr"/>
+            <a:endParaRPr/>
           </a:p>
         </p:txBody>
       </p:sp>
@@ -4879,6 +5052,7 @@
           <a:lstStyle/>
           <a:p>
             <a:pPr algn="ctr"/>
+            <a:endParaRPr/>
           </a:p>
         </p:txBody>
       </p:sp>
@@ -5032,7 +5206,7 @@
           </a:fontRef>
         </p:style>
         <p:txBody>
-          <a:bodyPr rtlCol="0" anchor="ctr" wrap="square"/>
+          <a:bodyPr wrap="square" rtlCol="0" anchor="ctr"/>
           <a:lstStyle/>
           <a:p>
             <a:pPr algn="ctr"/>
@@ -5095,6 +5269,7 @@
           <a:lstStyle/>
           <a:p>
             <a:pPr algn="ctr"/>
+            <a:endParaRPr/>
           </a:p>
         </p:txBody>
       </p:sp>
@@ -5139,6 +5314,7 @@
           <a:lstStyle/>
           <a:p>
             <a:pPr algn="ctr"/>
+            <a:endParaRPr/>
           </a:p>
         </p:txBody>
       </p:sp>
@@ -5292,7 +5468,7 @@
           </a:fontRef>
         </p:style>
         <p:txBody>
-          <a:bodyPr rtlCol="0" anchor="ctr" wrap="square"/>
+          <a:bodyPr wrap="square" rtlCol="0" anchor="ctr"/>
           <a:lstStyle/>
           <a:p>
             <a:pPr algn="ctr"/>
@@ -5355,6 +5531,7 @@
           <a:lstStyle/>
           <a:p>
             <a:pPr algn="ctr"/>
+            <a:endParaRPr/>
           </a:p>
         </p:txBody>
       </p:sp>
@@ -5399,6 +5576,7 @@
           <a:lstStyle/>
           <a:p>
             <a:pPr algn="ctr"/>
+            <a:endParaRPr/>
           </a:p>
         </p:txBody>
       </p:sp>
@@ -5552,7 +5730,7 @@
           </a:fontRef>
         </p:style>
         <p:txBody>
-          <a:bodyPr rtlCol="0" anchor="ctr" wrap="square"/>
+          <a:bodyPr wrap="square" rtlCol="0" anchor="ctr"/>
           <a:lstStyle/>
           <a:p>
             <a:pPr algn="ctr"/>
@@ -5653,7 +5831,7 @@
 </file>
 
 <file path=ppt/slides/slide12.xml><?xml version="1.0" encoding="utf-8"?>
-<p:sld xmlns:a="http://schemas.openxmlformats.org/drawingml/2006/main" xmlns:p="http://schemas.openxmlformats.org/presentationml/2006/main" xmlns:r="http://schemas.openxmlformats.org/officeDocument/2006/relationships">
+<p:sld xmlns:a="http://schemas.openxmlformats.org/drawingml/2006/main" xmlns:r="http://schemas.openxmlformats.org/officeDocument/2006/relationships" xmlns:p="http://schemas.openxmlformats.org/presentationml/2006/main">
   <p:cSld>
     <p:spTree>
       <p:nvGrpSpPr>
@@ -5661,7 +5839,14 @@
         <p:cNvGrpSpPr/>
         <p:nvPr/>
       </p:nvGrpSpPr>
-      <p:grpSpPr/>
+      <p:grpSpPr>
+        <a:xfrm>
+          <a:off x="0" y="0"/>
+          <a:ext cx="0" cy="0"/>
+          <a:chOff x="0" y="0"/>
+          <a:chExt cx="0" cy="0"/>
+        </a:xfrm>
+      </p:grpSpPr>
       <p:sp>
         <p:nvSpPr>
           <p:cNvPr id="2" name="Rectangle 1"/>
@@ -5703,6 +5888,7 @@
           <a:lstStyle/>
           <a:p>
             <a:pPr algn="ctr"/>
+            <a:endParaRPr/>
           </a:p>
         </p:txBody>
       </p:sp>
@@ -5747,6 +5933,7 @@
           <a:lstStyle/>
           <a:p>
             <a:pPr algn="ctr"/>
+            <a:endParaRPr/>
           </a:p>
         </p:txBody>
       </p:sp>
@@ -5791,6 +5978,7 @@
           <a:lstStyle/>
           <a:p>
             <a:pPr algn="ctr"/>
+            <a:endParaRPr/>
           </a:p>
         </p:txBody>
       </p:sp>
@@ -5835,6 +6023,7 @@
           <a:lstStyle/>
           <a:p>
             <a:pPr algn="ctr"/>
+            <a:endParaRPr/>
           </a:p>
         </p:txBody>
       </p:sp>
@@ -5879,6 +6068,7 @@
           <a:lstStyle/>
           <a:p>
             <a:pPr algn="ctr"/>
+            <a:endParaRPr/>
           </a:p>
         </p:txBody>
       </p:sp>
@@ -5997,7 +6187,7 @@
           </a:fontRef>
         </p:style>
         <p:txBody>
-          <a:bodyPr rtlCol="0" anchor="ctr" wrap="square" lIns="256032" tIns="182880"/>
+          <a:bodyPr wrap="square" lIns="256032" tIns="182880" rtlCol="0" anchor="ctr"/>
           <a:lstStyle/>
           <a:p>
             <a:pPr algn="l"/>
@@ -6180,7 +6370,7 @@
           </a:fontRef>
         </p:style>
         <p:txBody>
-          <a:bodyPr rtlCol="0" anchor="ctr" wrap="square" lIns="274320" tIns="201168"/>
+          <a:bodyPr wrap="square" lIns="274320" tIns="201168" rtlCol="0" anchor="ctr"/>
           <a:lstStyle/>
           <a:p>
             <a:pPr algn="l"/>
@@ -6491,7 +6681,7 @@
 </file>
 
 <file path=ppt/slides/slide13.xml><?xml version="1.0" encoding="utf-8"?>
-<p:sld xmlns:a="http://schemas.openxmlformats.org/drawingml/2006/main" xmlns:p="http://schemas.openxmlformats.org/presentationml/2006/main" xmlns:r="http://schemas.openxmlformats.org/officeDocument/2006/relationships">
+<p:sld xmlns:a="http://schemas.openxmlformats.org/drawingml/2006/main" xmlns:r="http://schemas.openxmlformats.org/officeDocument/2006/relationships" xmlns:p="http://schemas.openxmlformats.org/presentationml/2006/main">
   <p:cSld>
     <p:spTree>
       <p:nvGrpSpPr>
@@ -6499,7 +6689,14 @@
         <p:cNvGrpSpPr/>
         <p:nvPr/>
       </p:nvGrpSpPr>
-      <p:grpSpPr/>
+      <p:grpSpPr>
+        <a:xfrm>
+          <a:off x="0" y="0"/>
+          <a:ext cx="0" cy="0"/>
+          <a:chOff x="0" y="0"/>
+          <a:chExt cx="0" cy="0"/>
+        </a:xfrm>
+      </p:grpSpPr>
       <p:sp>
         <p:nvSpPr>
           <p:cNvPr id="2" name="Rectangle 1"/>
@@ -6541,6 +6738,7 @@
           <a:lstStyle/>
           <a:p>
             <a:pPr algn="ctr"/>
+            <a:endParaRPr/>
           </a:p>
         </p:txBody>
       </p:sp>
@@ -6585,6 +6783,7 @@
           <a:lstStyle/>
           <a:p>
             <a:pPr algn="ctr"/>
+            <a:endParaRPr/>
           </a:p>
         </p:txBody>
       </p:sp>
@@ -6629,6 +6828,7 @@
           <a:lstStyle/>
           <a:p>
             <a:pPr algn="ctr"/>
+            <a:endParaRPr/>
           </a:p>
         </p:txBody>
       </p:sp>
@@ -6673,6 +6873,7 @@
           <a:lstStyle/>
           <a:p>
             <a:pPr algn="ctr"/>
+            <a:endParaRPr/>
           </a:p>
         </p:txBody>
       </p:sp>
@@ -6717,6 +6918,7 @@
           <a:lstStyle/>
           <a:p>
             <a:pPr algn="ctr"/>
+            <a:endParaRPr/>
           </a:p>
         </p:txBody>
       </p:sp>
@@ -6876,6 +7078,7 @@
           <a:lstStyle/>
           <a:p>
             <a:pPr algn="ctr"/>
+            <a:endParaRPr/>
           </a:p>
         </p:txBody>
       </p:sp>
@@ -6918,7 +7121,7 @@
           </a:fontRef>
         </p:style>
         <p:txBody>
-          <a:bodyPr rtlCol="0" anchor="ctr" wrap="square"/>
+          <a:bodyPr wrap="square" rtlCol="0" anchor="ctr"/>
           <a:lstStyle/>
           <a:p>
             <a:pPr algn="ctr"/>
@@ -7055,6 +7258,7 @@
           <a:lstStyle/>
           <a:p>
             <a:pPr algn="ctr"/>
+            <a:endParaRPr/>
           </a:p>
         </p:txBody>
       </p:sp>
@@ -7097,7 +7301,7 @@
           </a:fontRef>
         </p:style>
         <p:txBody>
-          <a:bodyPr rtlCol="0" anchor="ctr" wrap="square"/>
+          <a:bodyPr wrap="square" rtlCol="0" anchor="ctr"/>
           <a:lstStyle/>
           <a:p>
             <a:pPr algn="ctr"/>
@@ -7234,6 +7438,7 @@
           <a:lstStyle/>
           <a:p>
             <a:pPr algn="ctr"/>
+            <a:endParaRPr/>
           </a:p>
         </p:txBody>
       </p:sp>
@@ -7276,7 +7481,7 @@
           </a:fontRef>
         </p:style>
         <p:txBody>
-          <a:bodyPr rtlCol="0" anchor="ctr" wrap="square"/>
+          <a:bodyPr wrap="square" rtlCol="0" anchor="ctr"/>
           <a:lstStyle/>
           <a:p>
             <a:pPr algn="ctr"/>
@@ -7413,6 +7618,7 @@
           <a:lstStyle/>
           <a:p>
             <a:pPr algn="ctr"/>
+            <a:endParaRPr/>
           </a:p>
         </p:txBody>
       </p:sp>
@@ -7455,7 +7661,7 @@
           </a:fontRef>
         </p:style>
         <p:txBody>
-          <a:bodyPr rtlCol="0" anchor="ctr" wrap="square"/>
+          <a:bodyPr wrap="square" rtlCol="0" anchor="ctr"/>
           <a:lstStyle/>
           <a:p>
             <a:pPr algn="ctr"/>
@@ -7592,6 +7798,7 @@
           <a:lstStyle/>
           <a:p>
             <a:pPr algn="ctr"/>
+            <a:endParaRPr/>
           </a:p>
         </p:txBody>
       </p:sp>
@@ -7634,7 +7841,7 @@
           </a:fontRef>
         </p:style>
         <p:txBody>
-          <a:bodyPr rtlCol="0" anchor="ctr" wrap="square"/>
+          <a:bodyPr wrap="square" rtlCol="0" anchor="ctr"/>
           <a:lstStyle/>
           <a:p>
             <a:pPr algn="ctr"/>
@@ -7771,6 +7978,7 @@
           <a:lstStyle/>
           <a:p>
             <a:pPr algn="ctr"/>
+            <a:endParaRPr/>
           </a:p>
         </p:txBody>
       </p:sp>
@@ -7813,7 +8021,7 @@
           </a:fontRef>
         </p:style>
         <p:txBody>
-          <a:bodyPr rtlCol="0" anchor="ctr" wrap="square"/>
+          <a:bodyPr wrap="square" rtlCol="0" anchor="ctr"/>
           <a:lstStyle/>
           <a:p>
             <a:pPr algn="ctr"/>
@@ -7950,6 +8158,7 @@
           <a:lstStyle/>
           <a:p>
             <a:pPr algn="ctr"/>
+            <a:endParaRPr/>
           </a:p>
         </p:txBody>
       </p:sp>
@@ -7992,7 +8201,7 @@
           </a:fontRef>
         </p:style>
         <p:txBody>
-          <a:bodyPr rtlCol="0" anchor="ctr" wrap="square"/>
+          <a:bodyPr wrap="square" rtlCol="0" anchor="ctr"/>
           <a:lstStyle/>
           <a:p>
             <a:pPr algn="ctr"/>
@@ -8129,6 +8338,7 @@
           <a:lstStyle/>
           <a:p>
             <a:pPr algn="ctr"/>
+            <a:endParaRPr/>
           </a:p>
         </p:txBody>
       </p:sp>
@@ -8171,7 +8381,7 @@
           </a:fontRef>
         </p:style>
         <p:txBody>
-          <a:bodyPr rtlCol="0" anchor="ctr" wrap="square"/>
+          <a:bodyPr wrap="square" rtlCol="0" anchor="ctr"/>
           <a:lstStyle/>
           <a:p>
             <a:pPr algn="ctr"/>
@@ -8308,6 +8518,7 @@
           <a:lstStyle/>
           <a:p>
             <a:pPr algn="ctr"/>
+            <a:endParaRPr/>
           </a:p>
         </p:txBody>
       </p:sp>
@@ -8350,7 +8561,7 @@
           </a:fontRef>
         </p:style>
         <p:txBody>
-          <a:bodyPr rtlCol="0" anchor="ctr" wrap="square"/>
+          <a:bodyPr wrap="square" rtlCol="0" anchor="ctr"/>
           <a:lstStyle/>
           <a:p>
             <a:pPr algn="ctr"/>
@@ -8487,6 +8698,7 @@
           <a:lstStyle/>
           <a:p>
             <a:pPr algn="ctr"/>
+            <a:endParaRPr/>
           </a:p>
         </p:txBody>
       </p:sp>
@@ -8529,7 +8741,7 @@
           </a:fontRef>
         </p:style>
         <p:txBody>
-          <a:bodyPr rtlCol="0" anchor="ctr" wrap="square"/>
+          <a:bodyPr wrap="square" rtlCol="0" anchor="ctr"/>
           <a:lstStyle/>
           <a:p>
             <a:pPr algn="ctr"/>
@@ -8666,6 +8878,7 @@
           <a:lstStyle/>
           <a:p>
             <a:pPr algn="ctr"/>
+            <a:endParaRPr/>
           </a:p>
         </p:txBody>
       </p:sp>
@@ -8708,7 +8921,7 @@
           </a:fontRef>
         </p:style>
         <p:txBody>
-          <a:bodyPr rtlCol="0" anchor="ctr" wrap="square"/>
+          <a:bodyPr wrap="square" rtlCol="0" anchor="ctr"/>
           <a:lstStyle/>
           <a:p>
             <a:pPr algn="ctr"/>
@@ -8845,6 +9058,7 @@
           <a:lstStyle/>
           <a:p>
             <a:pPr algn="ctr"/>
+            <a:endParaRPr/>
           </a:p>
         </p:txBody>
       </p:sp>
@@ -8887,7 +9101,7 @@
           </a:fontRef>
         </p:style>
         <p:txBody>
-          <a:bodyPr rtlCol="0" anchor="ctr" wrap="square"/>
+          <a:bodyPr wrap="square" rtlCol="0" anchor="ctr"/>
           <a:lstStyle/>
           <a:p>
             <a:pPr algn="ctr"/>
@@ -9062,7 +9276,7 @@
 </file>
 
 <file path=ppt/slides/slide14.xml><?xml version="1.0" encoding="utf-8"?>
-<p:sld xmlns:a="http://schemas.openxmlformats.org/drawingml/2006/main" xmlns:p="http://schemas.openxmlformats.org/presentationml/2006/main" xmlns:r="http://schemas.openxmlformats.org/officeDocument/2006/relationships">
+<p:sld xmlns:a="http://schemas.openxmlformats.org/drawingml/2006/main" xmlns:r="http://schemas.openxmlformats.org/officeDocument/2006/relationships" xmlns:p="http://schemas.openxmlformats.org/presentationml/2006/main">
   <p:cSld>
     <p:spTree>
       <p:nvGrpSpPr>
@@ -9070,7 +9284,14 @@
         <p:cNvGrpSpPr/>
         <p:nvPr/>
       </p:nvGrpSpPr>
-      <p:grpSpPr/>
+      <p:grpSpPr>
+        <a:xfrm>
+          <a:off x="0" y="0"/>
+          <a:ext cx="0" cy="0"/>
+          <a:chOff x="0" y="0"/>
+          <a:chExt cx="0" cy="0"/>
+        </a:xfrm>
+      </p:grpSpPr>
       <p:sp>
         <p:nvSpPr>
           <p:cNvPr id="2" name="Rectangle 1"/>
@@ -9112,6 +9333,7 @@
           <a:lstStyle/>
           <a:p>
             <a:pPr algn="ctr"/>
+            <a:endParaRPr/>
           </a:p>
         </p:txBody>
       </p:sp>
@@ -9156,6 +9378,7 @@
           <a:lstStyle/>
           <a:p>
             <a:pPr algn="ctr"/>
+            <a:endParaRPr/>
           </a:p>
         </p:txBody>
       </p:sp>
@@ -9200,6 +9423,7 @@
           <a:lstStyle/>
           <a:p>
             <a:pPr algn="ctr"/>
+            <a:endParaRPr/>
           </a:p>
         </p:txBody>
       </p:sp>
@@ -9244,6 +9468,7 @@
           <a:lstStyle/>
           <a:p>
             <a:pPr algn="ctr"/>
+            <a:endParaRPr/>
           </a:p>
         </p:txBody>
       </p:sp>
@@ -9288,6 +9513,7 @@
           <a:lstStyle/>
           <a:p>
             <a:pPr algn="ctr"/>
+            <a:endParaRPr/>
           </a:p>
         </p:txBody>
       </p:sp>
@@ -9404,7 +9630,7 @@
           </a:fontRef>
         </p:style>
         <p:txBody>
-          <a:bodyPr rtlCol="0" anchor="ctr" wrap="square" tIns="256032"/>
+          <a:bodyPr wrap="square" tIns="256032" rtlCol="0" anchor="ctr"/>
           <a:lstStyle/>
           <a:p>
             <a:pPr algn="ctr"/>
@@ -9504,6 +9730,7 @@
           <a:lstStyle/>
           <a:p>
             <a:pPr algn="ctr"/>
+            <a:endParaRPr/>
           </a:p>
         </p:txBody>
       </p:sp>
@@ -9546,7 +9773,7 @@
           </a:fontRef>
         </p:style>
         <p:txBody>
-          <a:bodyPr rtlCol="0" anchor="ctr" wrap="square" tIns="256032"/>
+          <a:bodyPr wrap="square" tIns="256032" rtlCol="0" anchor="ctr"/>
           <a:lstStyle/>
           <a:p>
             <a:pPr algn="ctr"/>
@@ -9646,6 +9873,7 @@
           <a:lstStyle/>
           <a:p>
             <a:pPr algn="ctr"/>
+            <a:endParaRPr/>
           </a:p>
         </p:txBody>
       </p:sp>
@@ -9688,7 +9916,7 @@
           </a:fontRef>
         </p:style>
         <p:txBody>
-          <a:bodyPr rtlCol="0" anchor="ctr" wrap="square" tIns="256032"/>
+          <a:bodyPr wrap="square" tIns="256032" rtlCol="0" anchor="ctr"/>
           <a:lstStyle/>
           <a:p>
             <a:pPr algn="ctr"/>
@@ -9788,6 +10016,7 @@
           <a:lstStyle/>
           <a:p>
             <a:pPr algn="ctr"/>
+            <a:endParaRPr/>
           </a:p>
         </p:txBody>
       </p:sp>
@@ -9830,7 +10059,7 @@
           </a:fontRef>
         </p:style>
         <p:txBody>
-          <a:bodyPr rtlCol="0" anchor="ctr" wrap="square" tIns="256032"/>
+          <a:bodyPr wrap="square" tIns="256032" rtlCol="0" anchor="ctr"/>
           <a:lstStyle/>
           <a:p>
             <a:pPr algn="ctr"/>
@@ -9930,6 +10159,7 @@
           <a:lstStyle/>
           <a:p>
             <a:pPr algn="ctr"/>
+            <a:endParaRPr/>
           </a:p>
         </p:txBody>
       </p:sp>
@@ -9972,7 +10202,7 @@
           </a:fontRef>
         </p:style>
         <p:txBody>
-          <a:bodyPr rtlCol="0" anchor="ctr" wrap="square" tIns="256032"/>
+          <a:bodyPr wrap="square" tIns="256032" rtlCol="0" anchor="ctr"/>
           <a:lstStyle/>
           <a:p>
             <a:pPr algn="ctr"/>
@@ -10073,7 +10303,7 @@
           </a:fontRef>
         </p:style>
         <p:txBody>
-          <a:bodyPr rtlCol="0" anchor="ctr" wrap="square" lIns="201168" tIns="182880"/>
+          <a:bodyPr wrap="square" lIns="201168" tIns="182880" rtlCol="0" anchor="ctr"/>
           <a:lstStyle/>
           <a:p>
             <a:pPr algn="l"/>
@@ -10153,7 +10383,7 @@
           </a:fontRef>
         </p:style>
         <p:txBody>
-          <a:bodyPr rtlCol="0" anchor="ctr" wrap="square" lIns="201168" tIns="182880"/>
+          <a:bodyPr wrap="square" lIns="201168" tIns="182880" rtlCol="0" anchor="ctr"/>
           <a:lstStyle/>
           <a:p>
             <a:pPr algn="l"/>
@@ -10233,7 +10463,7 @@
           </a:fontRef>
         </p:style>
         <p:txBody>
-          <a:bodyPr rtlCol="0" anchor="ctr" wrap="square" lIns="201168" tIns="182880"/>
+          <a:bodyPr wrap="square" lIns="201168" tIns="182880" rtlCol="0" anchor="ctr"/>
           <a:lstStyle/>
           <a:p>
             <a:pPr algn="l"/>
@@ -10355,7 +10585,7 @@
 </file>
 
 <file path=ppt/slides/slide15.xml><?xml version="1.0" encoding="utf-8"?>
-<p:sld xmlns:a="http://schemas.openxmlformats.org/drawingml/2006/main" xmlns:p="http://schemas.openxmlformats.org/presentationml/2006/main" xmlns:r="http://schemas.openxmlformats.org/officeDocument/2006/relationships">
+<p:sld xmlns:a="http://schemas.openxmlformats.org/drawingml/2006/main" xmlns:r="http://schemas.openxmlformats.org/officeDocument/2006/relationships" xmlns:p="http://schemas.openxmlformats.org/presentationml/2006/main">
   <p:cSld>
     <p:spTree>
       <p:nvGrpSpPr>
@@ -10363,7 +10593,14 @@
         <p:cNvGrpSpPr/>
         <p:nvPr/>
       </p:nvGrpSpPr>
-      <p:grpSpPr/>
+      <p:grpSpPr>
+        <a:xfrm>
+          <a:off x="0" y="0"/>
+          <a:ext cx="0" cy="0"/>
+          <a:chOff x="0" y="0"/>
+          <a:chExt cx="0" cy="0"/>
+        </a:xfrm>
+      </p:grpSpPr>
       <p:sp>
         <p:nvSpPr>
           <p:cNvPr id="2" name="Rectangle 1"/>
@@ -10405,6 +10642,7 @@
           <a:lstStyle/>
           <a:p>
             <a:pPr algn="ctr"/>
+            <a:endParaRPr/>
           </a:p>
         </p:txBody>
       </p:sp>
@@ -10449,6 +10687,7 @@
           <a:lstStyle/>
           <a:p>
             <a:pPr algn="ctr"/>
+            <a:endParaRPr/>
           </a:p>
         </p:txBody>
       </p:sp>
@@ -10493,6 +10732,7 @@
           <a:lstStyle/>
           <a:p>
             <a:pPr algn="ctr"/>
+            <a:endParaRPr/>
           </a:p>
         </p:txBody>
       </p:sp>
@@ -10537,6 +10777,7 @@
           <a:lstStyle/>
           <a:p>
             <a:pPr algn="ctr"/>
+            <a:endParaRPr/>
           </a:p>
         </p:txBody>
       </p:sp>
@@ -10581,6 +10822,7 @@
           <a:lstStyle/>
           <a:p>
             <a:pPr algn="ctr"/>
+            <a:endParaRPr/>
           </a:p>
         </p:txBody>
       </p:sp>
@@ -10699,7 +10941,7 @@
           </a:fontRef>
         </p:style>
         <p:txBody>
-          <a:bodyPr rtlCol="0" anchor="ctr" wrap="square" lIns="256032" tIns="182880"/>
+          <a:bodyPr wrap="square" lIns="256032" tIns="182880" rtlCol="0" anchor="ctr"/>
           <a:lstStyle/>
           <a:p>
             <a:pPr algn="l"/>
@@ -10882,7 +11124,7 @@
           </a:fontRef>
         </p:style>
         <p:txBody>
-          <a:bodyPr rtlCol="0" anchor="ctr" wrap="square" lIns="256032" tIns="201168"/>
+          <a:bodyPr wrap="square" lIns="256032" tIns="201168" rtlCol="0" anchor="ctr"/>
           <a:lstStyle/>
           <a:p>
             <a:pPr algn="l"/>
@@ -10983,7 +11225,7 @@
           </a:fontRef>
         </p:style>
         <p:txBody>
-          <a:bodyPr rtlCol="0" anchor="ctr" wrap="square" lIns="201168" tIns="164592"/>
+          <a:bodyPr wrap="square" lIns="201168" tIns="164592" rtlCol="0" anchor="ctr"/>
           <a:lstStyle/>
           <a:p>
             <a:pPr algn="l"/>
@@ -11126,7 +11368,7 @@
 </file>
 
 <file path=ppt/slides/slide16.xml><?xml version="1.0" encoding="utf-8"?>
-<p:sld xmlns:a="http://schemas.openxmlformats.org/drawingml/2006/main" xmlns:p="http://schemas.openxmlformats.org/presentationml/2006/main" xmlns:r="http://schemas.openxmlformats.org/officeDocument/2006/relationships">
+<p:sld xmlns:a="http://schemas.openxmlformats.org/drawingml/2006/main" xmlns:r="http://schemas.openxmlformats.org/officeDocument/2006/relationships" xmlns:p="http://schemas.openxmlformats.org/presentationml/2006/main">
   <p:cSld>
     <p:spTree>
       <p:nvGrpSpPr>
@@ -11134,7 +11376,14 @@
         <p:cNvGrpSpPr/>
         <p:nvPr/>
       </p:nvGrpSpPr>
-      <p:grpSpPr/>
+      <p:grpSpPr>
+        <a:xfrm>
+          <a:off x="0" y="0"/>
+          <a:ext cx="0" cy="0"/>
+          <a:chOff x="0" y="0"/>
+          <a:chExt cx="0" cy="0"/>
+        </a:xfrm>
+      </p:grpSpPr>
       <p:sp>
         <p:nvSpPr>
           <p:cNvPr id="2" name="Rectangle 1"/>
@@ -11176,6 +11425,7 @@
           <a:lstStyle/>
           <a:p>
             <a:pPr algn="ctr"/>
+            <a:endParaRPr/>
           </a:p>
         </p:txBody>
       </p:sp>
@@ -11220,6 +11470,7 @@
           <a:lstStyle/>
           <a:p>
             <a:pPr algn="ctr"/>
+            <a:endParaRPr/>
           </a:p>
         </p:txBody>
       </p:sp>
@@ -11264,6 +11515,7 @@
           <a:lstStyle/>
           <a:p>
             <a:pPr algn="ctr"/>
+            <a:endParaRPr/>
           </a:p>
         </p:txBody>
       </p:sp>
@@ -11308,6 +11560,7 @@
           <a:lstStyle/>
           <a:p>
             <a:pPr algn="ctr"/>
+            <a:endParaRPr/>
           </a:p>
         </p:txBody>
       </p:sp>
@@ -11352,6 +11605,7 @@
           <a:lstStyle/>
           <a:p>
             <a:pPr algn="ctr"/>
+            <a:endParaRPr/>
           </a:p>
         </p:txBody>
       </p:sp>
@@ -11474,6 +11728,7 @@
           <a:lstStyle/>
           <a:p>
             <a:pPr algn="ctr"/>
+            <a:endParaRPr/>
           </a:p>
         </p:txBody>
       </p:sp>
@@ -11520,6 +11775,7 @@
           <a:lstStyle/>
           <a:p>
             <a:pPr algn="ctr"/>
+            <a:endParaRPr/>
           </a:p>
         </p:txBody>
       </p:sp>
@@ -11642,6 +11898,7 @@
           <a:lstStyle/>
           <a:p>
             <a:pPr algn="ctr"/>
+            <a:endParaRPr/>
           </a:p>
         </p:txBody>
       </p:sp>
@@ -11688,6 +11945,7 @@
           <a:lstStyle/>
           <a:p>
             <a:pPr algn="ctr"/>
+            <a:endParaRPr/>
           </a:p>
         </p:txBody>
       </p:sp>
@@ -11810,6 +12068,7 @@
           <a:lstStyle/>
           <a:p>
             <a:pPr algn="ctr"/>
+            <a:endParaRPr/>
           </a:p>
         </p:txBody>
       </p:sp>
@@ -11856,6 +12115,7 @@
           <a:lstStyle/>
           <a:p>
             <a:pPr algn="ctr"/>
+            <a:endParaRPr/>
           </a:p>
         </p:txBody>
       </p:sp>
@@ -11978,6 +12238,7 @@
           <a:lstStyle/>
           <a:p>
             <a:pPr algn="ctr"/>
+            <a:endParaRPr/>
           </a:p>
         </p:txBody>
       </p:sp>
@@ -12024,6 +12285,7 @@
           <a:lstStyle/>
           <a:p>
             <a:pPr algn="ctr"/>
+            <a:endParaRPr/>
           </a:p>
         </p:txBody>
       </p:sp>
@@ -12146,6 +12408,7 @@
           <a:lstStyle/>
           <a:p>
             <a:pPr algn="ctr"/>
+            <a:endParaRPr/>
           </a:p>
         </p:txBody>
       </p:sp>
@@ -12192,6 +12455,7 @@
           <a:lstStyle/>
           <a:p>
             <a:pPr algn="ctr"/>
+            <a:endParaRPr/>
           </a:p>
         </p:txBody>
       </p:sp>
@@ -12314,6 +12578,7 @@
           <a:lstStyle/>
           <a:p>
             <a:pPr algn="ctr"/>
+            <a:endParaRPr/>
           </a:p>
         </p:txBody>
       </p:sp>
@@ -12360,6 +12625,7 @@
           <a:lstStyle/>
           <a:p>
             <a:pPr algn="ctr"/>
+            <a:endParaRPr/>
           </a:p>
         </p:txBody>
       </p:sp>
@@ -12520,7 +12786,7 @@
 </file>
 
 <file path=ppt/slides/slide17.xml><?xml version="1.0" encoding="utf-8"?>
-<p:sld xmlns:a="http://schemas.openxmlformats.org/drawingml/2006/main" xmlns:p="http://schemas.openxmlformats.org/presentationml/2006/main" xmlns:r="http://schemas.openxmlformats.org/officeDocument/2006/relationships">
+<p:sld xmlns:a="http://schemas.openxmlformats.org/drawingml/2006/main" xmlns:r="http://schemas.openxmlformats.org/officeDocument/2006/relationships" xmlns:p="http://schemas.openxmlformats.org/presentationml/2006/main">
   <p:cSld>
     <p:spTree>
       <p:nvGrpSpPr>
@@ -12528,7 +12794,14 @@
         <p:cNvGrpSpPr/>
         <p:nvPr/>
       </p:nvGrpSpPr>
-      <p:grpSpPr/>
+      <p:grpSpPr>
+        <a:xfrm>
+          <a:off x="0" y="0"/>
+          <a:ext cx="0" cy="0"/>
+          <a:chOff x="0" y="0"/>
+          <a:chExt cx="0" cy="0"/>
+        </a:xfrm>
+      </p:grpSpPr>
       <p:sp>
         <p:nvSpPr>
           <p:cNvPr id="2" name="Rectangle 1"/>
@@ -12570,6 +12843,7 @@
           <a:lstStyle/>
           <a:p>
             <a:pPr algn="ctr"/>
+            <a:endParaRPr/>
           </a:p>
         </p:txBody>
       </p:sp>
@@ -12614,6 +12888,7 @@
           <a:lstStyle/>
           <a:p>
             <a:pPr algn="ctr"/>
+            <a:endParaRPr/>
           </a:p>
         </p:txBody>
       </p:sp>
@@ -12658,6 +12933,7 @@
           <a:lstStyle/>
           <a:p>
             <a:pPr algn="ctr"/>
+            <a:endParaRPr/>
           </a:p>
         </p:txBody>
       </p:sp>
@@ -12702,6 +12978,7 @@
           <a:lstStyle/>
           <a:p>
             <a:pPr algn="ctr"/>
+            <a:endParaRPr/>
           </a:p>
         </p:txBody>
       </p:sp>
@@ -12746,6 +13023,7 @@
           <a:lstStyle/>
           <a:p>
             <a:pPr algn="ctr"/>
+            <a:endParaRPr/>
           </a:p>
         </p:txBody>
       </p:sp>
@@ -12899,7 +13177,7 @@
           </a:fontRef>
         </p:style>
         <p:txBody>
-          <a:bodyPr rtlCol="0" anchor="ctr" wrap="square"/>
+          <a:bodyPr wrap="square" rtlCol="0" anchor="ctr"/>
           <a:lstStyle/>
           <a:p>
             <a:pPr algn="ctr"/>
@@ -12958,7 +13236,7 @@
           </a:fontRef>
         </p:style>
         <p:txBody>
-          <a:bodyPr rtlCol="0" anchor="ctr" wrap="square" lIns="201168" tIns="164592"/>
+          <a:bodyPr wrap="square" lIns="201168" tIns="164592" rtlCol="0" anchor="ctr"/>
           <a:lstStyle/>
           <a:p>
             <a:pPr algn="l"/>
@@ -13122,7 +13400,7 @@
           </a:fontRef>
         </p:style>
         <p:txBody>
-          <a:bodyPr rtlCol="0" anchor="ctr" wrap="square" lIns="201168" tIns="164592"/>
+          <a:bodyPr wrap="square" lIns="201168" tIns="164592" rtlCol="0" anchor="ctr"/>
           <a:lstStyle/>
           <a:p>
             <a:pPr algn="l"/>
@@ -13286,7 +13564,7 @@
           </a:fontRef>
         </p:style>
         <p:txBody>
-          <a:bodyPr rtlCol="0" anchor="ctr" wrap="square" lIns="201168" tIns="164592"/>
+          <a:bodyPr wrap="square" lIns="201168" tIns="164592" rtlCol="0" anchor="ctr"/>
           <a:lstStyle/>
           <a:p>
             <a:pPr algn="l"/>
@@ -13492,7 +13770,7 @@
 </file>
 
 <file path=ppt/slides/slide18.xml><?xml version="1.0" encoding="utf-8"?>
-<p:sld xmlns:a="http://schemas.openxmlformats.org/drawingml/2006/main" xmlns:p="http://schemas.openxmlformats.org/presentationml/2006/main" xmlns:r="http://schemas.openxmlformats.org/officeDocument/2006/relationships">
+<p:sld xmlns:a="http://schemas.openxmlformats.org/drawingml/2006/main" xmlns:r="http://schemas.openxmlformats.org/officeDocument/2006/relationships" xmlns:p="http://schemas.openxmlformats.org/presentationml/2006/main">
   <p:cSld>
     <p:spTree>
       <p:nvGrpSpPr>
@@ -13500,7 +13778,14 @@
         <p:cNvGrpSpPr/>
         <p:nvPr/>
       </p:nvGrpSpPr>
-      <p:grpSpPr/>
+      <p:grpSpPr>
+        <a:xfrm>
+          <a:off x="0" y="0"/>
+          <a:ext cx="0" cy="0"/>
+          <a:chOff x="0" y="0"/>
+          <a:chExt cx="0" cy="0"/>
+        </a:xfrm>
+      </p:grpSpPr>
       <p:sp>
         <p:nvSpPr>
           <p:cNvPr id="2" name="Rectangle 1"/>
@@ -13542,6 +13827,7 @@
           <a:lstStyle/>
           <a:p>
             <a:pPr algn="ctr"/>
+            <a:endParaRPr/>
           </a:p>
         </p:txBody>
       </p:sp>
@@ -13586,6 +13872,7 @@
           <a:lstStyle/>
           <a:p>
             <a:pPr algn="ctr"/>
+            <a:endParaRPr/>
           </a:p>
         </p:txBody>
       </p:sp>
@@ -13630,6 +13917,7 @@
           <a:lstStyle/>
           <a:p>
             <a:pPr algn="ctr"/>
+            <a:endParaRPr/>
           </a:p>
         </p:txBody>
       </p:sp>
@@ -13674,6 +13962,7 @@
           <a:lstStyle/>
           <a:p>
             <a:pPr algn="ctr"/>
+            <a:endParaRPr/>
           </a:p>
         </p:txBody>
       </p:sp>
@@ -13718,6 +14007,7 @@
           <a:lstStyle/>
           <a:p>
             <a:pPr algn="ctr"/>
+            <a:endParaRPr/>
           </a:p>
         </p:txBody>
       </p:sp>
@@ -13838,6 +14128,7 @@
           <a:lstStyle/>
           <a:p>
             <a:pPr algn="ctr"/>
+            <a:endParaRPr/>
           </a:p>
         </p:txBody>
       </p:sp>
@@ -13958,6 +14249,7 @@
           <a:lstStyle/>
           <a:p>
             <a:pPr algn="ctr"/>
+            <a:endParaRPr/>
           </a:p>
         </p:txBody>
       </p:sp>
@@ -14078,6 +14370,7 @@
           <a:lstStyle/>
           <a:p>
             <a:pPr algn="ctr"/>
+            <a:endParaRPr/>
           </a:p>
         </p:txBody>
       </p:sp>
@@ -14200,6 +14493,7 @@
           <a:lstStyle/>
           <a:p>
             <a:pPr algn="ctr"/>
+            <a:endParaRPr/>
           </a:p>
         </p:txBody>
       </p:sp>
@@ -14322,6 +14616,7 @@
           <a:lstStyle/>
           <a:p>
             <a:pPr algn="ctr"/>
+            <a:endParaRPr/>
           </a:p>
         </p:txBody>
       </p:sp>
@@ -14444,6 +14739,7 @@
           <a:lstStyle/>
           <a:p>
             <a:pPr algn="ctr"/>
+            <a:endParaRPr/>
           </a:p>
         </p:txBody>
       </p:sp>
@@ -14604,7 +14900,7 @@
 </file>
 
 <file path=ppt/slides/slide19.xml><?xml version="1.0" encoding="utf-8"?>
-<p:sld xmlns:a="http://schemas.openxmlformats.org/drawingml/2006/main" xmlns:p="http://schemas.openxmlformats.org/presentationml/2006/main" xmlns:r="http://schemas.openxmlformats.org/officeDocument/2006/relationships">
+<p:sld xmlns:a="http://schemas.openxmlformats.org/drawingml/2006/main" xmlns:r="http://schemas.openxmlformats.org/officeDocument/2006/relationships" xmlns:p="http://schemas.openxmlformats.org/presentationml/2006/main">
   <p:cSld>
     <p:spTree>
       <p:nvGrpSpPr>
@@ -14612,7 +14908,14 @@
         <p:cNvGrpSpPr/>
         <p:nvPr/>
       </p:nvGrpSpPr>
-      <p:grpSpPr/>
+      <p:grpSpPr>
+        <a:xfrm>
+          <a:off x="0" y="0"/>
+          <a:ext cx="0" cy="0"/>
+          <a:chOff x="0" y="0"/>
+          <a:chExt cx="0" cy="0"/>
+        </a:xfrm>
+      </p:grpSpPr>
       <p:sp>
         <p:nvSpPr>
           <p:cNvPr id="2" name="Rectangle 1"/>
@@ -14654,6 +14957,7 @@
           <a:lstStyle/>
           <a:p>
             <a:pPr algn="ctr"/>
+            <a:endParaRPr/>
           </a:p>
         </p:txBody>
       </p:sp>
@@ -14698,6 +15002,7 @@
           <a:lstStyle/>
           <a:p>
             <a:pPr algn="ctr"/>
+            <a:endParaRPr/>
           </a:p>
         </p:txBody>
       </p:sp>
@@ -14742,6 +15047,7 @@
           <a:lstStyle/>
           <a:p>
             <a:pPr algn="ctr"/>
+            <a:endParaRPr/>
           </a:p>
         </p:txBody>
       </p:sp>
@@ -14786,6 +15092,7 @@
           <a:lstStyle/>
           <a:p>
             <a:pPr algn="ctr"/>
+            <a:endParaRPr/>
           </a:p>
         </p:txBody>
       </p:sp>
@@ -14902,7 +15209,7 @@
           </a:fontRef>
         </p:style>
         <p:txBody>
-          <a:bodyPr rtlCol="0" anchor="ctr" wrap="square" lIns="256032" tIns="201168"/>
+          <a:bodyPr wrap="square" lIns="256032" tIns="201168" rtlCol="0" anchor="ctr"/>
           <a:lstStyle/>
           <a:p>
             <a:pPr algn="l"/>
@@ -15085,7 +15392,7 @@
           </a:fontRef>
         </p:style>
         <p:txBody>
-          <a:bodyPr rtlCol="0" anchor="ctr" wrap="square" lIns="256032" tIns="201168"/>
+          <a:bodyPr wrap="square" lIns="256032" tIns="201168" rtlCol="0" anchor="ctr"/>
           <a:lstStyle/>
           <a:p>
             <a:pPr algn="l"/>
@@ -15270,7 +15577,7 @@
 </file>
 
 <file path=ppt/slides/slide2.xml><?xml version="1.0" encoding="utf-8"?>
-<p:sld xmlns:a="http://schemas.openxmlformats.org/drawingml/2006/main" xmlns:p="http://schemas.openxmlformats.org/presentationml/2006/main" xmlns:r="http://schemas.openxmlformats.org/officeDocument/2006/relationships">
+<p:sld xmlns:a="http://schemas.openxmlformats.org/drawingml/2006/main" xmlns:r="http://schemas.openxmlformats.org/officeDocument/2006/relationships" xmlns:p="http://schemas.openxmlformats.org/presentationml/2006/main">
   <p:cSld>
     <p:spTree>
       <p:nvGrpSpPr>
@@ -15278,7 +15585,14 @@
         <p:cNvGrpSpPr/>
         <p:nvPr/>
       </p:nvGrpSpPr>
-      <p:grpSpPr/>
+      <p:grpSpPr>
+        <a:xfrm>
+          <a:off x="0" y="0"/>
+          <a:ext cx="0" cy="0"/>
+          <a:chOff x="0" y="0"/>
+          <a:chExt cx="0" cy="0"/>
+        </a:xfrm>
+      </p:grpSpPr>
       <p:sp>
         <p:nvSpPr>
           <p:cNvPr id="2" name="Rectangle 1"/>
@@ -15320,6 +15634,7 @@
           <a:lstStyle/>
           <a:p>
             <a:pPr algn="ctr"/>
+            <a:endParaRPr/>
           </a:p>
         </p:txBody>
       </p:sp>
@@ -15364,6 +15679,7 @@
           <a:lstStyle/>
           <a:p>
             <a:pPr algn="ctr"/>
+            <a:endParaRPr/>
           </a:p>
         </p:txBody>
       </p:sp>
@@ -15408,6 +15724,7 @@
           <a:lstStyle/>
           <a:p>
             <a:pPr algn="ctr"/>
+            <a:endParaRPr/>
           </a:p>
         </p:txBody>
       </p:sp>
@@ -15452,6 +15769,7 @@
           <a:lstStyle/>
           <a:p>
             <a:pPr algn="ctr"/>
+            <a:endParaRPr/>
           </a:p>
         </p:txBody>
       </p:sp>
@@ -15496,6 +15814,7 @@
           <a:lstStyle/>
           <a:p>
             <a:pPr algn="ctr"/>
+            <a:endParaRPr/>
           </a:p>
         </p:txBody>
       </p:sp>
@@ -15618,6 +15937,7 @@
           <a:lstStyle/>
           <a:p>
             <a:pPr algn="ctr"/>
+            <a:endParaRPr/>
           </a:p>
         </p:txBody>
       </p:sp>
@@ -15777,6 +16097,7 @@
           <a:lstStyle/>
           <a:p>
             <a:pPr algn="ctr"/>
+            <a:endParaRPr/>
           </a:p>
         </p:txBody>
       </p:sp>
@@ -15936,6 +16257,7 @@
           <a:lstStyle/>
           <a:p>
             <a:pPr algn="ctr"/>
+            <a:endParaRPr/>
           </a:p>
         </p:txBody>
       </p:sp>
@@ -16095,6 +16417,7 @@
           <a:lstStyle/>
           <a:p>
             <a:pPr algn="ctr"/>
+            <a:endParaRPr/>
           </a:p>
         </p:txBody>
       </p:sp>
@@ -16254,6 +16577,7 @@
           <a:lstStyle/>
           <a:p>
             <a:pPr algn="ctr"/>
+            <a:endParaRPr/>
           </a:p>
         </p:txBody>
       </p:sp>
@@ -16413,6 +16737,7 @@
           <a:lstStyle/>
           <a:p>
             <a:pPr algn="ctr"/>
+            <a:endParaRPr/>
           </a:p>
         </p:txBody>
       </p:sp>
@@ -16610,7 +16935,7 @@
 </file>
 
 <file path=ppt/slides/slide3.xml><?xml version="1.0" encoding="utf-8"?>
-<p:sld xmlns:a="http://schemas.openxmlformats.org/drawingml/2006/main" xmlns:p="http://schemas.openxmlformats.org/presentationml/2006/main" xmlns:r="http://schemas.openxmlformats.org/officeDocument/2006/relationships">
+<p:sld xmlns:a="http://schemas.openxmlformats.org/drawingml/2006/main" xmlns:r="http://schemas.openxmlformats.org/officeDocument/2006/relationships" xmlns:p="http://schemas.openxmlformats.org/presentationml/2006/main">
   <p:cSld>
     <p:spTree>
       <p:nvGrpSpPr>
@@ -16618,7 +16943,14 @@
         <p:cNvGrpSpPr/>
         <p:nvPr/>
       </p:nvGrpSpPr>
-      <p:grpSpPr/>
+      <p:grpSpPr>
+        <a:xfrm>
+          <a:off x="0" y="0"/>
+          <a:ext cx="0" cy="0"/>
+          <a:chOff x="0" y="0"/>
+          <a:chExt cx="0" cy="0"/>
+        </a:xfrm>
+      </p:grpSpPr>
       <p:sp>
         <p:nvSpPr>
           <p:cNvPr id="2" name="Rectangle 1"/>
@@ -16660,6 +16992,7 @@
           <a:lstStyle/>
           <a:p>
             <a:pPr algn="ctr"/>
+            <a:endParaRPr/>
           </a:p>
         </p:txBody>
       </p:sp>
@@ -16704,6 +17037,7 @@
           <a:lstStyle/>
           <a:p>
             <a:pPr algn="ctr"/>
+            <a:endParaRPr/>
           </a:p>
         </p:txBody>
       </p:sp>
@@ -16748,6 +17082,7 @@
           <a:lstStyle/>
           <a:p>
             <a:pPr algn="ctr"/>
+            <a:endParaRPr/>
           </a:p>
         </p:txBody>
       </p:sp>
@@ -16792,6 +17127,7 @@
           <a:lstStyle/>
           <a:p>
             <a:pPr algn="ctr"/>
+            <a:endParaRPr/>
           </a:p>
         </p:txBody>
       </p:sp>
@@ -16836,6 +17172,7 @@
           <a:lstStyle/>
           <a:p>
             <a:pPr algn="ctr"/>
+            <a:endParaRPr/>
           </a:p>
         </p:txBody>
       </p:sp>
@@ -16958,6 +17295,7 @@
           <a:lstStyle/>
           <a:p>
             <a:pPr algn="ctr"/>
+            <a:endParaRPr/>
           </a:p>
         </p:txBody>
       </p:sp>
@@ -17000,7 +17338,7 @@
           </a:fontRef>
         </p:style>
         <p:txBody>
-          <a:bodyPr rtlCol="0" anchor="ctr" wrap="square"/>
+          <a:bodyPr wrap="square" rtlCol="0" anchor="ctr"/>
           <a:lstStyle/>
           <a:p>
             <a:pPr algn="ctr"/>
@@ -17137,6 +17475,7 @@
           <a:lstStyle/>
           <a:p>
             <a:pPr algn="ctr"/>
+            <a:endParaRPr/>
           </a:p>
         </p:txBody>
       </p:sp>
@@ -17179,7 +17518,7 @@
           </a:fontRef>
         </p:style>
         <p:txBody>
-          <a:bodyPr rtlCol="0" anchor="ctr" wrap="square"/>
+          <a:bodyPr wrap="square" rtlCol="0" anchor="ctr"/>
           <a:lstStyle/>
           <a:p>
             <a:pPr algn="ctr"/>
@@ -17316,6 +17655,7 @@
           <a:lstStyle/>
           <a:p>
             <a:pPr algn="ctr"/>
+            <a:endParaRPr/>
           </a:p>
         </p:txBody>
       </p:sp>
@@ -17358,7 +17698,7 @@
           </a:fontRef>
         </p:style>
         <p:txBody>
-          <a:bodyPr rtlCol="0" anchor="ctr" wrap="square"/>
+          <a:bodyPr wrap="square" rtlCol="0" anchor="ctr"/>
           <a:lstStyle/>
           <a:p>
             <a:pPr algn="ctr"/>
@@ -17495,6 +17835,7 @@
           <a:lstStyle/>
           <a:p>
             <a:pPr algn="ctr"/>
+            <a:endParaRPr/>
           </a:p>
         </p:txBody>
       </p:sp>
@@ -17537,7 +17878,7 @@
           </a:fontRef>
         </p:style>
         <p:txBody>
-          <a:bodyPr rtlCol="0" anchor="ctr" wrap="square"/>
+          <a:bodyPr wrap="square" rtlCol="0" anchor="ctr"/>
           <a:lstStyle/>
           <a:p>
             <a:pPr algn="ctr"/>
@@ -17668,7 +18009,7 @@
           </a:fontRef>
         </p:style>
         <p:txBody>
-          <a:bodyPr rtlCol="0" anchor="ctr" wrap="square" lIns="256032" tIns="274320"/>
+          <a:bodyPr wrap="square" lIns="256032" tIns="274320" rtlCol="0" anchor="ctr"/>
           <a:lstStyle/>
           <a:p>
             <a:pPr algn="l"/>
@@ -17834,7 +18175,7 @@
 </file>
 
 <file path=ppt/slides/slide4.xml><?xml version="1.0" encoding="utf-8"?>
-<p:sld xmlns:a="http://schemas.openxmlformats.org/drawingml/2006/main" xmlns:p="http://schemas.openxmlformats.org/presentationml/2006/main" xmlns:r="http://schemas.openxmlformats.org/officeDocument/2006/relationships">
+<p:sld xmlns:a="http://schemas.openxmlformats.org/drawingml/2006/main" xmlns:r="http://schemas.openxmlformats.org/officeDocument/2006/relationships" xmlns:p="http://schemas.openxmlformats.org/presentationml/2006/main">
   <p:cSld>
     <p:spTree>
       <p:nvGrpSpPr>
@@ -17842,7 +18183,14 @@
         <p:cNvGrpSpPr/>
         <p:nvPr/>
       </p:nvGrpSpPr>
-      <p:grpSpPr/>
+      <p:grpSpPr>
+        <a:xfrm>
+          <a:off x="0" y="0"/>
+          <a:ext cx="0" cy="0"/>
+          <a:chOff x="0" y="0"/>
+          <a:chExt cx="0" cy="0"/>
+        </a:xfrm>
+      </p:grpSpPr>
       <p:sp>
         <p:nvSpPr>
           <p:cNvPr id="2" name="Rectangle 1"/>
@@ -17884,6 +18232,7 @@
           <a:lstStyle/>
           <a:p>
             <a:pPr algn="ctr"/>
+            <a:endParaRPr/>
           </a:p>
         </p:txBody>
       </p:sp>
@@ -17928,6 +18277,7 @@
           <a:lstStyle/>
           <a:p>
             <a:pPr algn="ctr"/>
+            <a:endParaRPr/>
           </a:p>
         </p:txBody>
       </p:sp>
@@ -17972,6 +18322,7 @@
           <a:lstStyle/>
           <a:p>
             <a:pPr algn="ctr"/>
+            <a:endParaRPr/>
           </a:p>
         </p:txBody>
       </p:sp>
@@ -18016,6 +18367,7 @@
           <a:lstStyle/>
           <a:p>
             <a:pPr algn="ctr"/>
+            <a:endParaRPr/>
           </a:p>
         </p:txBody>
       </p:sp>
@@ -18060,6 +18412,7 @@
           <a:lstStyle/>
           <a:p>
             <a:pPr algn="ctr"/>
+            <a:endParaRPr/>
           </a:p>
         </p:txBody>
       </p:sp>
@@ -18109,7 +18462,7 @@
         <p:spPr>
           <a:xfrm>
             <a:off x="502920" y="475488"/>
-            <a:ext cx="11155680" cy="640080"/>
+            <a:ext cx="11155680" cy="523220"/>
           </a:xfrm>
           <a:prstGeom prst="rect">
             <a:avLst/>
@@ -18124,7 +18477,7 @@
           <a:p>
             <a:pPr algn="l"/>
             <a:r>
-              <a:rPr sz="2800" b="1" i="0">
+              <a:rPr sz="2800" b="1" i="0" dirty="0" err="1" smtClean="0">
                 <a:solidFill>
                   <a:srgbClr val="142233"/>
                 </a:solidFill>
@@ -18132,8 +18485,82 @@
                 <a:ea typeface="Calibri"/>
                 <a:cs typeface="Calibri"/>
               </a:rPr>
-              <a:t>Коробка уровня Cursor — для внутренней проверки</a:t>
-            </a:r>
+              <a:t>Коробка</a:t>
+            </a:r>
+            <a:r>
+              <a:rPr sz="2800" b="1" i="0" dirty="0" smtClean="0">
+                <a:solidFill>
+                  <a:srgbClr val="142233"/>
+                </a:solidFill>
+                <a:latin typeface="Calibri"/>
+                <a:ea typeface="Calibri"/>
+                <a:cs typeface="Calibri"/>
+              </a:rPr>
+              <a:t>— </a:t>
+            </a:r>
+            <a:r>
+              <a:rPr sz="2800" b="1" i="0" dirty="0" err="1">
+                <a:solidFill>
+                  <a:srgbClr val="142233"/>
+                </a:solidFill>
+                <a:latin typeface="Calibri"/>
+                <a:ea typeface="Calibri"/>
+                <a:cs typeface="Calibri"/>
+              </a:rPr>
+              <a:t>для</a:t>
+            </a:r>
+            <a:r>
+              <a:rPr sz="2800" b="1" i="0" dirty="0">
+                <a:solidFill>
+                  <a:srgbClr val="142233"/>
+                </a:solidFill>
+                <a:latin typeface="Calibri"/>
+                <a:ea typeface="Calibri"/>
+                <a:cs typeface="Calibri"/>
+              </a:rPr>
+              <a:t> </a:t>
+            </a:r>
+            <a:r>
+              <a:rPr sz="2800" b="1" i="0" dirty="0" err="1">
+                <a:solidFill>
+                  <a:srgbClr val="142233"/>
+                </a:solidFill>
+                <a:latin typeface="Calibri"/>
+                <a:ea typeface="Calibri"/>
+                <a:cs typeface="Calibri"/>
+              </a:rPr>
+              <a:t>внутренней</a:t>
+            </a:r>
+            <a:r>
+              <a:rPr sz="2800" b="1" i="0" dirty="0">
+                <a:solidFill>
+                  <a:srgbClr val="142233"/>
+                </a:solidFill>
+                <a:latin typeface="Calibri"/>
+                <a:ea typeface="Calibri"/>
+                <a:cs typeface="Calibri"/>
+              </a:rPr>
+              <a:t> </a:t>
+            </a:r>
+            <a:r>
+              <a:rPr sz="2800" b="1" i="0" dirty="0" err="1">
+                <a:solidFill>
+                  <a:srgbClr val="142233"/>
+                </a:solidFill>
+                <a:latin typeface="Calibri"/>
+                <a:ea typeface="Calibri"/>
+                <a:cs typeface="Calibri"/>
+              </a:rPr>
+              <a:t>проверки</a:t>
+            </a:r>
+            <a:endParaRPr sz="2800" b="1" i="0" dirty="0">
+              <a:solidFill>
+                <a:srgbClr val="142233"/>
+              </a:solidFill>
+              <a:latin typeface="Calibri"/>
+              <a:ea typeface="Calibri"/>
+              <a:cs typeface="Calibri"/>
+            </a:endParaRPr>
           </a:p>
         </p:txBody>
       </p:sp>
@@ -18146,7 +18573,7 @@
         <p:spPr>
           <a:xfrm>
             <a:off x="502920" y="1143000"/>
-            <a:ext cx="11155680" cy="502920"/>
+            <a:ext cx="11155680" cy="323165"/>
           </a:xfrm>
           <a:prstGeom prst="rect">
             <a:avLst/>
@@ -18161,7 +18588,7 @@
           <a:p>
             <a:pPr algn="l"/>
             <a:r>
-              <a:rPr sz="1500" b="0" i="0">
+              <a:rPr sz="1500" b="0" i="0" dirty="0" smtClean="0">
                 <a:solidFill>
                   <a:srgbClr val="3D4F61"/>
                 </a:solidFill>
@@ -18169,7 +18596,95 @@
                 <a:ea typeface="Calibri"/>
                 <a:cs typeface="Calibri"/>
               </a:rPr>
-              <a:t>Cursor победил не тем, что написал IDE с нуля. Он взял VS Code и сделал законченный продукт. Мы делаем то же со стеком Open WebUI + Ollama + SearXNG + тонкий Audit Tool Server.</a:t>
+              <a:t>Open </a:t>
+            </a:r>
+            <a:r>
+              <a:rPr sz="1500" b="0" i="0" dirty="0" err="1">
+                <a:solidFill>
+                  <a:srgbClr val="3D4F61"/>
+                </a:solidFill>
+                <a:latin typeface="Calibri"/>
+                <a:ea typeface="Calibri"/>
+                <a:cs typeface="Calibri"/>
+              </a:rPr>
+              <a:t>WebUI</a:t>
+            </a:r>
+            <a:r>
+              <a:rPr sz="1500" b="0" i="0" dirty="0">
+                <a:solidFill>
+                  <a:srgbClr val="3D4F61"/>
+                </a:solidFill>
+                <a:latin typeface="Calibri"/>
+                <a:ea typeface="Calibri"/>
+                <a:cs typeface="Calibri"/>
+              </a:rPr>
+              <a:t> + </a:t>
+            </a:r>
+            <a:r>
+              <a:rPr sz="1500" b="0" i="0" dirty="0" err="1">
+                <a:solidFill>
+                  <a:srgbClr val="3D4F61"/>
+                </a:solidFill>
+                <a:latin typeface="Calibri"/>
+                <a:ea typeface="Calibri"/>
+                <a:cs typeface="Calibri"/>
+              </a:rPr>
+              <a:t>Ollama</a:t>
+            </a:r>
+            <a:r>
+              <a:rPr sz="1500" b="0" i="0" dirty="0">
+                <a:solidFill>
+                  <a:srgbClr val="3D4F61"/>
+                </a:solidFill>
+                <a:latin typeface="Calibri"/>
+                <a:ea typeface="Calibri"/>
+                <a:cs typeface="Calibri"/>
+              </a:rPr>
+              <a:t> + </a:t>
+            </a:r>
+            <a:r>
+              <a:rPr sz="1500" b="0" i="0" dirty="0" err="1">
+                <a:solidFill>
+                  <a:srgbClr val="3D4F61"/>
+                </a:solidFill>
+                <a:latin typeface="Calibri"/>
+                <a:ea typeface="Calibri"/>
+                <a:cs typeface="Calibri"/>
+              </a:rPr>
+              <a:t>SearXNG</a:t>
+            </a:r>
+            <a:r>
+              <a:rPr sz="1500" b="0" i="0" dirty="0">
+                <a:solidFill>
+                  <a:srgbClr val="3D4F61"/>
+                </a:solidFill>
+                <a:latin typeface="Calibri"/>
+                <a:ea typeface="Calibri"/>
+                <a:cs typeface="Calibri"/>
+              </a:rPr>
+              <a:t> + </a:t>
+            </a:r>
+            <a:r>
+              <a:rPr sz="1500" b="0" i="0" dirty="0" err="1">
+                <a:solidFill>
+                  <a:srgbClr val="3D4F61"/>
+                </a:solidFill>
+                <a:latin typeface="Calibri"/>
+                <a:ea typeface="Calibri"/>
+                <a:cs typeface="Calibri"/>
+              </a:rPr>
+              <a:t>тонкий</a:t>
+            </a:r>
+            <a:r>
+              <a:rPr sz="1500" b="0" i="0" dirty="0">
+                <a:solidFill>
+                  <a:srgbClr val="3D4F61"/>
+                </a:solidFill>
+                <a:latin typeface="Calibri"/>
+                <a:ea typeface="Calibri"/>
+                <a:cs typeface="Calibri"/>
+              </a:rPr>
+              <a:t> Audit Tool Server.</a:t>
             </a:r>
           </a:p>
         </p:txBody>
@@ -18215,43 +18730,7 @@
           <a:lstStyle/>
           <a:p>
             <a:pPr algn="ctr"/>
-          </a:p>
-        </p:txBody>
-      </p:sp>
-      <p:sp>
-        <p:nvSpPr>
-          <p:cNvPr id="11" name="TextBox 10"/>
-          <p:cNvSpPr txBox="1"/>
-          <p:nvPr/>
-        </p:nvSpPr>
-        <p:spPr>
-          <a:xfrm>
-            <a:off x="685800" y="1865376"/>
-            <a:ext cx="5029200" cy="292608"/>
-          </a:xfrm>
-          <a:prstGeom prst="rect">
-            <a:avLst/>
-          </a:prstGeom>
-          <a:noFill/>
-        </p:spPr>
-        <p:txBody>
-          <a:bodyPr wrap="square">
-            <a:spAutoFit/>
-          </a:bodyPr>
-          <a:lstStyle/>
-          <a:p>
-            <a:pPr algn="l"/>
-            <a:r>
-              <a:rPr sz="1400" b="1" i="0">
-                <a:solidFill>
-                  <a:srgbClr val="FFFFFF"/>
-                </a:solidFill>
-                <a:latin typeface="Calibri"/>
-                <a:ea typeface="Calibri"/>
-                <a:cs typeface="Calibri"/>
-              </a:rPr>
-              <a:t>Cursor</a:t>
-            </a:r>
+            <a:endParaRPr/>
           </a:p>
         </p:txBody>
       </p:sp>
@@ -18263,7 +18742,7 @@
         </p:nvSpPr>
         <p:spPr>
           <a:xfrm>
-            <a:off x="6263640" y="1865376"/>
+            <a:off x="685800" y="1865376"/>
             <a:ext cx="5029200" cy="292608"/>
           </a:xfrm>
           <a:prstGeom prst="rect">
@@ -18335,19 +18814,20 @@
           <a:lstStyle/>
           <a:p>
             <a:pPr algn="ctr"/>
-          </a:p>
-        </p:txBody>
-      </p:sp>
-      <p:sp>
-        <p:nvSpPr>
-          <p:cNvPr id="14" name="TextBox 13"/>
+            <a:endParaRPr/>
+          </a:p>
+        </p:txBody>
+      </p:sp>
+      <p:sp>
+        <p:nvSpPr>
+          <p:cNvPr id="16" name="TextBox 15"/>
           <p:cNvSpPr txBox="1"/>
           <p:nvPr/>
         </p:nvSpPr>
         <p:spPr>
           <a:xfrm>
-            <a:off x="685800" y="2368296"/>
-            <a:ext cx="5120640" cy="365760"/>
+            <a:off x="640080" y="2359151"/>
+            <a:ext cx="5212080" cy="365760"/>
           </a:xfrm>
           <a:prstGeom prst="rect">
             <a:avLst/>
@@ -18362,7 +18842,7 @@
           <a:p>
             <a:pPr algn="l"/>
             <a:r>
-              <a:rPr sz="1500" b="0" i="0">
+              <a:rPr sz="1500" b="1" i="0" dirty="0" err="1">
                 <a:solidFill>
                   <a:srgbClr val="142233"/>
                 </a:solidFill>
@@ -18370,80 +18850,10 @@
                 <a:ea typeface="Calibri"/>
                 <a:cs typeface="Calibri"/>
               </a:rPr>
-              <a:t>Поставил — открыл — пишешь</a:t>
-            </a:r>
-          </a:p>
-        </p:txBody>
-      </p:sp>
-      <p:sp>
-        <p:nvSpPr>
-          <p:cNvPr id="15" name="Rectangle 14"/>
-          <p:cNvSpPr/>
-          <p:nvPr/>
-        </p:nvSpPr>
-        <p:spPr>
-          <a:xfrm>
-            <a:off x="5989320" y="2386584"/>
-            <a:ext cx="25400" cy="310896"/>
-          </a:xfrm>
-          <a:prstGeom prst="rect">
-            <a:avLst/>
-          </a:prstGeom>
-          <a:solidFill>
-            <a:srgbClr val="C4962C"/>
-          </a:solidFill>
-          <a:ln>
-            <a:noFill/>
-          </a:ln>
-          <a:effectLst/>
-        </p:spPr>
-        <p:style>
-          <a:lnRef idx="1">
-            <a:schemeClr val="accent1"/>
-          </a:lnRef>
-          <a:fillRef idx="3">
-            <a:schemeClr val="accent1"/>
-          </a:fillRef>
-          <a:effectRef idx="2">
-            <a:schemeClr val="accent1"/>
-          </a:effectRef>
-          <a:fontRef idx="minor">
-            <a:schemeClr val="lt1"/>
-          </a:fontRef>
-        </p:style>
-        <p:txBody>
-          <a:bodyPr rtlCol="0" anchor="ctr"/>
-          <a:lstStyle/>
-          <a:p>
-            <a:pPr algn="ctr"/>
-          </a:p>
-        </p:txBody>
-      </p:sp>
-      <p:sp>
-        <p:nvSpPr>
-          <p:cNvPr id="16" name="TextBox 15"/>
-          <p:cNvSpPr txBox="1"/>
-          <p:nvPr/>
-        </p:nvSpPr>
-        <p:spPr>
-          <a:xfrm>
-            <a:off x="6263640" y="2368296"/>
-            <a:ext cx="5212080" cy="365760"/>
-          </a:xfrm>
-          <a:prstGeom prst="rect">
-            <a:avLst/>
-          </a:prstGeom>
-          <a:noFill/>
-        </p:spPr>
-        <p:txBody>
-          <a:bodyPr wrap="square">
-            <a:spAutoFit/>
-          </a:bodyPr>
-          <a:lstStyle/>
-          <a:p>
-            <a:pPr algn="l"/>
-            <a:r>
-              <a:rPr sz="1500" b="1" i="0">
+              <a:t>Поставил</a:t>
+            </a:r>
+            <a:r>
+              <a:rPr sz="1500" b="1" i="0" dirty="0">
                 <a:solidFill>
                   <a:srgbClr val="142233"/>
                 </a:solidFill>
@@ -18451,8 +18861,71 @@
                 <a:ea typeface="Calibri"/>
                 <a:cs typeface="Calibri"/>
               </a:rPr>
-              <a:t>Поставил — открыл — ведёшь проверку</a:t>
-            </a:r>
+              <a:t> — </a:t>
+            </a:r>
+            <a:r>
+              <a:rPr sz="1500" b="1" i="0" dirty="0" err="1">
+                <a:solidFill>
+                  <a:srgbClr val="142233"/>
+                </a:solidFill>
+                <a:latin typeface="Calibri"/>
+                <a:ea typeface="Calibri"/>
+                <a:cs typeface="Calibri"/>
+              </a:rPr>
+              <a:t>открыл</a:t>
+            </a:r>
+            <a:r>
+              <a:rPr sz="1500" b="1" i="0" dirty="0">
+                <a:solidFill>
+                  <a:srgbClr val="142233"/>
+                </a:solidFill>
+                <a:latin typeface="Calibri"/>
+                <a:ea typeface="Calibri"/>
+                <a:cs typeface="Calibri"/>
+              </a:rPr>
+              <a:t> — </a:t>
+            </a:r>
+            <a:r>
+              <a:rPr sz="1500" b="1" i="0" dirty="0" err="1">
+                <a:solidFill>
+                  <a:srgbClr val="142233"/>
+                </a:solidFill>
+                <a:latin typeface="Calibri"/>
+                <a:ea typeface="Calibri"/>
+                <a:cs typeface="Calibri"/>
+              </a:rPr>
+              <a:t>ведёшь</a:t>
+            </a:r>
+            <a:r>
+              <a:rPr sz="1500" b="1" i="0" dirty="0">
+                <a:solidFill>
+                  <a:srgbClr val="142233"/>
+                </a:solidFill>
+                <a:latin typeface="Calibri"/>
+                <a:ea typeface="Calibri"/>
+                <a:cs typeface="Calibri"/>
+              </a:rPr>
+              <a:t> </a:t>
+            </a:r>
+            <a:r>
+              <a:rPr sz="1500" b="1" i="0" dirty="0" err="1">
+                <a:solidFill>
+                  <a:srgbClr val="142233"/>
+                </a:solidFill>
+                <a:latin typeface="Calibri"/>
+                <a:ea typeface="Calibri"/>
+                <a:cs typeface="Calibri"/>
+              </a:rPr>
+              <a:t>проверку</a:t>
+            </a:r>
+            <a:endParaRPr sz="1500" b="1" i="0" dirty="0">
+              <a:solidFill>
+                <a:srgbClr val="142233"/>
+              </a:solidFill>
+              <a:latin typeface="Calibri"/>
+              <a:ea typeface="Calibri"/>
+              <a:cs typeface="Calibri"/>
+            </a:endParaRPr>
           </a:p>
         </p:txBody>
       </p:sp>
@@ -18499,19 +18972,20 @@
           <a:lstStyle/>
           <a:p>
             <a:pPr algn="ctr"/>
-          </a:p>
-        </p:txBody>
-      </p:sp>
-      <p:sp>
-        <p:nvSpPr>
-          <p:cNvPr id="18" name="TextBox 17"/>
+            <a:endParaRPr/>
+          </a:p>
+        </p:txBody>
+      </p:sp>
+      <p:sp>
+        <p:nvSpPr>
+          <p:cNvPr id="20" name="TextBox 19"/>
           <p:cNvSpPr txBox="1"/>
           <p:nvPr/>
         </p:nvSpPr>
         <p:spPr>
           <a:xfrm>
-            <a:off x="685800" y="3008376"/>
-            <a:ext cx="5120640" cy="365760"/>
+            <a:off x="667512" y="2999231"/>
+            <a:ext cx="5212080" cy="365760"/>
           </a:xfrm>
           <a:prstGeom prst="rect">
             <a:avLst/>
@@ -18526,7 +19000,7 @@
           <a:p>
             <a:pPr algn="l"/>
             <a:r>
-              <a:rPr sz="1500" b="0" i="0">
+              <a:rPr sz="1500" b="1" i="0" dirty="0">
                 <a:solidFill>
                   <a:srgbClr val="142233"/>
                 </a:solidFill>
@@ -18534,80 +19008,10 @@
                 <a:ea typeface="Calibri"/>
                 <a:cs typeface="Calibri"/>
               </a:rPr>
-              <a:t>VS Code не форкали</a:t>
-            </a:r>
-          </a:p>
-        </p:txBody>
-      </p:sp>
-      <p:sp>
-        <p:nvSpPr>
-          <p:cNvPr id="19" name="Rectangle 18"/>
-          <p:cNvSpPr/>
-          <p:nvPr/>
-        </p:nvSpPr>
-        <p:spPr>
-          <a:xfrm>
-            <a:off x="5989320" y="3026664"/>
-            <a:ext cx="25400" cy="310896"/>
-          </a:xfrm>
-          <a:prstGeom prst="rect">
-            <a:avLst/>
-          </a:prstGeom>
-          <a:solidFill>
-            <a:srgbClr val="C4962C"/>
-          </a:solidFill>
-          <a:ln>
-            <a:noFill/>
-          </a:ln>
-          <a:effectLst/>
-        </p:spPr>
-        <p:style>
-          <a:lnRef idx="1">
-            <a:schemeClr val="accent1"/>
-          </a:lnRef>
-          <a:fillRef idx="3">
-            <a:schemeClr val="accent1"/>
-          </a:fillRef>
-          <a:effectRef idx="2">
-            <a:schemeClr val="accent1"/>
-          </a:effectRef>
-          <a:fontRef idx="minor">
-            <a:schemeClr val="lt1"/>
-          </a:fontRef>
-        </p:style>
-        <p:txBody>
-          <a:bodyPr rtlCol="0" anchor="ctr"/>
-          <a:lstStyle/>
-          <a:p>
-            <a:pPr algn="ctr"/>
-          </a:p>
-        </p:txBody>
-      </p:sp>
-      <p:sp>
-        <p:nvSpPr>
-          <p:cNvPr id="20" name="TextBox 19"/>
-          <p:cNvSpPr txBox="1"/>
-          <p:nvPr/>
-        </p:nvSpPr>
-        <p:spPr>
-          <a:xfrm>
-            <a:off x="6263640" y="3008376"/>
-            <a:ext cx="5212080" cy="365760"/>
-          </a:xfrm>
-          <a:prstGeom prst="rect">
-            <a:avLst/>
-          </a:prstGeom>
-          <a:noFill/>
-        </p:spPr>
-        <p:txBody>
-          <a:bodyPr wrap="square">
-            <a:spAutoFit/>
-          </a:bodyPr>
-          <a:lstStyle/>
-          <a:p>
-            <a:pPr algn="l"/>
-            <a:r>
-              <a:rPr sz="1500" b="1" i="0">
+              <a:t>Open </a:t>
+            </a:r>
+            <a:r>
+              <a:rPr sz="1500" b="1" i="0" dirty="0" err="1">
                 <a:solidFill>
                   <a:srgbClr val="142233"/>
                 </a:solidFill>
@@ -18615,8 +19019,60 @@
                 <a:ea typeface="Calibri"/>
                 <a:cs typeface="Calibri"/>
               </a:rPr>
-              <a:t>Open WebUI не форкаем</a:t>
-            </a:r>
+              <a:t>WebUI</a:t>
+            </a:r>
+            <a:r>
+              <a:rPr sz="1500" b="1" i="0" dirty="0">
+                <a:solidFill>
+                  <a:srgbClr val="142233"/>
+                </a:solidFill>
+                <a:latin typeface="Calibri"/>
+                <a:ea typeface="Calibri"/>
+                <a:cs typeface="Calibri"/>
+              </a:rPr>
+              <a:t> </a:t>
+            </a:r>
+            <a:r>
+              <a:rPr sz="1500" b="1" i="0" dirty="0" err="1">
+                <a:solidFill>
+                  <a:srgbClr val="142233"/>
+                </a:solidFill>
+                <a:latin typeface="Calibri"/>
+                <a:ea typeface="Calibri"/>
+                <a:cs typeface="Calibri"/>
+              </a:rPr>
+              <a:t>не</a:t>
+            </a:r>
+            <a:r>
+              <a:rPr sz="1500" b="1" i="0" dirty="0">
+                <a:solidFill>
+                  <a:srgbClr val="142233"/>
+                </a:solidFill>
+                <a:latin typeface="Calibri"/>
+                <a:ea typeface="Calibri"/>
+                <a:cs typeface="Calibri"/>
+              </a:rPr>
+              <a:t> </a:t>
+            </a:r>
+            <a:r>
+              <a:rPr sz="1500" b="1" i="0" dirty="0" err="1">
+                <a:solidFill>
+                  <a:srgbClr val="142233"/>
+                </a:solidFill>
+                <a:latin typeface="Calibri"/>
+                <a:ea typeface="Calibri"/>
+                <a:cs typeface="Calibri"/>
+              </a:rPr>
+              <a:t>форкаем</a:t>
+            </a:r>
+            <a:endParaRPr sz="1500" b="1" i="0" dirty="0">
+              <a:solidFill>
+                <a:srgbClr val="142233"/>
+              </a:solidFill>
+              <a:latin typeface="Calibri"/>
+              <a:ea typeface="Calibri"/>
+              <a:cs typeface="Calibri"/>
+            </a:endParaRPr>
           </a:p>
         </p:txBody>
       </p:sp>
@@ -18663,19 +19119,20 @@
           <a:lstStyle/>
           <a:p>
             <a:pPr algn="ctr"/>
-          </a:p>
-        </p:txBody>
-      </p:sp>
-      <p:sp>
-        <p:nvSpPr>
-          <p:cNvPr id="22" name="TextBox 21"/>
+            <a:endParaRPr/>
+          </a:p>
+        </p:txBody>
+      </p:sp>
+      <p:sp>
+        <p:nvSpPr>
+          <p:cNvPr id="24" name="TextBox 23"/>
           <p:cNvSpPr txBox="1"/>
           <p:nvPr/>
         </p:nvSpPr>
         <p:spPr>
           <a:xfrm>
-            <a:off x="685800" y="3648456"/>
-            <a:ext cx="5120640" cy="365760"/>
+            <a:off x="667512" y="3657600"/>
+            <a:ext cx="5212080" cy="365760"/>
           </a:xfrm>
           <a:prstGeom prst="rect">
             <a:avLst/>
@@ -18690,7 +19147,7 @@
           <a:p>
             <a:pPr algn="l"/>
             <a:r>
-              <a:rPr sz="1500" b="0" i="0">
+              <a:rPr sz="1500" b="1" i="0" dirty="0" err="1">
                 <a:solidFill>
                   <a:srgbClr val="142233"/>
                 </a:solidFill>
@@ -18698,80 +19155,10 @@
                 <a:ea typeface="Calibri"/>
                 <a:cs typeface="Calibri"/>
               </a:rPr>
-              <a:t>Цитата из этого репозитория</a:t>
-            </a:r>
-          </a:p>
-        </p:txBody>
-      </p:sp>
-      <p:sp>
-        <p:nvSpPr>
-          <p:cNvPr id="23" name="Rectangle 22"/>
-          <p:cNvSpPr/>
-          <p:nvPr/>
-        </p:nvSpPr>
-        <p:spPr>
-          <a:xfrm>
-            <a:off x="5989320" y="3666744"/>
-            <a:ext cx="25400" cy="310896"/>
-          </a:xfrm>
-          <a:prstGeom prst="rect">
-            <a:avLst/>
-          </a:prstGeom>
-          <a:solidFill>
-            <a:srgbClr val="C4962C"/>
-          </a:solidFill>
-          <a:ln>
-            <a:noFill/>
-          </a:ln>
-          <a:effectLst/>
-        </p:spPr>
-        <p:style>
-          <a:lnRef idx="1">
-            <a:schemeClr val="accent1"/>
-          </a:lnRef>
-          <a:fillRef idx="3">
-            <a:schemeClr val="accent1"/>
-          </a:fillRef>
-          <a:effectRef idx="2">
-            <a:schemeClr val="accent1"/>
-          </a:effectRef>
-          <a:fontRef idx="minor">
-            <a:schemeClr val="lt1"/>
-          </a:fontRef>
-        </p:style>
-        <p:txBody>
-          <a:bodyPr rtlCol="0" anchor="ctr"/>
-          <a:lstStyle/>
-          <a:p>
-            <a:pPr algn="ctr"/>
-          </a:p>
-        </p:txBody>
-      </p:sp>
-      <p:sp>
-        <p:nvSpPr>
-          <p:cNvPr id="24" name="TextBox 23"/>
-          <p:cNvSpPr txBox="1"/>
-          <p:nvPr/>
-        </p:nvSpPr>
-        <p:spPr>
-          <a:xfrm>
-            <a:off x="6263640" y="3648456"/>
-            <a:ext cx="5212080" cy="365760"/>
-          </a:xfrm>
-          <a:prstGeom prst="rect">
-            <a:avLst/>
-          </a:prstGeom>
-          <a:noFill/>
-        </p:spPr>
-        <p:txBody>
-          <a:bodyPr wrap="square">
-            <a:spAutoFit/>
-          </a:bodyPr>
-          <a:lstStyle/>
-          <a:p>
-            <a:pPr algn="l"/>
-            <a:r>
-              <a:rPr sz="1500" b="1" i="0">
+              <a:t>Цитата</a:t>
+            </a:r>
+            <a:r>
+              <a:rPr sz="1500" b="1" i="0" dirty="0">
                 <a:solidFill>
                   <a:srgbClr val="142233"/>
                 </a:solidFill>
@@ -18779,8 +19166,93 @@
                 <a:ea typeface="Calibri"/>
                 <a:cs typeface="Calibri"/>
               </a:rPr>
-              <a:t>Цитата из этого утверждённого акта</a:t>
-            </a:r>
+              <a:t> </a:t>
+            </a:r>
+            <a:r>
+              <a:rPr sz="1500" b="1" i="0" dirty="0" err="1">
+                <a:solidFill>
+                  <a:srgbClr val="142233"/>
+                </a:solidFill>
+                <a:latin typeface="Calibri"/>
+                <a:ea typeface="Calibri"/>
+                <a:cs typeface="Calibri"/>
+              </a:rPr>
+              <a:t>из</a:t>
+            </a:r>
+            <a:r>
+              <a:rPr sz="1500" b="1" i="0" dirty="0">
+                <a:solidFill>
+                  <a:srgbClr val="142233"/>
+                </a:solidFill>
+                <a:latin typeface="Calibri"/>
+                <a:ea typeface="Calibri"/>
+                <a:cs typeface="Calibri"/>
+              </a:rPr>
+              <a:t> </a:t>
+            </a:r>
+            <a:r>
+              <a:rPr sz="1500" b="1" i="0" dirty="0" err="1">
+                <a:solidFill>
+                  <a:srgbClr val="142233"/>
+                </a:solidFill>
+                <a:latin typeface="Calibri"/>
+                <a:ea typeface="Calibri"/>
+                <a:cs typeface="Calibri"/>
+              </a:rPr>
+              <a:t>этого</a:t>
+            </a:r>
+            <a:r>
+              <a:rPr sz="1500" b="1" i="0" dirty="0">
+                <a:solidFill>
+                  <a:srgbClr val="142233"/>
+                </a:solidFill>
+                <a:latin typeface="Calibri"/>
+                <a:ea typeface="Calibri"/>
+                <a:cs typeface="Calibri"/>
+              </a:rPr>
+              <a:t> </a:t>
+            </a:r>
+            <a:r>
+              <a:rPr sz="1500" b="1" i="0" dirty="0" err="1">
+                <a:solidFill>
+                  <a:srgbClr val="142233"/>
+                </a:solidFill>
+                <a:latin typeface="Calibri"/>
+                <a:ea typeface="Calibri"/>
+                <a:cs typeface="Calibri"/>
+              </a:rPr>
+              <a:t>утверждённого</a:t>
+            </a:r>
+            <a:r>
+              <a:rPr sz="1500" b="1" i="0" dirty="0">
+                <a:solidFill>
+                  <a:srgbClr val="142233"/>
+                </a:solidFill>
+                <a:latin typeface="Calibri"/>
+                <a:ea typeface="Calibri"/>
+                <a:cs typeface="Calibri"/>
+              </a:rPr>
+              <a:t> </a:t>
+            </a:r>
+            <a:r>
+              <a:rPr sz="1500" b="1" i="0" dirty="0" err="1">
+                <a:solidFill>
+                  <a:srgbClr val="142233"/>
+                </a:solidFill>
+                <a:latin typeface="Calibri"/>
+                <a:ea typeface="Calibri"/>
+                <a:cs typeface="Calibri"/>
+              </a:rPr>
+              <a:t>акта</a:t>
+            </a:r>
+            <a:endParaRPr sz="1500" b="1" i="0" dirty="0">
+              <a:solidFill>
+                <a:srgbClr val="142233"/>
+              </a:solidFill>
+              <a:latin typeface="Calibri"/>
+              <a:ea typeface="Calibri"/>
+              <a:cs typeface="Calibri"/>
+            </a:endParaRPr>
           </a:p>
         </p:txBody>
       </p:sp>
@@ -18827,19 +19299,20 @@
           <a:lstStyle/>
           <a:p>
             <a:pPr algn="ctr"/>
-          </a:p>
-        </p:txBody>
-      </p:sp>
-      <p:sp>
-        <p:nvSpPr>
-          <p:cNvPr id="26" name="TextBox 25"/>
+            <a:endParaRPr/>
+          </a:p>
+        </p:txBody>
+      </p:sp>
+      <p:sp>
+        <p:nvSpPr>
+          <p:cNvPr id="28" name="TextBox 27"/>
           <p:cNvSpPr txBox="1"/>
           <p:nvPr/>
         </p:nvSpPr>
         <p:spPr>
           <a:xfrm>
-            <a:off x="685800" y="4288535"/>
-            <a:ext cx="5120640" cy="365760"/>
+            <a:off x="758952" y="4288535"/>
+            <a:ext cx="5212080" cy="365760"/>
           </a:xfrm>
           <a:prstGeom prst="rect">
             <a:avLst/>
@@ -18854,7 +19327,7 @@
           <a:p>
             <a:pPr algn="l"/>
             <a:r>
-              <a:rPr sz="1500" b="0" i="0">
+              <a:rPr sz="1500" b="1" i="0" dirty="0" err="1">
                 <a:solidFill>
                   <a:srgbClr val="142233"/>
                 </a:solidFill>
@@ -18862,80 +19335,10 @@
                 <a:ea typeface="Calibri"/>
                 <a:cs typeface="Calibri"/>
               </a:rPr>
-              <a:t>Один вход: окно редактора</a:t>
-            </a:r>
-          </a:p>
-        </p:txBody>
-      </p:sp>
-      <p:sp>
-        <p:nvSpPr>
-          <p:cNvPr id="27" name="Rectangle 26"/>
-          <p:cNvSpPr/>
-          <p:nvPr/>
-        </p:nvSpPr>
-        <p:spPr>
-          <a:xfrm>
-            <a:off x="5989320" y="4306823"/>
-            <a:ext cx="25400" cy="310896"/>
-          </a:xfrm>
-          <a:prstGeom prst="rect">
-            <a:avLst/>
-          </a:prstGeom>
-          <a:solidFill>
-            <a:srgbClr val="C4962C"/>
-          </a:solidFill>
-          <a:ln>
-            <a:noFill/>
-          </a:ln>
-          <a:effectLst/>
-        </p:spPr>
-        <p:style>
-          <a:lnRef idx="1">
-            <a:schemeClr val="accent1"/>
-          </a:lnRef>
-          <a:fillRef idx="3">
-            <a:schemeClr val="accent1"/>
-          </a:fillRef>
-          <a:effectRef idx="2">
-            <a:schemeClr val="accent1"/>
-          </a:effectRef>
-          <a:fontRef idx="minor">
-            <a:schemeClr val="lt1"/>
-          </a:fontRef>
-        </p:style>
-        <p:txBody>
-          <a:bodyPr rtlCol="0" anchor="ctr"/>
-          <a:lstStyle/>
-          <a:p>
-            <a:pPr algn="ctr"/>
-          </a:p>
-        </p:txBody>
-      </p:sp>
-      <p:sp>
-        <p:nvSpPr>
-          <p:cNvPr id="28" name="TextBox 27"/>
-          <p:cNvSpPr txBox="1"/>
-          <p:nvPr/>
-        </p:nvSpPr>
-        <p:spPr>
-          <a:xfrm>
-            <a:off x="6263640" y="4288535"/>
-            <a:ext cx="5212080" cy="365760"/>
-          </a:xfrm>
-          <a:prstGeom prst="rect">
-            <a:avLst/>
-          </a:prstGeom>
-          <a:noFill/>
-        </p:spPr>
-        <p:txBody>
-          <a:bodyPr wrap="square">
-            <a:spAutoFit/>
-          </a:bodyPr>
-          <a:lstStyle/>
-          <a:p>
-            <a:pPr algn="l"/>
-            <a:r>
-              <a:rPr sz="1500" b="1" i="0">
+              <a:t>Один</a:t>
+            </a:r>
+            <a:r>
+              <a:rPr sz="1500" b="1" i="0" dirty="0">
                 <a:solidFill>
                   <a:srgbClr val="142233"/>
                 </a:solidFill>
@@ -18943,7 +19346,73 @@
                 <a:ea typeface="Calibri"/>
                 <a:cs typeface="Calibri"/>
               </a:rPr>
-              <a:t>Один вход: чат на :3000</a:t>
+              <a:t> </a:t>
+            </a:r>
+            <a:r>
+              <a:rPr sz="1500" b="1" i="0" dirty="0" err="1">
+                <a:solidFill>
+                  <a:srgbClr val="142233"/>
+                </a:solidFill>
+                <a:latin typeface="Calibri"/>
+                <a:ea typeface="Calibri"/>
+                <a:cs typeface="Calibri"/>
+              </a:rPr>
+              <a:t>вход</a:t>
+            </a:r>
+            <a:r>
+              <a:rPr sz="1500" b="1" i="0" dirty="0">
+                <a:solidFill>
+                  <a:srgbClr val="142233"/>
+                </a:solidFill>
+                <a:latin typeface="Calibri"/>
+                <a:ea typeface="Calibri"/>
+                <a:cs typeface="Calibri"/>
+              </a:rPr>
+              <a:t>: </a:t>
+            </a:r>
+            <a:r>
+              <a:rPr sz="1500" b="1" i="0" dirty="0" err="1">
+                <a:solidFill>
+                  <a:srgbClr val="142233"/>
+                </a:solidFill>
+                <a:latin typeface="Calibri"/>
+                <a:ea typeface="Calibri"/>
+                <a:cs typeface="Calibri"/>
+              </a:rPr>
+              <a:t>чат</a:t>
+            </a:r>
+            <a:r>
+              <a:rPr sz="1500" b="1" i="0" dirty="0">
+                <a:solidFill>
+                  <a:srgbClr val="142233"/>
+                </a:solidFill>
+                <a:latin typeface="Calibri"/>
+                <a:ea typeface="Calibri"/>
+                <a:cs typeface="Calibri"/>
+              </a:rPr>
+              <a:t> </a:t>
+            </a:r>
+            <a:r>
+              <a:rPr sz="1500" b="1" i="0" dirty="0" err="1">
+                <a:solidFill>
+                  <a:srgbClr val="142233"/>
+                </a:solidFill>
+                <a:latin typeface="Calibri"/>
+                <a:ea typeface="Calibri"/>
+                <a:cs typeface="Calibri"/>
+              </a:rPr>
+              <a:t>на</a:t>
+            </a:r>
+            <a:r>
+              <a:rPr sz="1500" b="1" i="0" dirty="0">
+                <a:solidFill>
+                  <a:srgbClr val="142233"/>
+                </a:solidFill>
+                <a:latin typeface="Calibri"/>
+                <a:ea typeface="Calibri"/>
+                <a:cs typeface="Calibri"/>
+              </a:rPr>
+              <a:t> :3000</a:t>
             </a:r>
           </a:p>
         </p:txBody>
@@ -19031,7 +19500,7 @@
 </file>
 
 <file path=ppt/slides/slide5.xml><?xml version="1.0" encoding="utf-8"?>
-<p:sld xmlns:a="http://schemas.openxmlformats.org/drawingml/2006/main" xmlns:p="http://schemas.openxmlformats.org/presentationml/2006/main" xmlns:r="http://schemas.openxmlformats.org/officeDocument/2006/relationships">
+<p:sld xmlns:a="http://schemas.openxmlformats.org/drawingml/2006/main" xmlns:r="http://schemas.openxmlformats.org/officeDocument/2006/relationships" xmlns:p="http://schemas.openxmlformats.org/presentationml/2006/main">
   <p:cSld>
     <p:spTree>
       <p:nvGrpSpPr>
@@ -19039,7 +19508,14 @@
         <p:cNvGrpSpPr/>
         <p:nvPr/>
       </p:nvGrpSpPr>
-      <p:grpSpPr/>
+      <p:grpSpPr>
+        <a:xfrm>
+          <a:off x="0" y="0"/>
+          <a:ext cx="0" cy="0"/>
+          <a:chOff x="0" y="0"/>
+          <a:chExt cx="0" cy="0"/>
+        </a:xfrm>
+      </p:grpSpPr>
       <p:sp>
         <p:nvSpPr>
           <p:cNvPr id="2" name="Rectangle 1"/>
@@ -19081,6 +19557,7 @@
           <a:lstStyle/>
           <a:p>
             <a:pPr algn="ctr"/>
+            <a:endParaRPr/>
           </a:p>
         </p:txBody>
       </p:sp>
@@ -19125,6 +19602,7 @@
           <a:lstStyle/>
           <a:p>
             <a:pPr algn="ctr"/>
+            <a:endParaRPr/>
           </a:p>
         </p:txBody>
       </p:sp>
@@ -19169,6 +19647,7 @@
           <a:lstStyle/>
           <a:p>
             <a:pPr algn="ctr"/>
+            <a:endParaRPr/>
           </a:p>
         </p:txBody>
       </p:sp>
@@ -19213,6 +19692,7 @@
           <a:lstStyle/>
           <a:p>
             <a:pPr algn="ctr"/>
+            <a:endParaRPr/>
           </a:p>
         </p:txBody>
       </p:sp>
@@ -19329,7 +19809,7 @@
           </a:fontRef>
         </p:style>
         <p:txBody>
-          <a:bodyPr rtlCol="0" anchor="ctr" wrap="square" lIns="411480" rIns="411480"/>
+          <a:bodyPr wrap="square" lIns="411480" rIns="411480" rtlCol="0" anchor="ctr"/>
           <a:lstStyle/>
           <a:p>
             <a:pPr algn="l"/>
@@ -19386,12 +19866,12 @@
           </a:fontRef>
         </p:style>
         <p:txBody>
-          <a:bodyPr rtlCol="0" anchor="ctr" wrap="square" lIns="201168" tIns="201168"/>
+          <a:bodyPr wrap="square" lIns="201168" tIns="201168" rtlCol="0" anchor="ctr"/>
           <a:lstStyle/>
           <a:p>
             <a:pPr algn="l"/>
             <a:r>
-              <a:rPr sz="1600" b="1" i="0">
+              <a:rPr sz="1600" b="1" i="0" dirty="0" err="1">
                 <a:solidFill>
                   <a:srgbClr val="C4962C"/>
                 </a:solidFill>
@@ -19401,6 +19881,14 @@
               </a:rPr>
               <a:t>Ускоряет</a:t>
             </a:r>
+            <a:endParaRPr sz="1600" b="1" i="0" dirty="0">
+              <a:solidFill>
+                <a:srgbClr val="C4962C"/>
+              </a:solidFill>
+              <a:latin typeface="Calibri"/>
+              <a:ea typeface="Calibri"/>
+              <a:cs typeface="Calibri"/>
+            </a:endParaRPr>
           </a:p>
           <a:p>
             <a:pPr algn="l">
@@ -19412,7 +19900,7 @@
               </a:spcAft>
             </a:pPr>
             <a:r>
-              <a:rPr sz="1300" b="0" i="0">
+              <a:rPr sz="1300" b="0" i="0" dirty="0" err="1">
                 <a:solidFill>
                   <a:srgbClr val="C5D4E0"/>
                 </a:solidFill>
@@ -19420,8 +19908,170 @@
                 <a:ea typeface="Calibri"/>
                 <a:cs typeface="Calibri"/>
               </a:rPr>
-              <a:t>Библиотека НПА, саммари, программа, гипотезы, вопрос по статье.</a:t>
-            </a:r>
+              <a:t>Библиотека</a:t>
+            </a:r>
+            <a:r>
+              <a:rPr sz="1300" b="0" i="0" dirty="0">
+                <a:solidFill>
+                  <a:srgbClr val="C5D4E0"/>
+                </a:solidFill>
+                <a:latin typeface="Calibri"/>
+                <a:ea typeface="Calibri"/>
+                <a:cs typeface="Calibri"/>
+              </a:rPr>
+              <a:t> НПА, </a:t>
+            </a:r>
+            <a:r>
+              <a:rPr sz="1300" b="0" i="0" dirty="0" err="1">
+                <a:solidFill>
+                  <a:srgbClr val="C5D4E0"/>
+                </a:solidFill>
+                <a:latin typeface="Calibri"/>
+                <a:ea typeface="Calibri"/>
+                <a:cs typeface="Calibri"/>
+              </a:rPr>
+              <a:t>саммари</a:t>
+            </a:r>
+            <a:r>
+              <a:rPr sz="1300" b="0" i="0" dirty="0">
+                <a:solidFill>
+                  <a:srgbClr val="C5D4E0"/>
+                </a:solidFill>
+                <a:latin typeface="Calibri"/>
+                <a:ea typeface="Calibri"/>
+                <a:cs typeface="Calibri"/>
+              </a:rPr>
+              <a:t>, </a:t>
+            </a:r>
+            <a:r>
+              <a:rPr sz="1300" b="0" i="0" dirty="0" err="1">
+                <a:solidFill>
+                  <a:srgbClr val="C5D4E0"/>
+                </a:solidFill>
+                <a:latin typeface="Calibri"/>
+                <a:ea typeface="Calibri"/>
+                <a:cs typeface="Calibri"/>
+              </a:rPr>
+              <a:t>программа</a:t>
+            </a:r>
+            <a:r>
+              <a:rPr sz="1300" b="0" i="0" dirty="0">
+                <a:solidFill>
+                  <a:srgbClr val="C5D4E0"/>
+                </a:solidFill>
+                <a:latin typeface="Calibri"/>
+                <a:ea typeface="Calibri"/>
+                <a:cs typeface="Calibri"/>
+              </a:rPr>
+              <a:t>, </a:t>
+            </a:r>
+            <a:r>
+              <a:rPr sz="1300" b="0" i="0" dirty="0" err="1">
+                <a:solidFill>
+                  <a:srgbClr val="C5D4E0"/>
+                </a:solidFill>
+                <a:latin typeface="Calibri"/>
+                <a:ea typeface="Calibri"/>
+                <a:cs typeface="Calibri"/>
+              </a:rPr>
+              <a:t>гипотезы</a:t>
+            </a:r>
+            <a:r>
+              <a:rPr sz="1300" b="0" i="0" dirty="0">
+                <a:solidFill>
+                  <a:srgbClr val="C5D4E0"/>
+                </a:solidFill>
+                <a:latin typeface="Calibri"/>
+                <a:ea typeface="Calibri"/>
+                <a:cs typeface="Calibri"/>
+              </a:rPr>
+              <a:t>, </a:t>
+            </a:r>
+            <a:r>
+              <a:rPr sz="1300" b="0" i="0" dirty="0" err="1">
+                <a:solidFill>
+                  <a:srgbClr val="C5D4E0"/>
+                </a:solidFill>
+                <a:latin typeface="Calibri"/>
+                <a:ea typeface="Calibri"/>
+                <a:cs typeface="Calibri"/>
+              </a:rPr>
+              <a:t>вопрос</a:t>
+            </a:r>
+            <a:r>
+              <a:rPr sz="1300" b="0" i="0" dirty="0">
+                <a:solidFill>
+                  <a:srgbClr val="C5D4E0"/>
+                </a:solidFill>
+                <a:latin typeface="Calibri"/>
+                <a:ea typeface="Calibri"/>
+                <a:cs typeface="Calibri"/>
+              </a:rPr>
+              <a:t> </a:t>
+            </a:r>
+            <a:r>
+              <a:rPr sz="1300" b="0" i="0" dirty="0" err="1">
+                <a:solidFill>
+                  <a:srgbClr val="C5D4E0"/>
+                </a:solidFill>
+                <a:latin typeface="Calibri"/>
+                <a:ea typeface="Calibri"/>
+                <a:cs typeface="Calibri"/>
+              </a:rPr>
+              <a:t>по</a:t>
+            </a:r>
+            <a:r>
+              <a:rPr sz="1300" b="0" i="0" dirty="0">
+                <a:solidFill>
+                  <a:srgbClr val="C5D4E0"/>
+                </a:solidFill>
+                <a:latin typeface="Calibri"/>
+                <a:ea typeface="Calibri"/>
+                <a:cs typeface="Calibri"/>
+              </a:rPr>
+              <a:t> </a:t>
+            </a:r>
+            <a:r>
+              <a:rPr sz="1300" b="0" i="0" dirty="0" err="1" smtClean="0">
+                <a:solidFill>
+                  <a:srgbClr val="C5D4E0"/>
+                </a:solidFill>
+                <a:latin typeface="Calibri"/>
+                <a:ea typeface="Calibri"/>
+                <a:cs typeface="Calibri"/>
+              </a:rPr>
+              <a:t>статье</a:t>
+            </a:r>
+            <a:r>
+              <a:rPr lang="en-US" sz="1300" b="0" i="0" dirty="0" smtClean="0">
+                <a:solidFill>
+                  <a:srgbClr val="C5D4E0"/>
+                </a:solidFill>
+                <a:latin typeface="Calibri"/>
+                <a:ea typeface="Calibri"/>
+                <a:cs typeface="Calibri"/>
+              </a:rPr>
+              <a:t>, </a:t>
+            </a:r>
+            <a:r>
+              <a:rPr lang="ru-RU" sz="1300" b="0" i="0" dirty="0" smtClean="0">
+                <a:solidFill>
+                  <a:srgbClr val="C5D4E0"/>
+                </a:solidFill>
+                <a:latin typeface="Calibri"/>
+                <a:ea typeface="Calibri"/>
+                <a:cs typeface="Calibri"/>
+              </a:rPr>
+              <a:t>черновики аудиторского мнения и аудиторского заключения </a:t>
+            </a:r>
+            <a:endParaRPr sz="1300" b="0" i="0" dirty="0">
+              <a:solidFill>
+                <a:srgbClr val="C5D4E0"/>
+              </a:solidFill>
+              <a:latin typeface="Calibri"/>
+              <a:ea typeface="Calibri"/>
+              <a:cs typeface="Calibri"/>
+            </a:endParaRPr>
           </a:p>
         </p:txBody>
       </p:sp>
@@ -19464,7 +20114,7 @@
           </a:fontRef>
         </p:style>
         <p:txBody>
-          <a:bodyPr rtlCol="0" anchor="ctr" wrap="square" lIns="201168" tIns="201168"/>
+          <a:bodyPr wrap="square" lIns="201168" tIns="201168" rtlCol="0" anchor="ctr"/>
           <a:lstStyle/>
           <a:p>
             <a:pPr algn="l"/>
@@ -19542,7 +20192,7 @@
           </a:fontRef>
         </p:style>
         <p:txBody>
-          <a:bodyPr rtlCol="0" anchor="ctr" wrap="square" lIns="201168" tIns="201168"/>
+          <a:bodyPr wrap="square" lIns="201168" tIns="201168" rtlCol="0" anchor="ctr"/>
           <a:lstStyle/>
           <a:p>
             <a:pPr algn="l"/>
@@ -19664,7 +20314,7 @@
 </file>
 
 <file path=ppt/slides/slide6.xml><?xml version="1.0" encoding="utf-8"?>
-<p:sld xmlns:a="http://schemas.openxmlformats.org/drawingml/2006/main" xmlns:p="http://schemas.openxmlformats.org/presentationml/2006/main" xmlns:r="http://schemas.openxmlformats.org/officeDocument/2006/relationships">
+<p:sld xmlns:a="http://schemas.openxmlformats.org/drawingml/2006/main" xmlns:r="http://schemas.openxmlformats.org/officeDocument/2006/relationships" xmlns:p="http://schemas.openxmlformats.org/presentationml/2006/main">
   <p:cSld>
     <p:spTree>
       <p:nvGrpSpPr>
@@ -19672,7 +20322,14 @@
         <p:cNvGrpSpPr/>
         <p:nvPr/>
       </p:nvGrpSpPr>
-      <p:grpSpPr/>
+      <p:grpSpPr>
+        <a:xfrm>
+          <a:off x="0" y="0"/>
+          <a:ext cx="0" cy="0"/>
+          <a:chOff x="0" y="0"/>
+          <a:chExt cx="0" cy="0"/>
+        </a:xfrm>
+      </p:grpSpPr>
       <p:sp>
         <p:nvSpPr>
           <p:cNvPr id="2" name="Rectangle 1"/>
@@ -19714,6 +20371,7 @@
           <a:lstStyle/>
           <a:p>
             <a:pPr algn="ctr"/>
+            <a:endParaRPr/>
           </a:p>
         </p:txBody>
       </p:sp>
@@ -19758,6 +20416,7 @@
           <a:lstStyle/>
           <a:p>
             <a:pPr algn="ctr"/>
+            <a:endParaRPr/>
           </a:p>
         </p:txBody>
       </p:sp>
@@ -19802,6 +20461,7 @@
           <a:lstStyle/>
           <a:p>
             <a:pPr algn="ctr"/>
+            <a:endParaRPr/>
           </a:p>
         </p:txBody>
       </p:sp>
@@ -19846,6 +20506,7 @@
           <a:lstStyle/>
           <a:p>
             <a:pPr algn="ctr"/>
+            <a:endParaRPr/>
           </a:p>
         </p:txBody>
       </p:sp>
@@ -19890,6 +20551,7 @@
           <a:lstStyle/>
           <a:p>
             <a:pPr algn="ctr"/>
+            <a:endParaRPr/>
           </a:p>
         </p:txBody>
       </p:sp>
@@ -20045,12 +20707,12 @@
           </a:fontRef>
         </p:style>
         <p:txBody>
-          <a:bodyPr rtlCol="0" anchor="ctr" wrap="square" lIns="256032" tIns="201168"/>
+          <a:bodyPr wrap="square" lIns="256032" tIns="201168" rtlCol="0" anchor="ctr"/>
           <a:lstStyle/>
           <a:p>
             <a:pPr algn="l"/>
             <a:r>
-              <a:rPr sz="1200" b="1" i="0">
+              <a:rPr sz="1200" b="1" i="0" dirty="0">
                 <a:solidFill>
                   <a:srgbClr val="B44A3A"/>
                 </a:solidFill>
@@ -20071,7 +20733,7 @@
               </a:spcAft>
             </a:pPr>
             <a:r>
-              <a:rPr sz="1400" b="0" i="0">
+              <a:rPr sz="1400" b="0" i="0" dirty="0">
                 <a:solidFill>
                   <a:srgbClr val="142233"/>
                 </a:solidFill>
@@ -20079,7 +20741,117 @@
                 <a:ea typeface="Calibri"/>
                 <a:cs typeface="Calibri"/>
               </a:rPr>
-              <a:t>▸  Вспоминаю акты по памяти и старым WP.</a:t>
+              <a:t>▸  </a:t>
+            </a:r>
+            <a:r>
+              <a:rPr sz="1400" b="0" i="0" dirty="0" err="1">
+                <a:solidFill>
+                  <a:srgbClr val="142233"/>
+                </a:solidFill>
+                <a:latin typeface="Calibri"/>
+                <a:ea typeface="Calibri"/>
+                <a:cs typeface="Calibri"/>
+              </a:rPr>
+              <a:t>Вспоминаю</a:t>
+            </a:r>
+            <a:r>
+              <a:rPr sz="1400" b="0" i="0" dirty="0">
+                <a:solidFill>
+                  <a:srgbClr val="142233"/>
+                </a:solidFill>
+                <a:latin typeface="Calibri"/>
+                <a:ea typeface="Calibri"/>
+                <a:cs typeface="Calibri"/>
+              </a:rPr>
+              <a:t> </a:t>
+            </a:r>
+            <a:r>
+              <a:rPr sz="1400" b="0" i="0" dirty="0" err="1">
+                <a:solidFill>
+                  <a:srgbClr val="142233"/>
+                </a:solidFill>
+                <a:latin typeface="Calibri"/>
+                <a:ea typeface="Calibri"/>
+                <a:cs typeface="Calibri"/>
+              </a:rPr>
+              <a:t>акты</a:t>
+            </a:r>
+            <a:r>
+              <a:rPr sz="1400" b="0" i="0" dirty="0">
+                <a:solidFill>
+                  <a:srgbClr val="142233"/>
+                </a:solidFill>
+                <a:latin typeface="Calibri"/>
+                <a:ea typeface="Calibri"/>
+                <a:cs typeface="Calibri"/>
+              </a:rPr>
+              <a:t> </a:t>
+            </a:r>
+            <a:r>
+              <a:rPr sz="1400" b="0" i="0" dirty="0" err="1">
+                <a:solidFill>
+                  <a:srgbClr val="142233"/>
+                </a:solidFill>
+                <a:latin typeface="Calibri"/>
+                <a:ea typeface="Calibri"/>
+                <a:cs typeface="Calibri"/>
+              </a:rPr>
+              <a:t>по</a:t>
+            </a:r>
+            <a:r>
+              <a:rPr sz="1400" b="0" i="0" dirty="0">
+                <a:solidFill>
+                  <a:srgbClr val="142233"/>
+                </a:solidFill>
+                <a:latin typeface="Calibri"/>
+                <a:ea typeface="Calibri"/>
+                <a:cs typeface="Calibri"/>
+              </a:rPr>
+              <a:t> </a:t>
+            </a:r>
+            <a:r>
+              <a:rPr sz="1400" b="0" i="0" dirty="0" err="1">
+                <a:solidFill>
+                  <a:srgbClr val="142233"/>
+                </a:solidFill>
+                <a:latin typeface="Calibri"/>
+                <a:ea typeface="Calibri"/>
+                <a:cs typeface="Calibri"/>
+              </a:rPr>
+              <a:t>памяти</a:t>
+            </a:r>
+            <a:r>
+              <a:rPr sz="1400" b="0" i="0" dirty="0">
+                <a:solidFill>
+                  <a:srgbClr val="142233"/>
+                </a:solidFill>
+                <a:latin typeface="Calibri"/>
+                <a:ea typeface="Calibri"/>
+                <a:cs typeface="Calibri"/>
+              </a:rPr>
+              <a:t> и </a:t>
+            </a:r>
+            <a:r>
+              <a:rPr sz="1400" b="0" i="0" dirty="0" err="1">
+                <a:solidFill>
+                  <a:srgbClr val="142233"/>
+                </a:solidFill>
+                <a:latin typeface="Calibri"/>
+                <a:ea typeface="Calibri"/>
+                <a:cs typeface="Calibri"/>
+              </a:rPr>
+              <a:t>старым</a:t>
+            </a:r>
+            <a:r>
+              <a:rPr sz="1400" b="0" i="0" dirty="0">
+                <a:solidFill>
+                  <a:srgbClr val="142233"/>
+                </a:solidFill>
+                <a:latin typeface="Calibri"/>
+                <a:ea typeface="Calibri"/>
+                <a:cs typeface="Calibri"/>
+              </a:rPr>
+              <a:t> WP.</a:t>
             </a:r>
           </a:p>
           <a:p>
@@ -20092,7 +20864,7 @@
               </a:spcAft>
             </a:pPr>
             <a:r>
-              <a:rPr sz="1400" b="0" i="0">
+              <a:rPr sz="1400" b="0" i="0" dirty="0">
                 <a:solidFill>
                   <a:srgbClr val="142233"/>
                 </a:solidFill>
@@ -20100,7 +20872,95 @@
                 <a:ea typeface="Calibri"/>
                 <a:cs typeface="Calibri"/>
               </a:rPr>
-              <a:t>▸  Ищу редакции на pravo.by вкладками.</a:t>
+              <a:t>▸  </a:t>
+            </a:r>
+            <a:r>
+              <a:rPr sz="1400" b="0" i="0" dirty="0" err="1">
+                <a:solidFill>
+                  <a:srgbClr val="142233"/>
+                </a:solidFill>
+                <a:latin typeface="Calibri"/>
+                <a:ea typeface="Calibri"/>
+                <a:cs typeface="Calibri"/>
+              </a:rPr>
+              <a:t>Ищу</a:t>
+            </a:r>
+            <a:r>
+              <a:rPr sz="1400" b="0" i="0" dirty="0">
+                <a:solidFill>
+                  <a:srgbClr val="142233"/>
+                </a:solidFill>
+                <a:latin typeface="Calibri"/>
+                <a:ea typeface="Calibri"/>
+                <a:cs typeface="Calibri"/>
+              </a:rPr>
+              <a:t> </a:t>
+            </a:r>
+            <a:r>
+              <a:rPr sz="1400" b="0" i="0" dirty="0" err="1">
+                <a:solidFill>
+                  <a:srgbClr val="142233"/>
+                </a:solidFill>
+                <a:latin typeface="Calibri"/>
+                <a:ea typeface="Calibri"/>
+                <a:cs typeface="Calibri"/>
+              </a:rPr>
+              <a:t>редакции</a:t>
+            </a:r>
+            <a:r>
+              <a:rPr sz="1400" b="0" i="0" dirty="0">
+                <a:solidFill>
+                  <a:srgbClr val="142233"/>
+                </a:solidFill>
+                <a:latin typeface="Calibri"/>
+                <a:ea typeface="Calibri"/>
+                <a:cs typeface="Calibri"/>
+              </a:rPr>
+              <a:t> </a:t>
+            </a:r>
+            <a:r>
+              <a:rPr sz="1400" b="0" i="0" dirty="0" err="1">
+                <a:solidFill>
+                  <a:srgbClr val="142233"/>
+                </a:solidFill>
+                <a:latin typeface="Calibri"/>
+                <a:ea typeface="Calibri"/>
+                <a:cs typeface="Calibri"/>
+              </a:rPr>
+              <a:t>на</a:t>
+            </a:r>
+            <a:r>
+              <a:rPr sz="1400" b="0" i="0" dirty="0">
+                <a:solidFill>
+                  <a:srgbClr val="142233"/>
+                </a:solidFill>
+                <a:latin typeface="Calibri"/>
+                <a:ea typeface="Calibri"/>
+                <a:cs typeface="Calibri"/>
+              </a:rPr>
+              <a:t> pravo.by </a:t>
+            </a:r>
+            <a:r>
+              <a:rPr sz="1400" b="0" i="0" dirty="0" err="1">
+                <a:solidFill>
+                  <a:srgbClr val="142233"/>
+                </a:solidFill>
+                <a:latin typeface="Calibri"/>
+                <a:ea typeface="Calibri"/>
+                <a:cs typeface="Calibri"/>
+              </a:rPr>
+              <a:t>вкладками</a:t>
+            </a:r>
+            <a:r>
+              <a:rPr sz="1400" b="0" i="0" dirty="0">
+                <a:solidFill>
+                  <a:srgbClr val="142233"/>
+                </a:solidFill>
+                <a:latin typeface="Calibri"/>
+                <a:ea typeface="Calibri"/>
+                <a:cs typeface="Calibri"/>
+              </a:rPr>
+              <a:t>.</a:t>
             </a:r>
           </a:p>
           <a:p>
@@ -20113,7 +20973,7 @@
               </a:spcAft>
             </a:pPr>
             <a:r>
-              <a:rPr sz="1400" b="0" i="0">
+              <a:rPr sz="1400" b="0" i="0" dirty="0">
                 <a:solidFill>
                   <a:srgbClr val="142233"/>
                 </a:solidFill>
@@ -20121,7 +20981,117 @@
                 <a:ea typeface="Calibri"/>
                 <a:cs typeface="Calibri"/>
               </a:rPr>
-              <a:t>▸  Читаю ГК/НК целиком «на всякий случай».</a:t>
+              <a:t>▸  </a:t>
+            </a:r>
+            <a:r>
+              <a:rPr sz="1400" b="0" i="0" dirty="0" err="1">
+                <a:solidFill>
+                  <a:srgbClr val="142233"/>
+                </a:solidFill>
+                <a:latin typeface="Calibri"/>
+                <a:ea typeface="Calibri"/>
+                <a:cs typeface="Calibri"/>
+              </a:rPr>
+              <a:t>Читаю</a:t>
+            </a:r>
+            <a:r>
+              <a:rPr sz="1400" b="0" i="0" dirty="0">
+                <a:solidFill>
+                  <a:srgbClr val="142233"/>
+                </a:solidFill>
+                <a:latin typeface="Calibri"/>
+                <a:ea typeface="Calibri"/>
+                <a:cs typeface="Calibri"/>
+              </a:rPr>
+              <a:t> ГК/НК </a:t>
+            </a:r>
+            <a:r>
+              <a:rPr sz="1400" b="0" i="0" dirty="0" err="1">
+                <a:solidFill>
+                  <a:srgbClr val="142233"/>
+                </a:solidFill>
+                <a:latin typeface="Calibri"/>
+                <a:ea typeface="Calibri"/>
+                <a:cs typeface="Calibri"/>
+              </a:rPr>
+              <a:t>целиком</a:t>
+            </a:r>
+            <a:r>
+              <a:rPr sz="1400" b="0" i="0" dirty="0">
+                <a:solidFill>
+                  <a:srgbClr val="142233"/>
+                </a:solidFill>
+                <a:latin typeface="Calibri"/>
+                <a:ea typeface="Calibri"/>
+                <a:cs typeface="Calibri"/>
+              </a:rPr>
+              <a:t> «</a:t>
+            </a:r>
+            <a:r>
+              <a:rPr sz="1400" b="0" i="0" dirty="0" err="1">
+                <a:solidFill>
+                  <a:srgbClr val="142233"/>
+                </a:solidFill>
+                <a:latin typeface="Calibri"/>
+                <a:ea typeface="Calibri"/>
+                <a:cs typeface="Calibri"/>
+              </a:rPr>
+              <a:t>на</a:t>
+            </a:r>
+            <a:r>
+              <a:rPr sz="1400" b="0" i="0" dirty="0">
+                <a:solidFill>
+                  <a:srgbClr val="142233"/>
+                </a:solidFill>
+                <a:latin typeface="Calibri"/>
+                <a:ea typeface="Calibri"/>
+                <a:cs typeface="Calibri"/>
+              </a:rPr>
+              <a:t> </a:t>
+            </a:r>
+            <a:r>
+              <a:rPr sz="1400" b="0" i="0" dirty="0" err="1">
+                <a:solidFill>
+                  <a:srgbClr val="142233"/>
+                </a:solidFill>
+                <a:latin typeface="Calibri"/>
+                <a:ea typeface="Calibri"/>
+                <a:cs typeface="Calibri"/>
+              </a:rPr>
+              <a:t>всякий</a:t>
+            </a:r>
+            <a:r>
+              <a:rPr sz="1400" b="0" i="0" dirty="0">
+                <a:solidFill>
+                  <a:srgbClr val="142233"/>
+                </a:solidFill>
+                <a:latin typeface="Calibri"/>
+                <a:ea typeface="Calibri"/>
+                <a:cs typeface="Calibri"/>
+              </a:rPr>
+              <a:t> </a:t>
+            </a:r>
+            <a:r>
+              <a:rPr sz="1400" b="0" i="0" dirty="0" err="1">
+                <a:solidFill>
+                  <a:srgbClr val="142233"/>
+                </a:solidFill>
+                <a:latin typeface="Calibri"/>
+                <a:ea typeface="Calibri"/>
+                <a:cs typeface="Calibri"/>
+              </a:rPr>
+              <a:t>случай</a:t>
+            </a:r>
+            <a:r>
+              <a:rPr sz="1400" b="0" i="0" dirty="0">
+                <a:solidFill>
+                  <a:srgbClr val="142233"/>
+                </a:solidFill>
+                <a:latin typeface="Calibri"/>
+                <a:ea typeface="Calibri"/>
+                <a:cs typeface="Calibri"/>
+              </a:rPr>
+              <a:t>».</a:t>
             </a:r>
           </a:p>
           <a:p>
@@ -20134,7 +21104,7 @@
               </a:spcAft>
             </a:pPr>
             <a:r>
-              <a:rPr sz="1400" b="0" i="0">
+              <a:rPr sz="1400" b="0" i="0" dirty="0">
                 <a:solidFill>
                   <a:srgbClr val="142233"/>
                 </a:solidFill>
@@ -20142,7 +21112,95 @@
                 <a:ea typeface="Calibri"/>
                 <a:cs typeface="Calibri"/>
               </a:rPr>
-              <a:t>▸  Выписываю нормы в черновик вручную.</a:t>
+              <a:t>▸  </a:t>
+            </a:r>
+            <a:r>
+              <a:rPr sz="1400" b="0" i="0" dirty="0" err="1">
+                <a:solidFill>
+                  <a:srgbClr val="142233"/>
+                </a:solidFill>
+                <a:latin typeface="Calibri"/>
+                <a:ea typeface="Calibri"/>
+                <a:cs typeface="Calibri"/>
+              </a:rPr>
+              <a:t>Выписываю</a:t>
+            </a:r>
+            <a:r>
+              <a:rPr sz="1400" b="0" i="0" dirty="0">
+                <a:solidFill>
+                  <a:srgbClr val="142233"/>
+                </a:solidFill>
+                <a:latin typeface="Calibri"/>
+                <a:ea typeface="Calibri"/>
+                <a:cs typeface="Calibri"/>
+              </a:rPr>
+              <a:t> </a:t>
+            </a:r>
+            <a:r>
+              <a:rPr sz="1400" b="0" i="0" dirty="0" err="1">
+                <a:solidFill>
+                  <a:srgbClr val="142233"/>
+                </a:solidFill>
+                <a:latin typeface="Calibri"/>
+                <a:ea typeface="Calibri"/>
+                <a:cs typeface="Calibri"/>
+              </a:rPr>
+              <a:t>нормы</a:t>
+            </a:r>
+            <a:r>
+              <a:rPr sz="1400" b="0" i="0" dirty="0">
+                <a:solidFill>
+                  <a:srgbClr val="142233"/>
+                </a:solidFill>
+                <a:latin typeface="Calibri"/>
+                <a:ea typeface="Calibri"/>
+                <a:cs typeface="Calibri"/>
+              </a:rPr>
+              <a:t> в </a:t>
+            </a:r>
+            <a:r>
+              <a:rPr sz="1400" b="0" i="0" dirty="0" err="1">
+                <a:solidFill>
+                  <a:srgbClr val="142233"/>
+                </a:solidFill>
+                <a:latin typeface="Calibri"/>
+                <a:ea typeface="Calibri"/>
+                <a:cs typeface="Calibri"/>
+              </a:rPr>
+              <a:t>черновик</a:t>
+            </a:r>
+            <a:r>
+              <a:rPr sz="1400" b="0" i="0" dirty="0">
+                <a:solidFill>
+                  <a:srgbClr val="142233"/>
+                </a:solidFill>
+                <a:latin typeface="Calibri"/>
+                <a:ea typeface="Calibri"/>
+                <a:cs typeface="Calibri"/>
+              </a:rPr>
+              <a:t> </a:t>
+            </a:r>
+            <a:r>
+              <a:rPr sz="1400" b="0" i="0" dirty="0" err="1">
+                <a:solidFill>
+                  <a:srgbClr val="142233"/>
+                </a:solidFill>
+                <a:latin typeface="Calibri"/>
+                <a:ea typeface="Calibri"/>
+                <a:cs typeface="Calibri"/>
+              </a:rPr>
+              <a:t>вручную</a:t>
+            </a:r>
+            <a:r>
+              <a:rPr sz="1400" b="0" i="0" dirty="0">
+                <a:solidFill>
+                  <a:srgbClr val="142233"/>
+                </a:solidFill>
+                <a:latin typeface="Calibri"/>
+                <a:ea typeface="Calibri"/>
+                <a:cs typeface="Calibri"/>
+              </a:rPr>
+              <a:t>.</a:t>
             </a:r>
           </a:p>
           <a:p>
@@ -20155,7 +21213,7 @@
               </a:spcAft>
             </a:pPr>
             <a:r>
-              <a:rPr sz="1400" b="0" i="0">
+              <a:rPr sz="1400" b="0" i="0" dirty="0">
                 <a:solidFill>
                   <a:srgbClr val="142233"/>
                 </a:solidFill>
@@ -20163,7 +21221,95 @@
                 <a:ea typeface="Calibri"/>
                 <a:cs typeface="Calibri"/>
               </a:rPr>
-              <a:t>▸  Программу проверки собираю с нуля.</a:t>
+              <a:t>▸  </a:t>
+            </a:r>
+            <a:r>
+              <a:rPr sz="1400" b="0" i="0" dirty="0" err="1">
+                <a:solidFill>
+                  <a:srgbClr val="142233"/>
+                </a:solidFill>
+                <a:latin typeface="Calibri"/>
+                <a:ea typeface="Calibri"/>
+                <a:cs typeface="Calibri"/>
+              </a:rPr>
+              <a:t>Программу</a:t>
+            </a:r>
+            <a:r>
+              <a:rPr sz="1400" b="0" i="0" dirty="0">
+                <a:solidFill>
+                  <a:srgbClr val="142233"/>
+                </a:solidFill>
+                <a:latin typeface="Calibri"/>
+                <a:ea typeface="Calibri"/>
+                <a:cs typeface="Calibri"/>
+              </a:rPr>
+              <a:t> </a:t>
+            </a:r>
+            <a:r>
+              <a:rPr sz="1400" b="0" i="0" dirty="0" err="1">
+                <a:solidFill>
+                  <a:srgbClr val="142233"/>
+                </a:solidFill>
+                <a:latin typeface="Calibri"/>
+                <a:ea typeface="Calibri"/>
+                <a:cs typeface="Calibri"/>
+              </a:rPr>
+              <a:t>проверки</a:t>
+            </a:r>
+            <a:r>
+              <a:rPr sz="1400" b="0" i="0" dirty="0">
+                <a:solidFill>
+                  <a:srgbClr val="142233"/>
+                </a:solidFill>
+                <a:latin typeface="Calibri"/>
+                <a:ea typeface="Calibri"/>
+                <a:cs typeface="Calibri"/>
+              </a:rPr>
+              <a:t> </a:t>
+            </a:r>
+            <a:r>
+              <a:rPr sz="1400" b="0" i="0" dirty="0" err="1">
+                <a:solidFill>
+                  <a:srgbClr val="142233"/>
+                </a:solidFill>
+                <a:latin typeface="Calibri"/>
+                <a:ea typeface="Calibri"/>
+                <a:cs typeface="Calibri"/>
+              </a:rPr>
+              <a:t>собираю</a:t>
+            </a:r>
+            <a:r>
+              <a:rPr sz="1400" b="0" i="0" dirty="0">
+                <a:solidFill>
+                  <a:srgbClr val="142233"/>
+                </a:solidFill>
+                <a:latin typeface="Calibri"/>
+                <a:ea typeface="Calibri"/>
+                <a:cs typeface="Calibri"/>
+              </a:rPr>
+              <a:t> с </a:t>
+            </a:r>
+            <a:r>
+              <a:rPr sz="1400" b="0" i="0" dirty="0" err="1">
+                <a:solidFill>
+                  <a:srgbClr val="142233"/>
+                </a:solidFill>
+                <a:latin typeface="Calibri"/>
+                <a:ea typeface="Calibri"/>
+                <a:cs typeface="Calibri"/>
+              </a:rPr>
+              <a:t>нуля</a:t>
+            </a:r>
+            <a:r>
+              <a:rPr sz="1400" b="0" i="0" dirty="0">
+                <a:solidFill>
+                  <a:srgbClr val="142233"/>
+                </a:solidFill>
+                <a:latin typeface="Calibri"/>
+                <a:ea typeface="Calibri"/>
+                <a:cs typeface="Calibri"/>
+              </a:rPr>
+              <a:t>.</a:t>
             </a:r>
           </a:p>
           <a:p>
@@ -20176,7 +21322,7 @@
               </a:spcAft>
             </a:pPr>
             <a:r>
-              <a:rPr sz="1400" b="0" i="0">
+              <a:rPr sz="1400" b="0" i="0" dirty="0">
                 <a:solidFill>
                   <a:srgbClr val="142233"/>
                 </a:solidFill>
@@ -20184,20 +21330,10 @@
                 <a:ea typeface="Calibri"/>
                 <a:cs typeface="Calibri"/>
               </a:rPr>
-              <a:t>▸  Гипотезы — в голове или в Excel с нуля.</a:t>
-            </a:r>
-          </a:p>
-          <a:p>
-            <a:pPr algn="l">
-              <a:spcBef>
-                <a:spcPts val="1000"/>
-              </a:spcBef>
-              <a:spcAft>
-                <a:spcPts val="0"/>
-              </a:spcAft>
-            </a:pPr>
-            <a:r>
-              <a:rPr sz="1400" b="0" i="0">
+              <a:t>▸  </a:t>
+            </a:r>
+            <a:r>
+              <a:rPr sz="1400" b="0" i="0" dirty="0" err="1">
                 <a:solidFill>
                   <a:srgbClr val="142233"/>
                 </a:solidFill>
@@ -20205,8 +21341,93 @@
                 <a:ea typeface="Calibri"/>
                 <a:cs typeface="Calibri"/>
               </a:rPr>
-              <a:t>▸  Риск: устаревшая редакция или чужая юрисдикция.</a:t>
-            </a:r>
+              <a:t>Гипотезы</a:t>
+            </a:r>
+            <a:r>
+              <a:rPr sz="1400" b="0" i="0" dirty="0">
+                <a:solidFill>
+                  <a:srgbClr val="142233"/>
+                </a:solidFill>
+                <a:latin typeface="Calibri"/>
+                <a:ea typeface="Calibri"/>
+                <a:cs typeface="Calibri"/>
+              </a:rPr>
+              <a:t> — в </a:t>
+            </a:r>
+            <a:r>
+              <a:rPr sz="1400" b="0" i="0" dirty="0" err="1">
+                <a:solidFill>
+                  <a:srgbClr val="142233"/>
+                </a:solidFill>
+                <a:latin typeface="Calibri"/>
+                <a:ea typeface="Calibri"/>
+                <a:cs typeface="Calibri"/>
+              </a:rPr>
+              <a:t>голове</a:t>
+            </a:r>
+            <a:r>
+              <a:rPr sz="1400" b="0" i="0" dirty="0">
+                <a:solidFill>
+                  <a:srgbClr val="142233"/>
+                </a:solidFill>
+                <a:latin typeface="Calibri"/>
+                <a:ea typeface="Calibri"/>
+                <a:cs typeface="Calibri"/>
+              </a:rPr>
+              <a:t> </a:t>
+            </a:r>
+            <a:r>
+              <a:rPr sz="1400" b="0" i="0" dirty="0" err="1">
+                <a:solidFill>
+                  <a:srgbClr val="142233"/>
+                </a:solidFill>
+                <a:latin typeface="Calibri"/>
+                <a:ea typeface="Calibri"/>
+                <a:cs typeface="Calibri"/>
+              </a:rPr>
+              <a:t>или</a:t>
+            </a:r>
+            <a:r>
+              <a:rPr sz="1400" b="0" i="0" dirty="0">
+                <a:solidFill>
+                  <a:srgbClr val="142233"/>
+                </a:solidFill>
+                <a:latin typeface="Calibri"/>
+                <a:ea typeface="Calibri"/>
+                <a:cs typeface="Calibri"/>
+              </a:rPr>
+              <a:t> в Excel с </a:t>
+            </a:r>
+            <a:r>
+              <a:rPr sz="1400" b="0" i="0" dirty="0" err="1">
+                <a:solidFill>
+                  <a:srgbClr val="142233"/>
+                </a:solidFill>
+                <a:latin typeface="Calibri"/>
+                <a:ea typeface="Calibri"/>
+                <a:cs typeface="Calibri"/>
+              </a:rPr>
+              <a:t>нуля</a:t>
+            </a:r>
+            <a:r>
+              <a:rPr sz="1400" b="0" i="0" dirty="0" smtClean="0">
+                <a:solidFill>
+                  <a:srgbClr val="142233"/>
+                </a:solidFill>
+                <a:latin typeface="Calibri"/>
+                <a:ea typeface="Calibri"/>
+                <a:cs typeface="Calibri"/>
+              </a:rPr>
+              <a:t>.</a:t>
+            </a:r>
+            <a:endParaRPr sz="1400" b="0" i="0" dirty="0">
+              <a:solidFill>
+                <a:srgbClr val="142233"/>
+              </a:solidFill>
+              <a:latin typeface="Calibri"/>
+              <a:ea typeface="Calibri"/>
+              <a:cs typeface="Calibri"/>
+            </a:endParaRPr>
           </a:p>
         </p:txBody>
       </p:sp>
@@ -20249,7 +21470,7 @@
           </a:fontRef>
         </p:style>
         <p:txBody>
-          <a:bodyPr rtlCol="0" anchor="ctr" wrap="square" lIns="256032" tIns="201168"/>
+          <a:bodyPr wrap="square" lIns="256032" tIns="201168" rtlCol="0" anchor="ctr"/>
           <a:lstStyle/>
           <a:p>
             <a:pPr algn="l"/>
@@ -20497,7 +21718,7 @@
 </file>
 
 <file path=ppt/slides/slide7.xml><?xml version="1.0" encoding="utf-8"?>
-<p:sld xmlns:a="http://schemas.openxmlformats.org/drawingml/2006/main" xmlns:p="http://schemas.openxmlformats.org/presentationml/2006/main" xmlns:r="http://schemas.openxmlformats.org/officeDocument/2006/relationships">
+<p:sld xmlns:a="http://schemas.openxmlformats.org/drawingml/2006/main" xmlns:r="http://schemas.openxmlformats.org/officeDocument/2006/relationships" xmlns:p="http://schemas.openxmlformats.org/presentationml/2006/main">
   <p:cSld>
     <p:spTree>
       <p:nvGrpSpPr>
@@ -20505,7 +21726,14 @@
         <p:cNvGrpSpPr/>
         <p:nvPr/>
       </p:nvGrpSpPr>
-      <p:grpSpPr/>
+      <p:grpSpPr>
+        <a:xfrm>
+          <a:off x="0" y="0"/>
+          <a:ext cx="0" cy="0"/>
+          <a:chOff x="0" y="0"/>
+          <a:chExt cx="0" cy="0"/>
+        </a:xfrm>
+      </p:grpSpPr>
       <p:sp>
         <p:nvSpPr>
           <p:cNvPr id="2" name="Rectangle 1"/>
@@ -20547,6 +21775,7 @@
           <a:lstStyle/>
           <a:p>
             <a:pPr algn="ctr"/>
+            <a:endParaRPr/>
           </a:p>
         </p:txBody>
       </p:sp>
@@ -20591,6 +21820,7 @@
           <a:lstStyle/>
           <a:p>
             <a:pPr algn="ctr"/>
+            <a:endParaRPr/>
           </a:p>
         </p:txBody>
       </p:sp>
@@ -20635,6 +21865,7 @@
           <a:lstStyle/>
           <a:p>
             <a:pPr algn="ctr"/>
+            <a:endParaRPr/>
           </a:p>
         </p:txBody>
       </p:sp>
@@ -20679,6 +21910,7 @@
           <a:lstStyle/>
           <a:p>
             <a:pPr algn="ctr"/>
+            <a:endParaRPr/>
           </a:p>
         </p:txBody>
       </p:sp>
@@ -20723,6 +21955,7 @@
           <a:lstStyle/>
           <a:p>
             <a:pPr algn="ctr"/>
+            <a:endParaRPr/>
           </a:p>
         </p:txBody>
       </p:sp>
@@ -20836,7 +22069,7 @@
           </a:fontRef>
         </p:style>
         <p:txBody>
-          <a:bodyPr rtlCol="0" anchor="ctr" wrap="square"/>
+          <a:bodyPr wrap="square" rtlCol="0" anchor="ctr"/>
           <a:lstStyle/>
           <a:p>
             <a:pPr algn="ctr"/>
@@ -20895,7 +22128,7 @@
           </a:fontRef>
         </p:style>
         <p:txBody>
-          <a:bodyPr rtlCol="0" anchor="ctr" wrap="square" tIns="201168"/>
+          <a:bodyPr wrap="square" tIns="201168" rtlCol="0" anchor="ctr"/>
           <a:lstStyle/>
           <a:p>
             <a:pPr algn="ctr"/>
@@ -20995,6 +22228,7 @@
           <a:lstStyle/>
           <a:p>
             <a:pPr algn="ctr"/>
+            <a:endParaRPr/>
           </a:p>
         </p:txBody>
       </p:sp>
@@ -21034,7 +22268,7 @@
           </a:fontRef>
         </p:style>
         <p:txBody>
-          <a:bodyPr rtlCol="0" anchor="ctr" wrap="square"/>
+          <a:bodyPr wrap="square" rtlCol="0" anchor="ctr"/>
           <a:lstStyle/>
           <a:p>
             <a:pPr algn="ctr"/>
@@ -21093,7 +22327,7 @@
           </a:fontRef>
         </p:style>
         <p:txBody>
-          <a:bodyPr rtlCol="0" anchor="ctr" wrap="square" tIns="201168"/>
+          <a:bodyPr wrap="square" tIns="201168" rtlCol="0" anchor="ctr"/>
           <a:lstStyle/>
           <a:p>
             <a:pPr algn="ctr"/>
@@ -21193,6 +22427,7 @@
           <a:lstStyle/>
           <a:p>
             <a:pPr algn="ctr"/>
+            <a:endParaRPr/>
           </a:p>
         </p:txBody>
       </p:sp>
@@ -21232,7 +22467,7 @@
           </a:fontRef>
         </p:style>
         <p:txBody>
-          <a:bodyPr rtlCol="0" anchor="ctr" wrap="square"/>
+          <a:bodyPr wrap="square" rtlCol="0" anchor="ctr"/>
           <a:lstStyle/>
           <a:p>
             <a:pPr algn="ctr"/>
@@ -21291,7 +22526,7 @@
           </a:fontRef>
         </p:style>
         <p:txBody>
-          <a:bodyPr rtlCol="0" anchor="ctr" wrap="square" tIns="201168"/>
+          <a:bodyPr wrap="square" tIns="201168" rtlCol="0" anchor="ctr"/>
           <a:lstStyle/>
           <a:p>
             <a:pPr algn="ctr"/>
@@ -21391,6 +22626,7 @@
           <a:lstStyle/>
           <a:p>
             <a:pPr algn="ctr"/>
+            <a:endParaRPr/>
           </a:p>
         </p:txBody>
       </p:sp>
@@ -21430,7 +22666,7 @@
           </a:fontRef>
         </p:style>
         <p:txBody>
-          <a:bodyPr rtlCol="0" anchor="ctr" wrap="square"/>
+          <a:bodyPr wrap="square" rtlCol="0" anchor="ctr"/>
           <a:lstStyle/>
           <a:p>
             <a:pPr algn="ctr"/>
@@ -21489,7 +22725,7 @@
           </a:fontRef>
         </p:style>
         <p:txBody>
-          <a:bodyPr rtlCol="0" anchor="ctr" wrap="square" tIns="201168"/>
+          <a:bodyPr wrap="square" tIns="201168" rtlCol="0" anchor="ctr"/>
           <a:lstStyle/>
           <a:p>
             <a:pPr algn="ctr"/>
@@ -21589,6 +22825,7 @@
           <a:lstStyle/>
           <a:p>
             <a:pPr algn="ctr"/>
+            <a:endParaRPr/>
           </a:p>
         </p:txBody>
       </p:sp>
@@ -21628,7 +22865,7 @@
           </a:fontRef>
         </p:style>
         <p:txBody>
-          <a:bodyPr rtlCol="0" anchor="ctr" wrap="square"/>
+          <a:bodyPr wrap="square" rtlCol="0" anchor="ctr"/>
           <a:lstStyle/>
           <a:p>
             <a:pPr algn="ctr"/>
@@ -21687,7 +22924,7 @@
           </a:fontRef>
         </p:style>
         <p:txBody>
-          <a:bodyPr rtlCol="0" anchor="ctr" wrap="square" tIns="201168"/>
+          <a:bodyPr wrap="square" tIns="201168" rtlCol="0" anchor="ctr"/>
           <a:lstStyle/>
           <a:p>
             <a:pPr algn="ctr"/>
@@ -21787,6 +23024,7 @@
           <a:lstStyle/>
           <a:p>
             <a:pPr algn="ctr"/>
+            <a:endParaRPr/>
           </a:p>
         </p:txBody>
       </p:sp>
@@ -21826,7 +23064,7 @@
           </a:fontRef>
         </p:style>
         <p:txBody>
-          <a:bodyPr rtlCol="0" anchor="ctr" wrap="square"/>
+          <a:bodyPr wrap="square" rtlCol="0" anchor="ctr"/>
           <a:lstStyle/>
           <a:p>
             <a:pPr algn="ctr"/>
@@ -21885,7 +23123,7 @@
           </a:fontRef>
         </p:style>
         <p:txBody>
-          <a:bodyPr rtlCol="0" anchor="ctr" wrap="square" tIns="201168"/>
+          <a:bodyPr wrap="square" tIns="201168" rtlCol="0" anchor="ctr"/>
           <a:lstStyle/>
           <a:p>
             <a:pPr algn="ctr"/>
@@ -21986,7 +23224,7 @@
           </a:fontRef>
         </p:style>
         <p:txBody>
-          <a:bodyPr rtlCol="0" anchor="ctr" wrap="square" lIns="256032" tIns="164592"/>
+          <a:bodyPr wrap="square" lIns="256032" tIns="164592" rtlCol="0" anchor="ctr"/>
           <a:lstStyle/>
           <a:p>
             <a:pPr algn="l"/>
@@ -22108,7 +23346,7 @@
 </file>
 
 <file path=ppt/slides/slide8.xml><?xml version="1.0" encoding="utf-8"?>
-<p:sld xmlns:a="http://schemas.openxmlformats.org/drawingml/2006/main" xmlns:p="http://schemas.openxmlformats.org/presentationml/2006/main" xmlns:r="http://schemas.openxmlformats.org/officeDocument/2006/relationships">
+<p:sld xmlns:a="http://schemas.openxmlformats.org/drawingml/2006/main" xmlns:r="http://schemas.openxmlformats.org/officeDocument/2006/relationships" xmlns:p="http://schemas.openxmlformats.org/presentationml/2006/main">
   <p:cSld>
     <p:spTree>
       <p:nvGrpSpPr>
@@ -22116,7 +23354,14 @@
         <p:cNvGrpSpPr/>
         <p:nvPr/>
       </p:nvGrpSpPr>
-      <p:grpSpPr/>
+      <p:grpSpPr>
+        <a:xfrm>
+          <a:off x="0" y="0"/>
+          <a:ext cx="0" cy="0"/>
+          <a:chOff x="0" y="0"/>
+          <a:chExt cx="0" cy="0"/>
+        </a:xfrm>
+      </p:grpSpPr>
       <p:sp>
         <p:nvSpPr>
           <p:cNvPr id="2" name="Rectangle 1"/>
@@ -22158,6 +23403,7 @@
           <a:lstStyle/>
           <a:p>
             <a:pPr algn="ctr"/>
+            <a:endParaRPr/>
           </a:p>
         </p:txBody>
       </p:sp>
@@ -22202,6 +23448,7 @@
           <a:lstStyle/>
           <a:p>
             <a:pPr algn="ctr"/>
+            <a:endParaRPr/>
           </a:p>
         </p:txBody>
       </p:sp>
@@ -22246,6 +23493,7 @@
           <a:lstStyle/>
           <a:p>
             <a:pPr algn="ctr"/>
+            <a:endParaRPr/>
           </a:p>
         </p:txBody>
       </p:sp>
@@ -22290,6 +23538,7 @@
           <a:lstStyle/>
           <a:p>
             <a:pPr algn="ctr"/>
+            <a:endParaRPr/>
           </a:p>
         </p:txBody>
       </p:sp>
@@ -22334,6 +23583,7 @@
           <a:lstStyle/>
           <a:p>
             <a:pPr algn="ctr"/>
+            <a:endParaRPr/>
           </a:p>
         </p:txBody>
       </p:sp>
@@ -22456,6 +23706,7 @@
           <a:lstStyle/>
           <a:p>
             <a:pPr algn="ctr"/>
+            <a:endParaRPr/>
           </a:p>
         </p:txBody>
       </p:sp>
@@ -22500,6 +23751,7 @@
           <a:lstStyle/>
           <a:p>
             <a:pPr algn="ctr"/>
+            <a:endParaRPr/>
           </a:p>
         </p:txBody>
       </p:sp>
@@ -22622,6 +23874,7 @@
           <a:lstStyle/>
           <a:p>
             <a:pPr algn="ctr"/>
+            <a:endParaRPr/>
           </a:p>
         </p:txBody>
       </p:sp>
@@ -22666,6 +23919,7 @@
           <a:lstStyle/>
           <a:p>
             <a:pPr algn="ctr"/>
+            <a:endParaRPr/>
           </a:p>
         </p:txBody>
       </p:sp>
@@ -22788,6 +24042,7 @@
           <a:lstStyle/>
           <a:p>
             <a:pPr algn="ctr"/>
+            <a:endParaRPr/>
           </a:p>
         </p:txBody>
       </p:sp>
@@ -22832,6 +24087,7 @@
           <a:lstStyle/>
           <a:p>
             <a:pPr algn="ctr"/>
+            <a:endParaRPr/>
           </a:p>
         </p:txBody>
       </p:sp>
@@ -22954,6 +24210,7 @@
           <a:lstStyle/>
           <a:p>
             <a:pPr algn="ctr"/>
+            <a:endParaRPr/>
           </a:p>
         </p:txBody>
       </p:sp>
@@ -22998,6 +24255,7 @@
           <a:lstStyle/>
           <a:p>
             <a:pPr algn="ctr"/>
+            <a:endParaRPr/>
           </a:p>
         </p:txBody>
       </p:sp>
@@ -23120,6 +24378,7 @@
           <a:lstStyle/>
           <a:p>
             <a:pPr algn="ctr"/>
+            <a:endParaRPr/>
           </a:p>
         </p:txBody>
       </p:sp>
@@ -23164,6 +24423,7 @@
           <a:lstStyle/>
           <a:p>
             <a:pPr algn="ctr"/>
+            <a:endParaRPr/>
           </a:p>
         </p:txBody>
       </p:sp>
@@ -23286,6 +24546,7 @@
           <a:lstStyle/>
           <a:p>
             <a:pPr algn="ctr"/>
+            <a:endParaRPr/>
           </a:p>
         </p:txBody>
       </p:sp>
@@ -23330,6 +24591,7 @@
           <a:lstStyle/>
           <a:p>
             <a:pPr algn="ctr"/>
+            <a:endParaRPr/>
           </a:p>
         </p:txBody>
       </p:sp>
@@ -23452,6 +24714,7 @@
           <a:lstStyle/>
           <a:p>
             <a:pPr algn="ctr"/>
+            <a:endParaRPr/>
           </a:p>
         </p:txBody>
       </p:sp>
@@ -23496,6 +24759,7 @@
           <a:lstStyle/>
           <a:p>
             <a:pPr algn="ctr"/>
+            <a:endParaRPr/>
           </a:p>
         </p:txBody>
       </p:sp>
@@ -23618,6 +24882,7 @@
           <a:lstStyle/>
           <a:p>
             <a:pPr algn="ctr"/>
+            <a:endParaRPr/>
           </a:p>
         </p:txBody>
       </p:sp>
@@ -23662,6 +24927,7 @@
           <a:lstStyle/>
           <a:p>
             <a:pPr algn="ctr"/>
+            <a:endParaRPr/>
           </a:p>
         </p:txBody>
       </p:sp>
@@ -23822,7 +25088,7 @@
 </file>
 
 <file path=ppt/slides/slide9.xml><?xml version="1.0" encoding="utf-8"?>
-<p:sld xmlns:a="http://schemas.openxmlformats.org/drawingml/2006/main" xmlns:p="http://schemas.openxmlformats.org/presentationml/2006/main" xmlns:r="http://schemas.openxmlformats.org/officeDocument/2006/relationships">
+<p:sld xmlns:a="http://schemas.openxmlformats.org/drawingml/2006/main" xmlns:r="http://schemas.openxmlformats.org/officeDocument/2006/relationships" xmlns:p="http://schemas.openxmlformats.org/presentationml/2006/main">
   <p:cSld>
     <p:spTree>
       <p:nvGrpSpPr>
@@ -23830,7 +25096,14 @@
         <p:cNvGrpSpPr/>
         <p:nvPr/>
       </p:nvGrpSpPr>
-      <p:grpSpPr/>
+      <p:grpSpPr>
+        <a:xfrm>
+          <a:off x="0" y="0"/>
+          <a:ext cx="0" cy="0"/>
+          <a:chOff x="0" y="0"/>
+          <a:chExt cx="0" cy="0"/>
+        </a:xfrm>
+      </p:grpSpPr>
       <p:sp>
         <p:nvSpPr>
           <p:cNvPr id="2" name="Rectangle 1"/>
@@ -23872,6 +25145,7 @@
           <a:lstStyle/>
           <a:p>
             <a:pPr algn="ctr"/>
+            <a:endParaRPr/>
           </a:p>
         </p:txBody>
       </p:sp>
@@ -23916,6 +25190,7 @@
           <a:lstStyle/>
           <a:p>
             <a:pPr algn="ctr"/>
+            <a:endParaRPr/>
           </a:p>
         </p:txBody>
       </p:sp>
@@ -23960,6 +25235,7 @@
           <a:lstStyle/>
           <a:p>
             <a:pPr algn="ctr"/>
+            <a:endParaRPr/>
           </a:p>
         </p:txBody>
       </p:sp>
@@ -24004,6 +25280,7 @@
           <a:lstStyle/>
           <a:p>
             <a:pPr algn="ctr"/>
+            <a:endParaRPr/>
           </a:p>
         </p:txBody>
       </p:sp>
@@ -24048,6 +25325,7 @@
           <a:lstStyle/>
           <a:p>
             <a:pPr algn="ctr"/>
+            <a:endParaRPr/>
           </a:p>
         </p:txBody>
       </p:sp>
@@ -24170,6 +25448,7 @@
           <a:lstStyle/>
           <a:p>
             <a:pPr algn="ctr"/>
+            <a:endParaRPr/>
           </a:p>
         </p:txBody>
       </p:sp>
@@ -24212,7 +25491,7 @@
           </a:fontRef>
         </p:style>
         <p:txBody>
-          <a:bodyPr rtlCol="0" anchor="ctr" wrap="square"/>
+          <a:bodyPr wrap="square" rtlCol="0" anchor="ctr"/>
           <a:lstStyle/>
           <a:p>
             <a:pPr algn="ctr"/>
@@ -24349,6 +25628,7 @@
           <a:lstStyle/>
           <a:p>
             <a:pPr algn="ctr"/>
+            <a:endParaRPr/>
           </a:p>
         </p:txBody>
       </p:sp>
@@ -24391,7 +25671,7 @@
           </a:fontRef>
         </p:style>
         <p:txBody>
-          <a:bodyPr rtlCol="0" anchor="ctr" wrap="square"/>
+          <a:bodyPr wrap="square" rtlCol="0" anchor="ctr"/>
           <a:lstStyle/>
           <a:p>
             <a:pPr algn="ctr"/>
@@ -24528,6 +25808,7 @@
           <a:lstStyle/>
           <a:p>
             <a:pPr algn="ctr"/>
+            <a:endParaRPr/>
           </a:p>
         </p:txBody>
       </p:sp>
@@ -24570,7 +25851,7 @@
           </a:fontRef>
         </p:style>
         <p:txBody>
-          <a:bodyPr rtlCol="0" anchor="ctr" wrap="square"/>
+          <a:bodyPr wrap="square" rtlCol="0" anchor="ctr"/>
           <a:lstStyle/>
           <a:p>
             <a:pPr algn="ctr"/>
@@ -24707,6 +25988,7 @@
           <a:lstStyle/>
           <a:p>
             <a:pPr algn="ctr"/>
+            <a:endParaRPr/>
           </a:p>
         </p:txBody>
       </p:sp>
@@ -24749,7 +26031,7 @@
           </a:fontRef>
         </p:style>
         <p:txBody>
-          <a:bodyPr rtlCol="0" anchor="ctr" wrap="square"/>
+          <a:bodyPr wrap="square" rtlCol="0" anchor="ctr"/>
           <a:lstStyle/>
           <a:p>
             <a:pPr algn="ctr"/>
@@ -24886,6 +26168,7 @@
           <a:lstStyle/>
           <a:p>
             <a:pPr algn="ctr"/>
+            <a:endParaRPr/>
           </a:p>
         </p:txBody>
       </p:sp>
@@ -24928,7 +26211,7 @@
           </a:fontRef>
         </p:style>
         <p:txBody>
-          <a:bodyPr rtlCol="0" anchor="ctr" wrap="square"/>
+          <a:bodyPr wrap="square" rtlCol="0" anchor="ctr"/>
           <a:lstStyle/>
           <a:p>
             <a:pPr algn="ctr"/>
@@ -25065,6 +26348,7 @@
           <a:lstStyle/>
           <a:p>
             <a:pPr algn="ctr"/>
+            <a:endParaRPr/>
           </a:p>
         </p:txBody>
       </p:sp>
@@ -25107,7 +26391,7 @@
           </a:fontRef>
         </p:style>
         <p:txBody>
-          <a:bodyPr rtlCol="0" anchor="ctr" wrap="square"/>
+          <a:bodyPr wrap="square" rtlCol="0" anchor="ctr"/>
           <a:lstStyle/>
           <a:p>
             <a:pPr algn="ctr"/>

--- a/docs/Аудитор_ИИ-агент_презентация.pptx
+++ b/docs/Аудитор_ИИ-агент_презентация.pptx
@@ -5,25 +5,25 @@
     <p:sldMasterId id="2147483648" r:id="rId1"/>
   </p:sldMasterIdLst>
   <p:sldIdLst>
-    <p:sldId id="256" r:id="rId7"/>
-    <p:sldId id="257" r:id="rId8"/>
-    <p:sldId id="258" r:id="rId9"/>
-    <p:sldId id="259" r:id="rId10"/>
-    <p:sldId id="260" r:id="rId11"/>
-    <p:sldId id="261" r:id="rId12"/>
-    <p:sldId id="262" r:id="rId13"/>
-    <p:sldId id="263" r:id="rId14"/>
-    <p:sldId id="264" r:id="rId15"/>
-    <p:sldId id="265" r:id="rId16"/>
-    <p:sldId id="266" r:id="rId17"/>
-    <p:sldId id="267" r:id="rId18"/>
-    <p:sldId id="268" r:id="rId19"/>
-    <p:sldId id="269" r:id="rId20"/>
-    <p:sldId id="270" r:id="rId21"/>
-    <p:sldId id="271" r:id="rId22"/>
-    <p:sldId id="272" r:id="rId23"/>
+    <p:sldId id="256" r:id="rId2"/>
+    <p:sldId id="257" r:id="rId3"/>
+    <p:sldId id="258" r:id="rId4"/>
+    <p:sldId id="259" r:id="rId5"/>
+    <p:sldId id="260" r:id="rId6"/>
+    <p:sldId id="261" r:id="rId7"/>
+    <p:sldId id="262" r:id="rId8"/>
+    <p:sldId id="263" r:id="rId9"/>
+    <p:sldId id="264" r:id="rId10"/>
+    <p:sldId id="265" r:id="rId11"/>
+    <p:sldId id="266" r:id="rId12"/>
+    <p:sldId id="267" r:id="rId13"/>
+    <p:sldId id="268" r:id="rId14"/>
+    <p:sldId id="269" r:id="rId15"/>
+    <p:sldId id="270" r:id="rId16"/>
+    <p:sldId id="271" r:id="rId17"/>
+    <p:sldId id="272" r:id="rId18"/>
   </p:sldIdLst>
-  <p:sldSz cx="12191695" cy="6858000" type="screen4x3"/>
+  <p:sldSz cx="12192000" cy="6858000"/>
   <p:notesSz cx="6858000" cy="9144000"/>
   <p:defaultTextStyle>
     <a:defPPr>
@@ -120,6 +120,22 @@
       </a:defRPr>
     </a:lvl9pPr>
   </p:defaultTextStyle>
+  <p:extLst>
+    <p:ext uri="{EFAFB233-063F-42B5-8137-9DF3F51BA10A}">
+      <p15:sldGuideLst xmlns:p15="http://schemas.microsoft.com/office/powerpoint/2012/main">
+        <p15:guide id="1" orient="horz" pos="2160">
+          <p15:clr>
+            <a:srgbClr val="A4A3A4"/>
+          </p15:clr>
+        </p15:guide>
+        <p15:guide id="2" pos="2880">
+          <p15:clr>
+            <a:srgbClr val="A4A3A4"/>
+          </p15:clr>
+        </p15:guide>
+      </p15:sldGuideLst>
+    </p:ext>
+  </p:extLst>
 </p:presentation>
 </file>
 
@@ -304,7 +320,7 @@
           <a:p>
             <a:fld id="{5BCAD085-E8A6-8845-BD4E-CB4CCA059FC4}" type="datetimeFigureOut">
               <a:rPr lang="en-US" smtClean="0"/>
-              <a:t>1/27/13</a:t>
+              <a:t>8/27/2026</a:t>
             </a:fld>
             <a:endParaRPr lang="en-US"/>
           </a:p>
@@ -474,7 +490,7 @@
           <a:p>
             <a:fld id="{5BCAD085-E8A6-8845-BD4E-CB4CCA059FC4}" type="datetimeFigureOut">
               <a:rPr lang="en-US" smtClean="0"/>
-              <a:t>1/27/13</a:t>
+              <a:t>8/27/2026</a:t>
             </a:fld>
             <a:endParaRPr lang="en-US"/>
           </a:p>
@@ -654,7 +670,7 @@
           <a:p>
             <a:fld id="{5BCAD085-E8A6-8845-BD4E-CB4CCA059FC4}" type="datetimeFigureOut">
               <a:rPr lang="en-US" smtClean="0"/>
-              <a:t>1/27/13</a:t>
+              <a:t>8/27/2026</a:t>
             </a:fld>
             <a:endParaRPr lang="en-US"/>
           </a:p>
@@ -824,7 +840,7 @@
           <a:p>
             <a:fld id="{5BCAD085-E8A6-8845-BD4E-CB4CCA059FC4}" type="datetimeFigureOut">
               <a:rPr lang="en-US" smtClean="0"/>
-              <a:t>1/27/13</a:t>
+              <a:t>8/27/2026</a:t>
             </a:fld>
             <a:endParaRPr lang="en-US"/>
           </a:p>
@@ -1070,7 +1086,7 @@
           <a:p>
             <a:fld id="{5BCAD085-E8A6-8845-BD4E-CB4CCA059FC4}" type="datetimeFigureOut">
               <a:rPr lang="en-US" smtClean="0"/>
-              <a:t>1/27/13</a:t>
+              <a:t>8/27/2026</a:t>
             </a:fld>
             <a:endParaRPr lang="en-US"/>
           </a:p>
@@ -1358,7 +1374,7 @@
           <a:p>
             <a:fld id="{5BCAD085-E8A6-8845-BD4E-CB4CCA059FC4}" type="datetimeFigureOut">
               <a:rPr lang="en-US" smtClean="0"/>
-              <a:t>1/27/13</a:t>
+              <a:t>8/27/2026</a:t>
             </a:fld>
             <a:endParaRPr lang="en-US"/>
           </a:p>
@@ -1780,7 +1796,7 @@
           <a:p>
             <a:fld id="{5BCAD085-E8A6-8845-BD4E-CB4CCA059FC4}" type="datetimeFigureOut">
               <a:rPr lang="en-US" smtClean="0"/>
-              <a:t>1/27/13</a:t>
+              <a:t>8/27/2026</a:t>
             </a:fld>
             <a:endParaRPr lang="en-US"/>
           </a:p>
@@ -1898,7 +1914,7 @@
           <a:p>
             <a:fld id="{5BCAD085-E8A6-8845-BD4E-CB4CCA059FC4}" type="datetimeFigureOut">
               <a:rPr lang="en-US" smtClean="0"/>
-              <a:t>1/27/13</a:t>
+              <a:t>8/27/2026</a:t>
             </a:fld>
             <a:endParaRPr lang="en-US"/>
           </a:p>
@@ -1993,7 +2009,7 @@
           <a:p>
             <a:fld id="{5BCAD085-E8A6-8845-BD4E-CB4CCA059FC4}" type="datetimeFigureOut">
               <a:rPr lang="en-US" smtClean="0"/>
-              <a:t>1/27/13</a:t>
+              <a:t>8/27/2026</a:t>
             </a:fld>
             <a:endParaRPr lang="en-US"/>
           </a:p>
@@ -2270,7 +2286,7 @@
           <a:p>
             <a:fld id="{5BCAD085-E8A6-8845-BD4E-CB4CCA059FC4}" type="datetimeFigureOut">
               <a:rPr lang="en-US" smtClean="0"/>
-              <a:t>1/27/13</a:t>
+              <a:t>8/27/2026</a:t>
             </a:fld>
             <a:endParaRPr lang="en-US"/>
           </a:p>
@@ -2523,7 +2539,7 @@
           <a:p>
             <a:fld id="{5BCAD085-E8A6-8845-BD4E-CB4CCA059FC4}" type="datetimeFigureOut">
               <a:rPr lang="en-US" smtClean="0"/>
-              <a:t>1/27/13</a:t>
+              <a:t>8/27/2026</a:t>
             </a:fld>
             <a:endParaRPr lang="en-US"/>
           </a:p>
@@ -2736,7 +2752,7 @@
           <a:p>
             <a:fld id="{5BCAD085-E8A6-8845-BD4E-CB4CCA059FC4}" type="datetimeFigureOut">
               <a:rPr lang="en-US" smtClean="0"/>
-              <a:t>1/27/13</a:t>
+              <a:t>8/27/2026</a:t>
             </a:fld>
             <a:endParaRPr lang="en-US"/>
           </a:p>
@@ -3095,7 +3111,7 @@
 </file>
 
 <file path=ppt/slides/slide1.xml><?xml version="1.0" encoding="utf-8"?>
-<p:sld xmlns:a="http://schemas.openxmlformats.org/drawingml/2006/main" xmlns:p="http://schemas.openxmlformats.org/presentationml/2006/main" xmlns:r="http://schemas.openxmlformats.org/officeDocument/2006/relationships">
+<p:sld xmlns:a="http://schemas.openxmlformats.org/drawingml/2006/main" xmlns:r="http://schemas.openxmlformats.org/officeDocument/2006/relationships" xmlns:p="http://schemas.openxmlformats.org/presentationml/2006/main">
   <p:cSld>
     <p:spTree>
       <p:nvGrpSpPr>
@@ -3103,7 +3119,14 @@
         <p:cNvGrpSpPr/>
         <p:nvPr/>
       </p:nvGrpSpPr>
-      <p:grpSpPr/>
+      <p:grpSpPr>
+        <a:xfrm>
+          <a:off x="0" y="0"/>
+          <a:ext cx="0" cy="0"/>
+          <a:chOff x="0" y="0"/>
+          <a:chExt cx="0" cy="0"/>
+        </a:xfrm>
+      </p:grpSpPr>
       <p:sp>
         <p:nvSpPr>
           <p:cNvPr id="2" name="Rectangle 1"/>
@@ -3144,6 +3167,7 @@
           <a:lstStyle/>
           <a:p>
             <a:pPr algn="ctr"/>
+            <a:endParaRPr/>
           </a:p>
         </p:txBody>
       </p:sp>
@@ -3187,6 +3211,7 @@
           <a:lstStyle/>
           <a:p>
             <a:pPr algn="ctr"/>
+            <a:endParaRPr/>
           </a:p>
         </p:txBody>
       </p:sp>
@@ -3230,6 +3255,7 @@
           <a:lstStyle/>
           <a:p>
             <a:pPr algn="ctr"/>
+            <a:endParaRPr/>
           </a:p>
         </p:txBody>
       </p:sp>
@@ -3273,6 +3299,7 @@
           <a:lstStyle/>
           <a:p>
             <a:pPr algn="ctr"/>
+            <a:endParaRPr/>
           </a:p>
         </p:txBody>
       </p:sp>
@@ -3293,7 +3320,7 @@
           <a:noFill/>
         </p:spPr>
         <p:txBody>
-          <a:bodyPr wrap="square" lIns="127000" rIns="127000" tIns="101600" bIns="101600" anchor="t">
+          <a:bodyPr wrap="square" lIns="127000" tIns="101600" rIns="127000" bIns="101600" anchor="t">
             <a:noAutofit/>
           </a:bodyPr>
           <a:lstStyle/>
@@ -3335,7 +3362,7 @@
           <a:noFill/>
         </p:spPr>
         <p:txBody>
-          <a:bodyPr wrap="square" lIns="127000" rIns="127000" tIns="101600" bIns="101600" anchor="t">
+          <a:bodyPr wrap="square" lIns="127000" tIns="101600" rIns="127000" bIns="101600" anchor="t">
             <a:noAutofit/>
           </a:bodyPr>
           <a:lstStyle/>
@@ -3368,8 +3395,8 @@
         </p:nvSpPr>
         <p:spPr>
           <a:xfrm>
-            <a:off x="640080" y="1234440"/>
-            <a:ext cx="8200000" cy="320040"/>
+            <a:off x="164592" y="899160"/>
+            <a:ext cx="12027408" cy="320040"/>
           </a:xfrm>
           <a:prstGeom prst="roundRect">
             <a:avLst>
@@ -3398,7 +3425,7 @@
           </a:fontRef>
         </p:style>
         <p:txBody>
-          <a:bodyPr rtlCol="0" anchor="ctr" wrap="square" lIns="127000" rIns="127000" tIns="50800" bIns="50800">
+          <a:bodyPr wrap="square" lIns="127000" tIns="50800" rIns="127000" bIns="50800" rtlCol="0" anchor="ctr">
             <a:noAutofit/>
           </a:bodyPr>
           <a:lstStyle/>
@@ -3412,13 +3439,13 @@
               </a:spcAft>
             </a:pPr>
             <a:r>
-              <a:rPr sz="1200" b="1">
+              <a:rPr sz="1200" b="1" dirty="0">
                 <a:solidFill>
                   <a:srgbClr val="0B1F33"/>
                 </a:solidFill>
                 <a:latin typeface="Calibri"/>
               </a:rPr>
-              <a:t>ВНУТРЕННИЙ АУДИТ  ·  БАНК РБ  ·  ОН-ПРЕМ  ·  v0.0.1</a:t>
+              <a:t>ВНУТРЕННИЙ АУДИТ  ·  БАНК РБ  ·  ОН-ПРЕМ  </a:t>
             </a:r>
           </a:p>
         </p:txBody>
@@ -3440,7 +3467,7 @@
           <a:noFill/>
         </p:spPr>
         <p:txBody>
-          <a:bodyPr wrap="square" lIns="127000" rIns="127000" tIns="101600" bIns="101600" anchor="t">
+          <a:bodyPr wrap="square" lIns="127000" tIns="101600" rIns="127000" bIns="101600" anchor="t">
             <a:noAutofit/>
           </a:bodyPr>
           <a:lstStyle/>
@@ -3482,7 +3509,7 @@
           <a:noFill/>
         </p:spPr>
         <p:txBody>
-          <a:bodyPr wrap="square" lIns="127000" rIns="127000" tIns="101600" bIns="101600" anchor="t">
+          <a:bodyPr wrap="square" lIns="127000" tIns="101600" rIns="127000" bIns="101600" anchor="t">
             <a:noAutofit/>
           </a:bodyPr>
           <a:lstStyle/>
@@ -3496,13 +3523,94 @@
               </a:spcAft>
             </a:pPr>
             <a:r>
-              <a:rPr sz="2000" b="0">
+              <a:rPr sz="2000" b="0" dirty="0" err="1">
                 <a:solidFill>
                   <a:srgbClr val="D5E0EA"/>
                 </a:solidFill>
                 <a:latin typeface="Calibri"/>
               </a:rPr>
-              <a:t>Коробочный ИИ-агент внутренней аудиторской проверки.</a:t>
+              <a:t>Коробочный</a:t>
+            </a:r>
+            <a:r>
+              <a:rPr sz="2000" b="0" dirty="0">
+                <a:solidFill>
+                  <a:srgbClr val="D5E0EA"/>
+                </a:solidFill>
+                <a:latin typeface="Calibri"/>
+              </a:rPr>
+              <a:t> ИИ-</a:t>
+            </a:r>
+            <a:r>
+              <a:rPr sz="2000" b="0" dirty="0" err="1">
+                <a:solidFill>
+                  <a:srgbClr val="D5E0EA"/>
+                </a:solidFill>
+                <a:latin typeface="Calibri"/>
+              </a:rPr>
+              <a:t>агент</a:t>
+            </a:r>
+            <a:r>
+              <a:rPr sz="2000" b="0" dirty="0">
+                <a:solidFill>
+                  <a:srgbClr val="D5E0EA"/>
+                </a:solidFill>
+                <a:latin typeface="Calibri"/>
+              </a:rPr>
+              <a:t> </a:t>
+            </a:r>
+            <a:r>
+              <a:rPr sz="2000" b="0" dirty="0" err="1">
+                <a:solidFill>
+                  <a:srgbClr val="D5E0EA"/>
+                </a:solidFill>
+                <a:latin typeface="Calibri"/>
+              </a:rPr>
+              <a:t>внутренней</a:t>
+            </a:r>
+            <a:r>
+              <a:rPr sz="2000" b="0" dirty="0">
+                <a:solidFill>
+                  <a:srgbClr val="D5E0EA"/>
+                </a:solidFill>
+                <a:latin typeface="Calibri"/>
+              </a:rPr>
+              <a:t> </a:t>
+            </a:r>
+            <a:r>
+              <a:rPr sz="2000" b="0" dirty="0" err="1">
+                <a:solidFill>
+                  <a:srgbClr val="D5E0EA"/>
+                </a:solidFill>
+                <a:latin typeface="Calibri"/>
+              </a:rPr>
+              <a:t>аудиторской</a:t>
+            </a:r>
+            <a:r>
+              <a:rPr sz="2000" b="0" dirty="0">
+                <a:solidFill>
+                  <a:srgbClr val="D5E0EA"/>
+                </a:solidFill>
+                <a:latin typeface="Calibri"/>
+              </a:rPr>
+              <a:t> </a:t>
+            </a:r>
+            <a:r>
+              <a:rPr sz="2000" b="0" dirty="0" err="1">
+                <a:solidFill>
+                  <a:srgbClr val="D5E0EA"/>
+                </a:solidFill>
+                <a:latin typeface="Calibri"/>
+              </a:rPr>
+              <a:t>проверки</a:t>
+            </a:r>
+            <a:r>
+              <a:rPr sz="2000" b="0" dirty="0">
+                <a:solidFill>
+                  <a:srgbClr val="D5E0EA"/>
+                </a:solidFill>
+                <a:latin typeface="Calibri"/>
+              </a:rPr>
+              <a:t>.</a:t>
             </a:r>
           </a:p>
           <a:p>
@@ -3515,13 +3623,148 @@
               </a:spcAft>
             </a:pPr>
             <a:r>
-              <a:rPr sz="1800" b="0">
+              <a:rPr sz="1800" b="0" dirty="0" err="1">
                 <a:solidFill>
                   <a:srgbClr val="D5E0EA"/>
                 </a:solidFill>
                 <a:latin typeface="Calibri"/>
               </a:rPr>
-              <a:t>Минимум своего кода. Максимум качества из готового стека.</a:t>
+              <a:t>Минимум</a:t>
+            </a:r>
+            <a:r>
+              <a:rPr sz="1800" b="0" dirty="0">
+                <a:solidFill>
+                  <a:srgbClr val="D5E0EA"/>
+                </a:solidFill>
+                <a:latin typeface="Calibri"/>
+              </a:rPr>
+              <a:t> </a:t>
+            </a:r>
+            <a:r>
+              <a:rPr sz="1800" b="0" dirty="0" err="1">
+                <a:solidFill>
+                  <a:srgbClr val="D5E0EA"/>
+                </a:solidFill>
+                <a:latin typeface="Calibri"/>
+              </a:rPr>
+              <a:t>своего</a:t>
+            </a:r>
+            <a:r>
+              <a:rPr sz="1800" b="0" dirty="0">
+                <a:solidFill>
+                  <a:srgbClr val="D5E0EA"/>
+                </a:solidFill>
+                <a:latin typeface="Calibri"/>
+              </a:rPr>
+              <a:t> </a:t>
+            </a:r>
+            <a:r>
+              <a:rPr sz="1800" b="0" dirty="0" err="1">
+                <a:solidFill>
+                  <a:srgbClr val="D5E0EA"/>
+                </a:solidFill>
+                <a:latin typeface="Calibri"/>
+              </a:rPr>
+              <a:t>кода</a:t>
+            </a:r>
+            <a:r>
+              <a:rPr sz="1800" b="0" dirty="0">
+                <a:solidFill>
+                  <a:srgbClr val="D5E0EA"/>
+                </a:solidFill>
+                <a:latin typeface="Calibri"/>
+              </a:rPr>
+              <a:t>. </a:t>
+            </a:r>
+            <a:r>
+              <a:rPr sz="1800" b="0" dirty="0" err="1">
+                <a:solidFill>
+                  <a:srgbClr val="D5E0EA"/>
+                </a:solidFill>
+                <a:latin typeface="Calibri"/>
+              </a:rPr>
+              <a:t>Максимум</a:t>
+            </a:r>
+            <a:r>
+              <a:rPr sz="1800" b="0" dirty="0">
+                <a:solidFill>
+                  <a:srgbClr val="D5E0EA"/>
+                </a:solidFill>
+                <a:latin typeface="Calibri"/>
+              </a:rPr>
+              <a:t> </a:t>
+            </a:r>
+            <a:r>
+              <a:rPr sz="1800" b="0" dirty="0" err="1">
+                <a:solidFill>
+                  <a:srgbClr val="D5E0EA"/>
+                </a:solidFill>
+                <a:latin typeface="Calibri"/>
+              </a:rPr>
+              <a:t>качества</a:t>
+            </a:r>
+            <a:r>
+              <a:rPr sz="1800" b="0" dirty="0">
+                <a:solidFill>
+                  <a:srgbClr val="D5E0EA"/>
+                </a:solidFill>
+                <a:latin typeface="Calibri"/>
+              </a:rPr>
+              <a:t> </a:t>
+            </a:r>
+            <a:r>
+              <a:rPr sz="1800" b="0" dirty="0" err="1">
+                <a:solidFill>
+                  <a:srgbClr val="D5E0EA"/>
+                </a:solidFill>
+                <a:latin typeface="Calibri"/>
+              </a:rPr>
+              <a:t>из</a:t>
+            </a:r>
+            <a:r>
+              <a:rPr sz="1800" b="0" dirty="0">
+                <a:solidFill>
+                  <a:srgbClr val="D5E0EA"/>
+                </a:solidFill>
+                <a:latin typeface="Calibri"/>
+              </a:rPr>
+              <a:t> </a:t>
+            </a:r>
+            <a:r>
+              <a:rPr sz="1800" b="0" dirty="0" err="1">
+                <a:solidFill>
+                  <a:srgbClr val="D5E0EA"/>
+                </a:solidFill>
+                <a:latin typeface="Calibri"/>
+              </a:rPr>
+              <a:t>готового</a:t>
+            </a:r>
+            <a:r>
+              <a:rPr sz="1800" b="0" dirty="0">
+                <a:solidFill>
+                  <a:srgbClr val="D5E0EA"/>
+                </a:solidFill>
+                <a:latin typeface="Calibri"/>
+              </a:rPr>
+              <a:t> </a:t>
+            </a:r>
+            <a:r>
+              <a:rPr sz="1800" b="0" dirty="0" err="1">
+                <a:solidFill>
+                  <a:srgbClr val="D5E0EA"/>
+                </a:solidFill>
+                <a:latin typeface="Calibri"/>
+              </a:rPr>
+              <a:t>стека</a:t>
+            </a:r>
+            <a:r>
+              <a:rPr sz="1800" b="0" dirty="0">
+                <a:solidFill>
+                  <a:srgbClr val="D5E0EA"/>
+                </a:solidFill>
+                <a:latin typeface="Calibri"/>
+              </a:rPr>
+              <a:t>.</a:t>
             </a:r>
           </a:p>
         </p:txBody>
@@ -3564,7 +3807,7 @@
           </a:fontRef>
         </p:style>
         <p:txBody>
-          <a:bodyPr rtlCol="0" anchor="ctr" wrap="square" lIns="203200" rIns="152400" tIns="101600" bIns="101600">
+          <a:bodyPr wrap="square" lIns="203200" tIns="101600" rIns="152400" bIns="101600" rtlCol="0" anchor="ctr">
             <a:noAutofit/>
           </a:bodyPr>
           <a:lstStyle/>
@@ -3646,7 +3889,7 @@
           </a:fontRef>
         </p:style>
         <p:txBody>
-          <a:bodyPr rtlCol="0" anchor="ctr" wrap="square" lIns="203200" rIns="152400" tIns="101600" bIns="101600">
+          <a:bodyPr wrap="square" lIns="203200" tIns="101600" rIns="152400" bIns="101600" rtlCol="0" anchor="ctr">
             <a:noAutofit/>
           </a:bodyPr>
           <a:lstStyle/>
@@ -3728,7 +3971,7 @@
           </a:fontRef>
         </p:style>
         <p:txBody>
-          <a:bodyPr rtlCol="0" anchor="ctr" wrap="square" lIns="203200" rIns="152400" tIns="101600" bIns="101600">
+          <a:bodyPr wrap="square" lIns="203200" tIns="101600" rIns="152400" bIns="101600" rtlCol="0" anchor="ctr">
             <a:noAutofit/>
           </a:bodyPr>
           <a:lstStyle/>
@@ -3810,7 +4053,7 @@
           </a:fontRef>
         </p:style>
         <p:txBody>
-          <a:bodyPr rtlCol="0" anchor="ctr" wrap="square" lIns="203200" rIns="152400" tIns="101600" bIns="101600">
+          <a:bodyPr wrap="square" lIns="203200" tIns="101600" rIns="152400" bIns="101600" rtlCol="0" anchor="ctr">
             <a:noAutofit/>
           </a:bodyPr>
           <a:lstStyle/>
@@ -3863,7 +4106,7 @@
 </file>
 
 <file path=ppt/slides/slide10.xml><?xml version="1.0" encoding="utf-8"?>
-<p:sld xmlns:a="http://schemas.openxmlformats.org/drawingml/2006/main" xmlns:p="http://schemas.openxmlformats.org/presentationml/2006/main" xmlns:r="http://schemas.openxmlformats.org/officeDocument/2006/relationships">
+<p:sld xmlns:a="http://schemas.openxmlformats.org/drawingml/2006/main" xmlns:r="http://schemas.openxmlformats.org/officeDocument/2006/relationships" xmlns:p="http://schemas.openxmlformats.org/presentationml/2006/main">
   <p:cSld>
     <p:spTree>
       <p:nvGrpSpPr>
@@ -3871,7 +4114,14 @@
         <p:cNvGrpSpPr/>
         <p:nvPr/>
       </p:nvGrpSpPr>
-      <p:grpSpPr/>
+      <p:grpSpPr>
+        <a:xfrm>
+          <a:off x="0" y="0"/>
+          <a:ext cx="0" cy="0"/>
+          <a:chOff x="0" y="0"/>
+          <a:chExt cx="0" cy="0"/>
+        </a:xfrm>
+      </p:grpSpPr>
       <p:sp>
         <p:nvSpPr>
           <p:cNvPr id="2" name="Rectangle 1"/>
@@ -3912,6 +4162,7 @@
           <a:lstStyle/>
           <a:p>
             <a:pPr algn="ctr"/>
+            <a:endParaRPr/>
           </a:p>
         </p:txBody>
       </p:sp>
@@ -3955,6 +4206,7 @@
           <a:lstStyle/>
           <a:p>
             <a:pPr algn="ctr"/>
+            <a:endParaRPr/>
           </a:p>
         </p:txBody>
       </p:sp>
@@ -3998,6 +4250,7 @@
           <a:lstStyle/>
           <a:p>
             <a:pPr algn="ctr"/>
+            <a:endParaRPr/>
           </a:p>
         </p:txBody>
       </p:sp>
@@ -4041,6 +4294,7 @@
           <a:lstStyle/>
           <a:p>
             <a:pPr algn="ctr"/>
+            <a:endParaRPr/>
           </a:p>
         </p:txBody>
       </p:sp>
@@ -4084,6 +4338,7 @@
           <a:lstStyle/>
           <a:p>
             <a:pPr algn="ctr"/>
+            <a:endParaRPr/>
           </a:p>
         </p:txBody>
       </p:sp>
@@ -4104,7 +4359,7 @@
           <a:noFill/>
         </p:spPr>
         <p:txBody>
-          <a:bodyPr wrap="square" lIns="127000" rIns="127000" tIns="101600" bIns="101600" anchor="t">
+          <a:bodyPr wrap="square" lIns="127000" tIns="101600" rIns="127000" bIns="101600" anchor="t">
             <a:noAutofit/>
           </a:bodyPr>
           <a:lstStyle/>
@@ -4146,7 +4401,7 @@
           <a:noFill/>
         </p:spPr>
         <p:txBody>
-          <a:bodyPr wrap="square" lIns="127000" rIns="127000" tIns="101600" bIns="101600" anchor="t">
+          <a:bodyPr wrap="square" lIns="127000" tIns="101600" rIns="127000" bIns="101600" anchor="t">
             <a:noAutofit/>
           </a:bodyPr>
           <a:lstStyle/>
@@ -4188,7 +4443,7 @@
           <a:noFill/>
         </p:spPr>
         <p:txBody>
-          <a:bodyPr wrap="square" lIns="127000" rIns="127000" tIns="101600" bIns="101600" anchor="t">
+          <a:bodyPr wrap="square" lIns="127000" tIns="101600" rIns="127000" bIns="101600" anchor="t">
             <a:noAutofit/>
           </a:bodyPr>
           <a:lstStyle/>
@@ -4230,7 +4485,7 @@
           <a:noFill/>
         </p:spPr>
         <p:txBody>
-          <a:bodyPr wrap="square" lIns="127000" rIns="127000" tIns="101600" bIns="101600" anchor="t">
+          <a:bodyPr wrap="square" lIns="127000" tIns="101600" rIns="127000" bIns="101600" anchor="t">
             <a:noAutofit/>
           </a:bodyPr>
           <a:lstStyle/>
@@ -4293,7 +4548,7 @@
           </a:fontRef>
         </p:style>
         <p:txBody>
-          <a:bodyPr rtlCol="0" anchor="ctr" wrap="square" lIns="304800" rIns="127000" tIns="101600" bIns="101600">
+          <a:bodyPr wrap="square" lIns="304800" tIns="101600" rIns="127000" bIns="101600" rtlCol="0" anchor="ctr">
             <a:noAutofit/>
           </a:bodyPr>
           <a:lstStyle/>
@@ -4375,7 +4630,7 @@
           </a:fontRef>
         </p:style>
         <p:txBody>
-          <a:bodyPr rtlCol="0" anchor="ctr" wrap="square" lIns="304800" rIns="127000" tIns="101600" bIns="101600">
+          <a:bodyPr wrap="square" lIns="304800" tIns="101600" rIns="127000" bIns="101600" rtlCol="0" anchor="ctr">
             <a:noAutofit/>
           </a:bodyPr>
           <a:lstStyle/>
@@ -4457,7 +4712,7 @@
           </a:fontRef>
         </p:style>
         <p:txBody>
-          <a:bodyPr rtlCol="0" anchor="ctr" wrap="square" lIns="304800" rIns="127000" tIns="101600" bIns="101600">
+          <a:bodyPr wrap="square" lIns="304800" tIns="101600" rIns="127000" bIns="101600" rtlCol="0" anchor="ctr">
             <a:noAutofit/>
           </a:bodyPr>
           <a:lstStyle/>
@@ -4539,7 +4794,7 @@
           </a:fontRef>
         </p:style>
         <p:txBody>
-          <a:bodyPr rtlCol="0" anchor="ctr" wrap="square" lIns="304800" rIns="127000" tIns="101600" bIns="101600">
+          <a:bodyPr wrap="square" lIns="304800" tIns="101600" rIns="127000" bIns="101600" rtlCol="0" anchor="ctr">
             <a:noAutofit/>
           </a:bodyPr>
           <a:lstStyle/>
@@ -4592,7 +4847,7 @@
 </file>
 
 <file path=ppt/slides/slide11.xml><?xml version="1.0" encoding="utf-8"?>
-<p:sld xmlns:a="http://schemas.openxmlformats.org/drawingml/2006/main" xmlns:p="http://schemas.openxmlformats.org/presentationml/2006/main" xmlns:r="http://schemas.openxmlformats.org/officeDocument/2006/relationships">
+<p:sld xmlns:a="http://schemas.openxmlformats.org/drawingml/2006/main" xmlns:r="http://schemas.openxmlformats.org/officeDocument/2006/relationships" xmlns:p="http://schemas.openxmlformats.org/presentationml/2006/main">
   <p:cSld>
     <p:spTree>
       <p:nvGrpSpPr>
@@ -4600,7 +4855,14 @@
         <p:cNvGrpSpPr/>
         <p:nvPr/>
       </p:nvGrpSpPr>
-      <p:grpSpPr/>
+      <p:grpSpPr>
+        <a:xfrm>
+          <a:off x="0" y="0"/>
+          <a:ext cx="0" cy="0"/>
+          <a:chOff x="0" y="0"/>
+          <a:chExt cx="0" cy="0"/>
+        </a:xfrm>
+      </p:grpSpPr>
       <p:sp>
         <p:nvSpPr>
           <p:cNvPr id="2" name="Rectangle 1"/>
@@ -4641,6 +4903,7 @@
           <a:lstStyle/>
           <a:p>
             <a:pPr algn="ctr"/>
+            <a:endParaRPr/>
           </a:p>
         </p:txBody>
       </p:sp>
@@ -4684,6 +4947,7 @@
           <a:lstStyle/>
           <a:p>
             <a:pPr algn="ctr"/>
+            <a:endParaRPr/>
           </a:p>
         </p:txBody>
       </p:sp>
@@ -4727,6 +4991,7 @@
           <a:lstStyle/>
           <a:p>
             <a:pPr algn="ctr"/>
+            <a:endParaRPr/>
           </a:p>
         </p:txBody>
       </p:sp>
@@ -4770,6 +5035,7 @@
           <a:lstStyle/>
           <a:p>
             <a:pPr algn="ctr"/>
+            <a:endParaRPr/>
           </a:p>
         </p:txBody>
       </p:sp>
@@ -4813,6 +5079,7 @@
           <a:lstStyle/>
           <a:p>
             <a:pPr algn="ctr"/>
+            <a:endParaRPr/>
           </a:p>
         </p:txBody>
       </p:sp>
@@ -4833,7 +5100,7 @@
           <a:noFill/>
         </p:spPr>
         <p:txBody>
-          <a:bodyPr wrap="square" lIns="127000" rIns="127000" tIns="101600" bIns="101600" anchor="t">
+          <a:bodyPr wrap="square" lIns="127000" tIns="101600" rIns="127000" bIns="101600" anchor="t">
             <a:noAutofit/>
           </a:bodyPr>
           <a:lstStyle/>
@@ -4875,7 +5142,7 @@
           <a:noFill/>
         </p:spPr>
         <p:txBody>
-          <a:bodyPr wrap="square" lIns="127000" rIns="127000" tIns="101600" bIns="101600" anchor="t">
+          <a:bodyPr wrap="square" lIns="127000" tIns="101600" rIns="127000" bIns="101600" anchor="t">
             <a:noAutofit/>
           </a:bodyPr>
           <a:lstStyle/>
@@ -4917,7 +5184,7 @@
           <a:noFill/>
         </p:spPr>
         <p:txBody>
-          <a:bodyPr wrap="square" lIns="127000" rIns="127000" tIns="101600" bIns="101600" anchor="t">
+          <a:bodyPr wrap="square" lIns="127000" tIns="101600" rIns="127000" bIns="101600" anchor="t">
             <a:noAutofit/>
           </a:bodyPr>
           <a:lstStyle/>
@@ -4959,7 +5226,7 @@
           <a:noFill/>
         </p:spPr>
         <p:txBody>
-          <a:bodyPr wrap="square" lIns="127000" rIns="127000" tIns="101600" bIns="101600" anchor="t">
+          <a:bodyPr wrap="square" lIns="127000" tIns="101600" rIns="127000" bIns="101600" anchor="t">
             <a:noAutofit/>
           </a:bodyPr>
           <a:lstStyle/>
@@ -5001,7 +5268,7 @@
           <a:noFill/>
         </p:spPr>
         <p:txBody>
-          <a:bodyPr wrap="square" lIns="127000" rIns="127000" tIns="101600" bIns="101600" anchor="t">
+          <a:bodyPr wrap="square" lIns="127000" tIns="101600" rIns="127000" bIns="101600" anchor="t">
             <a:noAutofit/>
           </a:bodyPr>
           <a:lstStyle/>
@@ -5064,7 +5331,7 @@
           </a:fontRef>
         </p:style>
         <p:txBody>
-          <a:bodyPr rtlCol="0" anchor="t" wrap="square" lIns="228600" rIns="177800" tIns="228600" bIns="101600">
+          <a:bodyPr wrap="square" lIns="228600" tIns="228600" rIns="177800" bIns="101600" rtlCol="0" anchor="t">
             <a:noAutofit/>
           </a:bodyPr>
           <a:lstStyle/>
@@ -5222,7 +5489,7 @@
           </a:fontRef>
         </p:style>
         <p:txBody>
-          <a:bodyPr rtlCol="0" anchor="t" wrap="square" lIns="228600" rIns="177800" tIns="228600" bIns="101600">
+          <a:bodyPr wrap="square" lIns="228600" tIns="228600" rIns="177800" bIns="101600" rtlCol="0" anchor="t">
             <a:noAutofit/>
           </a:bodyPr>
           <a:lstStyle/>
@@ -5380,7 +5647,7 @@
           </a:fontRef>
         </p:style>
         <p:txBody>
-          <a:bodyPr rtlCol="0" anchor="t" wrap="square" lIns="228600" rIns="177800" tIns="228600" bIns="101600">
+          <a:bodyPr wrap="square" lIns="228600" tIns="228600" rIns="177800" bIns="101600" rtlCol="0" anchor="t">
             <a:noAutofit/>
           </a:bodyPr>
           <a:lstStyle/>
@@ -5394,7 +5661,7 @@
               </a:spcAft>
             </a:pPr>
             <a:r>
-              <a:rPr sz="1200" b="1">
+              <a:rPr sz="1200" b="1" dirty="0">
                 <a:solidFill>
                   <a:srgbClr val="C4962C"/>
                 </a:solidFill>
@@ -5413,14 +5680,38 @@
               </a:spcAft>
             </a:pPr>
             <a:r>
-              <a:rPr sz="1800" b="1">
+              <a:rPr sz="1800" b="1" dirty="0" smtClean="0">
                 <a:solidFill>
                   <a:srgbClr val="142233"/>
                 </a:solidFill>
                 <a:latin typeface="Calibri"/>
               </a:rPr>
-              <a:t>Qwen3-Reranker-0.6B</a:t>
-            </a:r>
+              <a:t>Qwen3-Reranker-</a:t>
+            </a:r>
+            <a:r>
+              <a:rPr lang="en-US" sz="1800" b="1" dirty="0" smtClean="0">
+                <a:solidFill>
+                  <a:srgbClr val="142233"/>
+                </a:solidFill>
+                <a:latin typeface="Calibri"/>
+              </a:rPr>
+              <a:t>4</a:t>
+            </a:r>
+            <a:r>
+              <a:rPr sz="1800" b="1" dirty="0" smtClean="0">
+                <a:solidFill>
+                  <a:srgbClr val="142233"/>
+                </a:solidFill>
+                <a:latin typeface="Calibri"/>
+              </a:rPr>
+              <a:t>B</a:t>
+            </a:r>
+            <a:endParaRPr sz="1800" b="1" dirty="0">
+              <a:solidFill>
+                <a:srgbClr val="142233"/>
+              </a:solidFill>
+              <a:latin typeface="Calibri"/>
+            </a:endParaRPr>
           </a:p>
           <a:p>
             <a:pPr algn="l">
@@ -5432,13 +5723,103 @@
               </a:spcAft>
             </a:pPr>
             <a:r>
-              <a:rPr sz="1300" b="0">
+              <a:rPr sz="1300" b="0" dirty="0">
                 <a:solidFill>
                   <a:srgbClr val="3D4F61"/>
                 </a:solidFill>
                 <a:latin typeface="Calibri"/>
               </a:rPr>
-              <a:t>·  После hybrid пересортирует пары (вопрос, чанк).</a:t>
+              <a:t>·  </a:t>
+            </a:r>
+            <a:r>
+              <a:rPr sz="1300" b="0" dirty="0" err="1">
+                <a:solidFill>
+                  <a:srgbClr val="3D4F61"/>
+                </a:solidFill>
+                <a:latin typeface="Calibri"/>
+              </a:rPr>
+              <a:t>После</a:t>
+            </a:r>
+            <a:r>
+              <a:rPr sz="1300" b="0" dirty="0">
+                <a:solidFill>
+                  <a:srgbClr val="3D4F61"/>
+                </a:solidFill>
+                <a:latin typeface="Calibri"/>
+              </a:rPr>
+              <a:t> hybrid </a:t>
+            </a:r>
+            <a:r>
+              <a:rPr sz="1300" b="0" dirty="0" err="1">
+                <a:solidFill>
+                  <a:srgbClr val="3D4F61"/>
+                </a:solidFill>
+                <a:latin typeface="Calibri"/>
+              </a:rPr>
+              <a:t>пересортирует</a:t>
+            </a:r>
+            <a:r>
+              <a:rPr sz="1300" b="0" dirty="0">
+                <a:solidFill>
+                  <a:srgbClr val="3D4F61"/>
+                </a:solidFill>
+                <a:latin typeface="Calibri"/>
+              </a:rPr>
+              <a:t> </a:t>
+            </a:r>
+            <a:r>
+              <a:rPr sz="1300" b="0" dirty="0" err="1">
+                <a:solidFill>
+                  <a:srgbClr val="3D4F61"/>
+                </a:solidFill>
+                <a:latin typeface="Calibri"/>
+              </a:rPr>
+              <a:t>пары</a:t>
+            </a:r>
+            <a:r>
+              <a:rPr sz="1300" b="0" dirty="0">
+                <a:solidFill>
+                  <a:srgbClr val="3D4F61"/>
+                </a:solidFill>
+                <a:latin typeface="Calibri"/>
+              </a:rPr>
+              <a:t> (</a:t>
+            </a:r>
+            <a:r>
+              <a:rPr sz="1300" b="0" dirty="0" err="1">
+                <a:solidFill>
+                  <a:srgbClr val="3D4F61"/>
+                </a:solidFill>
+                <a:latin typeface="Calibri"/>
+              </a:rPr>
+              <a:t>вопрос</a:t>
+            </a:r>
+            <a:r>
+              <a:rPr sz="1300" b="0" dirty="0">
+                <a:solidFill>
+                  <a:srgbClr val="3D4F61"/>
+                </a:solidFill>
+                <a:latin typeface="Calibri"/>
+              </a:rPr>
+              <a:t>, </a:t>
+            </a:r>
+            <a:r>
+              <a:rPr sz="1300" b="0" dirty="0" err="1">
+                <a:solidFill>
+                  <a:srgbClr val="3D4F61"/>
+                </a:solidFill>
+                <a:latin typeface="Calibri"/>
+              </a:rPr>
+              <a:t>чанк</a:t>
+            </a:r>
+            <a:r>
+              <a:rPr sz="1300" b="0" dirty="0">
+                <a:solidFill>
+                  <a:srgbClr val="3D4F61"/>
+                </a:solidFill>
+                <a:latin typeface="Calibri"/>
+              </a:rPr>
+              <a:t>).</a:t>
             </a:r>
           </a:p>
           <a:p>
@@ -5451,13 +5832,94 @@
               </a:spcAft>
             </a:pPr>
             <a:r>
-              <a:rPr sz="1300" b="0">
+              <a:rPr sz="1300" b="0" dirty="0">
                 <a:solidFill>
                   <a:srgbClr val="3D4F61"/>
                 </a:solidFill>
                 <a:latin typeface="Calibri"/>
               </a:rPr>
-              <a:t>·  Локальный стенд-ин: dengcao/Qwen3-Reranker-0.6B:Q8_0.</a:t>
+              <a:t>·  </a:t>
+            </a:r>
+            <a:r>
+              <a:rPr sz="1300" b="0" dirty="0" err="1">
+                <a:solidFill>
+                  <a:srgbClr val="3D4F61"/>
+                </a:solidFill>
+                <a:latin typeface="Calibri"/>
+              </a:rPr>
+              <a:t>Локальный</a:t>
+            </a:r>
+            <a:r>
+              <a:rPr sz="1300" b="0" dirty="0">
+                <a:solidFill>
+                  <a:srgbClr val="3D4F61"/>
+                </a:solidFill>
+                <a:latin typeface="Calibri"/>
+              </a:rPr>
+              <a:t> </a:t>
+            </a:r>
+            <a:r>
+              <a:rPr sz="1300" b="0" dirty="0" err="1">
+                <a:solidFill>
+                  <a:srgbClr val="3D4F61"/>
+                </a:solidFill>
+                <a:latin typeface="Calibri"/>
+              </a:rPr>
+              <a:t>стенд-ин</a:t>
+            </a:r>
+            <a:r>
+              <a:rPr sz="1300" b="0" dirty="0">
+                <a:solidFill>
+                  <a:srgbClr val="3D4F61"/>
+                </a:solidFill>
+                <a:latin typeface="Calibri"/>
+              </a:rPr>
+              <a:t>: </a:t>
+            </a:r>
+            <a:r>
+              <a:rPr sz="1300" b="0" dirty="0" err="1" smtClean="0">
+                <a:solidFill>
+                  <a:srgbClr val="3D4F61"/>
+                </a:solidFill>
+                <a:latin typeface="Calibri"/>
+              </a:rPr>
+              <a:t>dengcao</a:t>
+            </a:r>
+            <a:r>
+              <a:rPr sz="1300" b="0" dirty="0" smtClean="0">
+                <a:solidFill>
+                  <a:srgbClr val="3D4F61"/>
+                </a:solidFill>
+                <a:latin typeface="Calibri"/>
+              </a:rPr>
+              <a:t>/Qwen3-Reranker-</a:t>
+            </a:r>
+            <a:r>
+              <a:rPr lang="en-US" sz="1300" b="0" dirty="0" smtClean="0">
+                <a:solidFill>
+                  <a:srgbClr val="3D4F61"/>
+                </a:solidFill>
+                <a:latin typeface="Calibri"/>
+              </a:rPr>
+              <a:t>4</a:t>
+            </a:r>
+            <a:r>
+              <a:rPr sz="1300" b="0" dirty="0" smtClean="0">
+                <a:solidFill>
+                  <a:srgbClr val="3D4F61"/>
+                </a:solidFill>
+                <a:latin typeface="Calibri"/>
+              </a:rPr>
+              <a:t>B:Q8_0</a:t>
+            </a:r>
+            <a:r>
+              <a:rPr sz="1300" b="0" dirty="0">
+                <a:solidFill>
+                  <a:srgbClr val="3D4F61"/>
+                </a:solidFill>
+                <a:latin typeface="Calibri"/>
+              </a:rPr>
+              <a:t>.</a:t>
             </a:r>
           </a:p>
           <a:p>
@@ -5470,13 +5932,103 @@
               </a:spcAft>
             </a:pPr>
             <a:r>
-              <a:rPr sz="1300" b="0">
+              <a:rPr sz="1300" b="0" dirty="0">
                 <a:solidFill>
                   <a:srgbClr val="3D4F61"/>
                 </a:solidFill>
                 <a:latin typeface="Calibri"/>
               </a:rPr>
-              <a:t>·  Пул кандидатов до реранка — 24, в LLM уходит top-k 16.</a:t>
+              <a:t>·  </a:t>
+            </a:r>
+            <a:r>
+              <a:rPr sz="1300" b="0" dirty="0" err="1">
+                <a:solidFill>
+                  <a:srgbClr val="3D4F61"/>
+                </a:solidFill>
+                <a:latin typeface="Calibri"/>
+              </a:rPr>
+              <a:t>Пул</a:t>
+            </a:r>
+            <a:r>
+              <a:rPr sz="1300" b="0" dirty="0">
+                <a:solidFill>
+                  <a:srgbClr val="3D4F61"/>
+                </a:solidFill>
+                <a:latin typeface="Calibri"/>
+              </a:rPr>
+              <a:t> </a:t>
+            </a:r>
+            <a:r>
+              <a:rPr sz="1300" b="0" dirty="0" err="1">
+                <a:solidFill>
+                  <a:srgbClr val="3D4F61"/>
+                </a:solidFill>
+                <a:latin typeface="Calibri"/>
+              </a:rPr>
+              <a:t>кандидатов</a:t>
+            </a:r>
+            <a:r>
+              <a:rPr sz="1300" b="0" dirty="0">
+                <a:solidFill>
+                  <a:srgbClr val="3D4F61"/>
+                </a:solidFill>
+                <a:latin typeface="Calibri"/>
+              </a:rPr>
+              <a:t> </a:t>
+            </a:r>
+            <a:r>
+              <a:rPr sz="1300" b="0" dirty="0" err="1">
+                <a:solidFill>
+                  <a:srgbClr val="3D4F61"/>
+                </a:solidFill>
+                <a:latin typeface="Calibri"/>
+              </a:rPr>
+              <a:t>до</a:t>
+            </a:r>
+            <a:r>
+              <a:rPr sz="1300" b="0" dirty="0">
+                <a:solidFill>
+                  <a:srgbClr val="3D4F61"/>
+                </a:solidFill>
+                <a:latin typeface="Calibri"/>
+              </a:rPr>
+              <a:t> </a:t>
+            </a:r>
+            <a:r>
+              <a:rPr sz="1300" b="0" dirty="0" err="1">
+                <a:solidFill>
+                  <a:srgbClr val="3D4F61"/>
+                </a:solidFill>
+                <a:latin typeface="Calibri"/>
+              </a:rPr>
+              <a:t>реранка</a:t>
+            </a:r>
+            <a:r>
+              <a:rPr sz="1300" b="0" dirty="0">
+                <a:solidFill>
+                  <a:srgbClr val="3D4F61"/>
+                </a:solidFill>
+                <a:latin typeface="Calibri"/>
+              </a:rPr>
+              <a:t> — 24, в LLM </a:t>
+            </a:r>
+            <a:r>
+              <a:rPr sz="1300" b="0" dirty="0" err="1">
+                <a:solidFill>
+                  <a:srgbClr val="3D4F61"/>
+                </a:solidFill>
+                <a:latin typeface="Calibri"/>
+              </a:rPr>
+              <a:t>уходит</a:t>
+            </a:r>
+            <a:r>
+              <a:rPr sz="1300" b="0" dirty="0">
+                <a:solidFill>
+                  <a:srgbClr val="3D4F61"/>
+                </a:solidFill>
+                <a:latin typeface="Calibri"/>
+              </a:rPr>
+              <a:t> top-k 16.</a:t>
             </a:r>
           </a:p>
           <a:p>
@@ -5489,13 +6041,157 @@
               </a:spcAft>
             </a:pPr>
             <a:r>
-              <a:rPr sz="1300" b="0">
+              <a:rPr sz="1300" b="0" dirty="0">
                 <a:solidFill>
                   <a:srgbClr val="3D4F61"/>
                 </a:solidFill>
                 <a:latin typeface="Calibri"/>
               </a:rPr>
-              <a:t>·  Пустая настройка = skip; качество тогда хуже на близких статьях.</a:t>
+              <a:t>·  </a:t>
+            </a:r>
+            <a:r>
+              <a:rPr sz="1300" b="0" dirty="0" err="1">
+                <a:solidFill>
+                  <a:srgbClr val="3D4F61"/>
+                </a:solidFill>
+                <a:latin typeface="Calibri"/>
+              </a:rPr>
+              <a:t>Пустая</a:t>
+            </a:r>
+            <a:r>
+              <a:rPr sz="1300" b="0" dirty="0">
+                <a:solidFill>
+                  <a:srgbClr val="3D4F61"/>
+                </a:solidFill>
+                <a:latin typeface="Calibri"/>
+              </a:rPr>
+              <a:t> </a:t>
+            </a:r>
+            <a:r>
+              <a:rPr sz="1300" b="0" dirty="0" err="1">
+                <a:solidFill>
+                  <a:srgbClr val="3D4F61"/>
+                </a:solidFill>
+                <a:latin typeface="Calibri"/>
+              </a:rPr>
+              <a:t>настройка</a:t>
+            </a:r>
+            <a:r>
+              <a:rPr sz="1300" b="0" dirty="0">
+                <a:solidFill>
+                  <a:srgbClr val="3D4F61"/>
+                </a:solidFill>
+                <a:latin typeface="Calibri"/>
+              </a:rPr>
+              <a:t> = skip; </a:t>
+            </a:r>
+            <a:r>
+              <a:rPr sz="1300" b="0" dirty="0" err="1">
+                <a:solidFill>
+                  <a:srgbClr val="3D4F61"/>
+                </a:solidFill>
+                <a:latin typeface="Calibri"/>
+              </a:rPr>
+              <a:t>качество</a:t>
+            </a:r>
+            <a:r>
+              <a:rPr sz="1300" b="0" dirty="0">
+                <a:solidFill>
+                  <a:srgbClr val="3D4F61"/>
+                </a:solidFill>
+                <a:latin typeface="Calibri"/>
+              </a:rPr>
+              <a:t> </a:t>
+            </a:r>
+            <a:r>
+              <a:rPr sz="1300" b="0" dirty="0" err="1">
+                <a:solidFill>
+                  <a:srgbClr val="3D4F61"/>
+                </a:solidFill>
+                <a:latin typeface="Calibri"/>
+              </a:rPr>
+              <a:t>тогда</a:t>
+            </a:r>
+            <a:r>
+              <a:rPr sz="1300" b="0" dirty="0">
+                <a:solidFill>
+                  <a:srgbClr val="3D4F61"/>
+                </a:solidFill>
+                <a:latin typeface="Calibri"/>
+              </a:rPr>
+              <a:t> </a:t>
+            </a:r>
+            <a:r>
+              <a:rPr sz="1300" b="0" dirty="0" err="1">
+                <a:solidFill>
+                  <a:srgbClr val="3D4F61"/>
+                </a:solidFill>
+                <a:latin typeface="Calibri"/>
+              </a:rPr>
+              <a:t>хуже</a:t>
+            </a:r>
+            <a:r>
+              <a:rPr sz="1300" b="0" dirty="0">
+                <a:solidFill>
+                  <a:srgbClr val="3D4F61"/>
+                </a:solidFill>
+                <a:latin typeface="Calibri"/>
+              </a:rPr>
+              <a:t> </a:t>
+            </a:r>
+            <a:r>
+              <a:rPr sz="1300" b="0" dirty="0" err="1">
+                <a:solidFill>
+                  <a:srgbClr val="3D4F61"/>
+                </a:solidFill>
+                <a:latin typeface="Calibri"/>
+              </a:rPr>
+              <a:t>на</a:t>
+            </a:r>
+            <a:r>
+              <a:rPr sz="1300" b="0" dirty="0">
+                <a:solidFill>
+                  <a:srgbClr val="3D4F61"/>
+                </a:solidFill>
+                <a:latin typeface="Calibri"/>
+              </a:rPr>
+              <a:t> </a:t>
+            </a:r>
+            <a:r>
+              <a:rPr sz="1300" b="0" dirty="0" err="1">
+                <a:solidFill>
+                  <a:srgbClr val="3D4F61"/>
+                </a:solidFill>
+                <a:latin typeface="Calibri"/>
+              </a:rPr>
+              <a:t>близких</a:t>
+            </a:r>
+            <a:r>
+              <a:rPr sz="1300" b="0" dirty="0">
+                <a:solidFill>
+                  <a:srgbClr val="3D4F61"/>
+                </a:solidFill>
+                <a:latin typeface="Calibri"/>
+              </a:rPr>
+              <a:t> </a:t>
+            </a:r>
+            <a:r>
+              <a:rPr sz="1300" b="0" dirty="0" err="1">
+                <a:solidFill>
+                  <a:srgbClr val="3D4F61"/>
+                </a:solidFill>
+                <a:latin typeface="Calibri"/>
+              </a:rPr>
+              <a:t>статьях</a:t>
+            </a:r>
+            <a:r>
+              <a:rPr sz="1300" b="0" dirty="0">
+                <a:solidFill>
+                  <a:srgbClr val="3D4F61"/>
+                </a:solidFill>
+                <a:latin typeface="Calibri"/>
+              </a:rPr>
+              <a:t>.</a:t>
             </a:r>
           </a:p>
         </p:txBody>
@@ -5509,7 +6205,7 @@
 </file>
 
 <file path=ppt/slides/slide12.xml><?xml version="1.0" encoding="utf-8"?>
-<p:sld xmlns:a="http://schemas.openxmlformats.org/drawingml/2006/main" xmlns:p="http://schemas.openxmlformats.org/presentationml/2006/main" xmlns:r="http://schemas.openxmlformats.org/officeDocument/2006/relationships">
+<p:sld xmlns:a="http://schemas.openxmlformats.org/drawingml/2006/main" xmlns:r="http://schemas.openxmlformats.org/officeDocument/2006/relationships" xmlns:p="http://schemas.openxmlformats.org/presentationml/2006/main">
   <p:cSld>
     <p:spTree>
       <p:nvGrpSpPr>
@@ -5517,7 +6213,14 @@
         <p:cNvGrpSpPr/>
         <p:nvPr/>
       </p:nvGrpSpPr>
-      <p:grpSpPr/>
+      <p:grpSpPr>
+        <a:xfrm>
+          <a:off x="0" y="0"/>
+          <a:ext cx="0" cy="0"/>
+          <a:chOff x="0" y="0"/>
+          <a:chExt cx="0" cy="0"/>
+        </a:xfrm>
+      </p:grpSpPr>
       <p:sp>
         <p:nvSpPr>
           <p:cNvPr id="2" name="Rectangle 1"/>
@@ -5558,6 +6261,7 @@
           <a:lstStyle/>
           <a:p>
             <a:pPr algn="ctr"/>
+            <a:endParaRPr/>
           </a:p>
         </p:txBody>
       </p:sp>
@@ -5601,6 +6305,7 @@
           <a:lstStyle/>
           <a:p>
             <a:pPr algn="ctr"/>
+            <a:endParaRPr/>
           </a:p>
         </p:txBody>
       </p:sp>
@@ -5644,6 +6349,7 @@
           <a:lstStyle/>
           <a:p>
             <a:pPr algn="ctr"/>
+            <a:endParaRPr/>
           </a:p>
         </p:txBody>
       </p:sp>
@@ -5687,6 +6393,7 @@
           <a:lstStyle/>
           <a:p>
             <a:pPr algn="ctr"/>
+            <a:endParaRPr/>
           </a:p>
         </p:txBody>
       </p:sp>
@@ -5730,6 +6437,7 @@
           <a:lstStyle/>
           <a:p>
             <a:pPr algn="ctr"/>
+            <a:endParaRPr/>
           </a:p>
         </p:txBody>
       </p:sp>
@@ -5750,7 +6458,7 @@
           <a:noFill/>
         </p:spPr>
         <p:txBody>
-          <a:bodyPr wrap="square" lIns="127000" rIns="127000" tIns="101600" bIns="101600" anchor="t">
+          <a:bodyPr wrap="square" lIns="127000" tIns="101600" rIns="127000" bIns="101600" anchor="t">
             <a:noAutofit/>
           </a:bodyPr>
           <a:lstStyle/>
@@ -5792,7 +6500,7 @@
           <a:noFill/>
         </p:spPr>
         <p:txBody>
-          <a:bodyPr wrap="square" lIns="127000" rIns="127000" tIns="101600" bIns="101600" anchor="t">
+          <a:bodyPr wrap="square" lIns="127000" tIns="101600" rIns="127000" bIns="101600" anchor="t">
             <a:noAutofit/>
           </a:bodyPr>
           <a:lstStyle/>
@@ -5834,7 +6542,7 @@
           <a:noFill/>
         </p:spPr>
         <p:txBody>
-          <a:bodyPr wrap="square" lIns="127000" rIns="127000" tIns="101600" bIns="101600" anchor="t">
+          <a:bodyPr wrap="square" lIns="127000" tIns="101600" rIns="127000" bIns="101600" anchor="t">
             <a:noAutofit/>
           </a:bodyPr>
           <a:lstStyle/>
@@ -5876,7 +6584,7 @@
           <a:noFill/>
         </p:spPr>
         <p:txBody>
-          <a:bodyPr wrap="square" lIns="127000" rIns="127000" tIns="101600" bIns="101600" anchor="t">
+          <a:bodyPr wrap="square" lIns="127000" tIns="101600" rIns="127000" bIns="101600" anchor="t">
             <a:noAutofit/>
           </a:bodyPr>
           <a:lstStyle/>
@@ -5918,7 +6626,7 @@
           <a:noFill/>
         </p:spPr>
         <p:txBody>
-          <a:bodyPr wrap="square" lIns="127000" rIns="127000" tIns="101600" bIns="101600" anchor="t">
+          <a:bodyPr wrap="square" lIns="127000" tIns="101600" rIns="127000" bIns="101600" anchor="t">
             <a:noAutofit/>
           </a:bodyPr>
           <a:lstStyle/>
@@ -5981,7 +6689,7 @@
           </a:fontRef>
         </p:style>
         <p:txBody>
-          <a:bodyPr rtlCol="0" anchor="t" wrap="square" lIns="228600" rIns="127000" tIns="203200" bIns="101600">
+          <a:bodyPr wrap="square" lIns="228600" tIns="203200" rIns="127000" bIns="101600" rtlCol="0" anchor="t">
             <a:noAutofit/>
           </a:bodyPr>
           <a:lstStyle/>
@@ -6177,7 +6885,7 @@
           </a:fontRef>
         </p:style>
         <p:txBody>
-          <a:bodyPr rtlCol="0" anchor="t" wrap="square" lIns="228600" rIns="127000" tIns="203200" bIns="101600">
+          <a:bodyPr wrap="square" lIns="228600" tIns="203200" rIns="127000" bIns="101600" rtlCol="0" anchor="t">
             <a:noAutofit/>
           </a:bodyPr>
           <a:lstStyle/>
@@ -6278,7 +6986,7 @@
           </a:fontRef>
         </p:style>
         <p:txBody>
-          <a:bodyPr rtlCol="0" anchor="t" wrap="square" lIns="228600" rIns="127000" tIns="203200" bIns="101600">
+          <a:bodyPr wrap="square" lIns="228600" tIns="203200" rIns="127000" bIns="101600" rtlCol="0" anchor="t">
             <a:noAutofit/>
           </a:bodyPr>
           <a:lstStyle/>
@@ -6369,7 +7077,7 @@
 </file>
 
 <file path=ppt/slides/slide13.xml><?xml version="1.0" encoding="utf-8"?>
-<p:sld xmlns:a="http://schemas.openxmlformats.org/drawingml/2006/main" xmlns:p="http://schemas.openxmlformats.org/presentationml/2006/main" xmlns:r="http://schemas.openxmlformats.org/officeDocument/2006/relationships">
+<p:sld xmlns:a="http://schemas.openxmlformats.org/drawingml/2006/main" xmlns:r="http://schemas.openxmlformats.org/officeDocument/2006/relationships" xmlns:p="http://schemas.openxmlformats.org/presentationml/2006/main">
   <p:cSld>
     <p:spTree>
       <p:nvGrpSpPr>
@@ -6377,7 +7085,14 @@
         <p:cNvGrpSpPr/>
         <p:nvPr/>
       </p:nvGrpSpPr>
-      <p:grpSpPr/>
+      <p:grpSpPr>
+        <a:xfrm>
+          <a:off x="0" y="0"/>
+          <a:ext cx="0" cy="0"/>
+          <a:chOff x="0" y="0"/>
+          <a:chExt cx="0" cy="0"/>
+        </a:xfrm>
+      </p:grpSpPr>
       <p:sp>
         <p:nvSpPr>
           <p:cNvPr id="2" name="Rectangle 1"/>
@@ -6418,6 +7133,7 @@
           <a:lstStyle/>
           <a:p>
             <a:pPr algn="ctr"/>
+            <a:endParaRPr/>
           </a:p>
         </p:txBody>
       </p:sp>
@@ -6461,6 +7177,7 @@
           <a:lstStyle/>
           <a:p>
             <a:pPr algn="ctr"/>
+            <a:endParaRPr/>
           </a:p>
         </p:txBody>
       </p:sp>
@@ -6504,6 +7221,7 @@
           <a:lstStyle/>
           <a:p>
             <a:pPr algn="ctr"/>
+            <a:endParaRPr/>
           </a:p>
         </p:txBody>
       </p:sp>
@@ -6547,6 +7265,7 @@
           <a:lstStyle/>
           <a:p>
             <a:pPr algn="ctr"/>
+            <a:endParaRPr/>
           </a:p>
         </p:txBody>
       </p:sp>
@@ -6590,6 +7309,7 @@
           <a:lstStyle/>
           <a:p>
             <a:pPr algn="ctr"/>
+            <a:endParaRPr/>
           </a:p>
         </p:txBody>
       </p:sp>
@@ -6610,7 +7330,7 @@
           <a:noFill/>
         </p:spPr>
         <p:txBody>
-          <a:bodyPr wrap="square" lIns="127000" rIns="127000" tIns="101600" bIns="101600" anchor="t">
+          <a:bodyPr wrap="square" lIns="127000" tIns="101600" rIns="127000" bIns="101600" anchor="t">
             <a:noAutofit/>
           </a:bodyPr>
           <a:lstStyle/>
@@ -6652,7 +7372,7 @@
           <a:noFill/>
         </p:spPr>
         <p:txBody>
-          <a:bodyPr wrap="square" lIns="127000" rIns="127000" tIns="101600" bIns="101600" anchor="t">
+          <a:bodyPr wrap="square" lIns="127000" tIns="101600" rIns="127000" bIns="101600" anchor="t">
             <a:noAutofit/>
           </a:bodyPr>
           <a:lstStyle/>
@@ -6694,7 +7414,7 @@
           <a:noFill/>
         </p:spPr>
         <p:txBody>
-          <a:bodyPr wrap="square" lIns="127000" rIns="127000" tIns="101600" bIns="101600" anchor="t">
+          <a:bodyPr wrap="square" lIns="127000" tIns="101600" rIns="127000" bIns="101600" anchor="t">
             <a:noAutofit/>
           </a:bodyPr>
           <a:lstStyle/>
@@ -6736,7 +7456,7 @@
           <a:noFill/>
         </p:spPr>
         <p:txBody>
-          <a:bodyPr wrap="square" lIns="127000" rIns="127000" tIns="101600" bIns="101600" anchor="t">
+          <a:bodyPr wrap="square" lIns="127000" tIns="101600" rIns="127000" bIns="101600" anchor="t">
             <a:noAutofit/>
           </a:bodyPr>
           <a:lstStyle/>
@@ -6778,7 +7498,7 @@
           <a:noFill/>
         </p:spPr>
         <p:txBody>
-          <a:bodyPr wrap="square" lIns="127000" rIns="127000" tIns="101600" bIns="101600" anchor="t">
+          <a:bodyPr wrap="square" lIns="127000" tIns="101600" rIns="127000" bIns="101600" anchor="t">
             <a:noAutofit/>
           </a:bodyPr>
           <a:lstStyle/>
@@ -6841,7 +7561,7 @@
           </a:fontRef>
         </p:style>
         <p:txBody>
-          <a:bodyPr rtlCol="0" anchor="t" wrap="square" lIns="254000" rIns="127000" tIns="228600" bIns="101600">
+          <a:bodyPr wrap="square" lIns="254000" tIns="228600" rIns="127000" bIns="101600" rtlCol="0" anchor="t">
             <a:noAutofit/>
           </a:bodyPr>
           <a:lstStyle/>
@@ -6980,7 +7700,7 @@
           </a:fontRef>
         </p:style>
         <p:txBody>
-          <a:bodyPr rtlCol="0" anchor="ctr" wrap="square" lIns="203200" rIns="127000" tIns="101600" bIns="101600">
+          <a:bodyPr wrap="square" lIns="203200" tIns="101600" rIns="127000" bIns="101600" rtlCol="0" anchor="ctr">
             <a:noAutofit/>
           </a:bodyPr>
           <a:lstStyle/>
@@ -7043,7 +7763,7 @@
           </a:fontRef>
         </p:style>
         <p:txBody>
-          <a:bodyPr rtlCol="0" anchor="ctr" wrap="square" lIns="203200" rIns="127000" tIns="101600" bIns="101600">
+          <a:bodyPr wrap="square" lIns="203200" tIns="101600" rIns="127000" bIns="101600" rtlCol="0" anchor="ctr">
             <a:noAutofit/>
           </a:bodyPr>
           <a:lstStyle/>
@@ -7106,7 +7826,7 @@
           </a:fontRef>
         </p:style>
         <p:txBody>
-          <a:bodyPr rtlCol="0" anchor="ctr" wrap="square" lIns="203200" rIns="127000" tIns="101600" bIns="101600">
+          <a:bodyPr wrap="square" lIns="203200" tIns="101600" rIns="127000" bIns="101600" rtlCol="0" anchor="ctr">
             <a:noAutofit/>
           </a:bodyPr>
           <a:lstStyle/>
@@ -7169,7 +7889,7 @@
           </a:fontRef>
         </p:style>
         <p:txBody>
-          <a:bodyPr rtlCol="0" anchor="ctr" wrap="square" lIns="203200" rIns="127000" tIns="101600" bIns="101600">
+          <a:bodyPr wrap="square" lIns="203200" tIns="101600" rIns="127000" bIns="101600" rtlCol="0" anchor="ctr">
             <a:noAutofit/>
           </a:bodyPr>
           <a:lstStyle/>
@@ -7232,7 +7952,7 @@
           </a:fontRef>
         </p:style>
         <p:txBody>
-          <a:bodyPr rtlCol="0" anchor="ctr" wrap="square" lIns="203200" rIns="127000" tIns="101600" bIns="101600">
+          <a:bodyPr wrap="square" lIns="203200" tIns="101600" rIns="127000" bIns="101600" rtlCol="0" anchor="ctr">
             <a:noAutofit/>
           </a:bodyPr>
           <a:lstStyle/>
@@ -7295,7 +8015,7 @@
           </a:fontRef>
         </p:style>
         <p:txBody>
-          <a:bodyPr rtlCol="0" anchor="ctr" wrap="square" lIns="203200" rIns="127000" tIns="101600" bIns="101600">
+          <a:bodyPr wrap="square" lIns="203200" tIns="101600" rIns="127000" bIns="101600" rtlCol="0" anchor="ctr">
             <a:noAutofit/>
           </a:bodyPr>
           <a:lstStyle/>
@@ -7329,7 +8049,7 @@
 </file>
 
 <file path=ppt/slides/slide14.xml><?xml version="1.0" encoding="utf-8"?>
-<p:sld xmlns:a="http://schemas.openxmlformats.org/drawingml/2006/main" xmlns:p="http://schemas.openxmlformats.org/presentationml/2006/main" xmlns:r="http://schemas.openxmlformats.org/officeDocument/2006/relationships">
+<p:sld xmlns:a="http://schemas.openxmlformats.org/drawingml/2006/main" xmlns:r="http://schemas.openxmlformats.org/officeDocument/2006/relationships" xmlns:p="http://schemas.openxmlformats.org/presentationml/2006/main">
   <p:cSld>
     <p:spTree>
       <p:nvGrpSpPr>
@@ -7337,7 +8057,14 @@
         <p:cNvGrpSpPr/>
         <p:nvPr/>
       </p:nvGrpSpPr>
-      <p:grpSpPr/>
+      <p:grpSpPr>
+        <a:xfrm>
+          <a:off x="0" y="0"/>
+          <a:ext cx="0" cy="0"/>
+          <a:chOff x="0" y="0"/>
+          <a:chExt cx="0" cy="0"/>
+        </a:xfrm>
+      </p:grpSpPr>
       <p:sp>
         <p:nvSpPr>
           <p:cNvPr id="2" name="Rectangle 1"/>
@@ -7378,6 +8105,7 @@
           <a:lstStyle/>
           <a:p>
             <a:pPr algn="ctr"/>
+            <a:endParaRPr/>
           </a:p>
         </p:txBody>
       </p:sp>
@@ -7421,6 +8149,7 @@
           <a:lstStyle/>
           <a:p>
             <a:pPr algn="ctr"/>
+            <a:endParaRPr/>
           </a:p>
         </p:txBody>
       </p:sp>
@@ -7464,6 +8193,7 @@
           <a:lstStyle/>
           <a:p>
             <a:pPr algn="ctr"/>
+            <a:endParaRPr/>
           </a:p>
         </p:txBody>
       </p:sp>
@@ -7507,6 +8237,7 @@
           <a:lstStyle/>
           <a:p>
             <a:pPr algn="ctr"/>
+            <a:endParaRPr/>
           </a:p>
         </p:txBody>
       </p:sp>
@@ -7550,6 +8281,7 @@
           <a:lstStyle/>
           <a:p>
             <a:pPr algn="ctr"/>
+            <a:endParaRPr/>
           </a:p>
         </p:txBody>
       </p:sp>
@@ -7570,7 +8302,7 @@
           <a:noFill/>
         </p:spPr>
         <p:txBody>
-          <a:bodyPr wrap="square" lIns="127000" rIns="127000" tIns="101600" bIns="101600" anchor="t">
+          <a:bodyPr wrap="square" lIns="127000" tIns="101600" rIns="127000" bIns="101600" anchor="t">
             <a:noAutofit/>
           </a:bodyPr>
           <a:lstStyle/>
@@ -7612,7 +8344,7 @@
           <a:noFill/>
         </p:spPr>
         <p:txBody>
-          <a:bodyPr wrap="square" lIns="127000" rIns="127000" tIns="101600" bIns="101600" anchor="t">
+          <a:bodyPr wrap="square" lIns="127000" tIns="101600" rIns="127000" bIns="101600" anchor="t">
             <a:noAutofit/>
           </a:bodyPr>
           <a:lstStyle/>
@@ -7654,7 +8386,7 @@
           <a:noFill/>
         </p:spPr>
         <p:txBody>
-          <a:bodyPr wrap="square" lIns="127000" rIns="127000" tIns="101600" bIns="101600" anchor="t">
+          <a:bodyPr wrap="square" lIns="127000" tIns="101600" rIns="127000" bIns="101600" anchor="t">
             <a:noAutofit/>
           </a:bodyPr>
           <a:lstStyle/>
@@ -7696,7 +8428,7 @@
           <a:noFill/>
         </p:spPr>
         <p:txBody>
-          <a:bodyPr wrap="square" lIns="127000" rIns="127000" tIns="101600" bIns="101600" anchor="t">
+          <a:bodyPr wrap="square" lIns="127000" tIns="101600" rIns="127000" bIns="101600" anchor="t">
             <a:noAutofit/>
           </a:bodyPr>
           <a:lstStyle/>
@@ -7759,7 +8491,7 @@
           </a:fontRef>
         </p:style>
         <p:txBody>
-          <a:bodyPr rtlCol="0" anchor="ctr" wrap="square" lIns="127000" rIns="127000" tIns="101600" bIns="101600">
+          <a:bodyPr wrap="square" lIns="127000" tIns="101600" rIns="127000" bIns="101600" rtlCol="0" anchor="ctr">
             <a:noAutofit/>
           </a:bodyPr>
           <a:lstStyle/>
@@ -7842,7 +8574,7 @@
           </a:fontRef>
         </p:style>
         <p:txBody>
-          <a:bodyPr rtlCol="0" anchor="ctr" wrap="square" lIns="127000" rIns="127000" tIns="101600" bIns="101600">
+          <a:bodyPr wrap="square" lIns="127000" tIns="101600" rIns="127000" bIns="101600" rtlCol="0" anchor="ctr">
             <a:noAutofit/>
           </a:bodyPr>
           <a:lstStyle/>
@@ -7925,7 +8657,7 @@
           </a:fontRef>
         </p:style>
         <p:txBody>
-          <a:bodyPr rtlCol="0" anchor="ctr" wrap="square" lIns="127000" rIns="127000" tIns="101600" bIns="101600">
+          <a:bodyPr wrap="square" lIns="127000" tIns="101600" rIns="127000" bIns="101600" rtlCol="0" anchor="ctr">
             <a:noAutofit/>
           </a:bodyPr>
           <a:lstStyle/>
@@ -8008,7 +8740,7 @@
           </a:fontRef>
         </p:style>
         <p:txBody>
-          <a:bodyPr rtlCol="0" anchor="ctr" wrap="square" lIns="127000" rIns="127000" tIns="101600" bIns="101600">
+          <a:bodyPr wrap="square" lIns="127000" tIns="101600" rIns="127000" bIns="101600" rtlCol="0" anchor="ctr">
             <a:noAutofit/>
           </a:bodyPr>
           <a:lstStyle/>
@@ -8091,7 +8823,7 @@
           </a:fontRef>
         </p:style>
         <p:txBody>
-          <a:bodyPr rtlCol="0" anchor="ctr" wrap="square" lIns="127000" rIns="127000" tIns="101600" bIns="101600">
+          <a:bodyPr wrap="square" lIns="127000" tIns="101600" rIns="127000" bIns="101600" rtlCol="0" anchor="ctr">
             <a:noAutofit/>
           </a:bodyPr>
           <a:lstStyle/>
@@ -8174,7 +8906,7 @@
           </a:fontRef>
         </p:style>
         <p:txBody>
-          <a:bodyPr rtlCol="0" anchor="t" wrap="square" lIns="203200" rIns="127000" tIns="203200" bIns="101600">
+          <a:bodyPr wrap="square" lIns="203200" tIns="203200" rIns="127000" bIns="101600" rtlCol="0" anchor="t">
             <a:noAutofit/>
           </a:bodyPr>
           <a:lstStyle/>
@@ -8256,7 +8988,7 @@
           </a:fontRef>
         </p:style>
         <p:txBody>
-          <a:bodyPr rtlCol="0" anchor="t" wrap="square" lIns="203200" rIns="127000" tIns="203200" bIns="101600">
+          <a:bodyPr wrap="square" lIns="203200" tIns="203200" rIns="127000" bIns="101600" rtlCol="0" anchor="t">
             <a:noAutofit/>
           </a:bodyPr>
           <a:lstStyle/>
@@ -8338,7 +9070,7 @@
           </a:fontRef>
         </p:style>
         <p:txBody>
-          <a:bodyPr rtlCol="0" anchor="t" wrap="square" lIns="203200" rIns="127000" tIns="203200" bIns="101600">
+          <a:bodyPr wrap="square" lIns="203200" tIns="203200" rIns="127000" bIns="101600" rtlCol="0" anchor="t">
             <a:noAutofit/>
           </a:bodyPr>
           <a:lstStyle/>
@@ -8391,7 +9123,7 @@
 </file>
 
 <file path=ppt/slides/slide15.xml><?xml version="1.0" encoding="utf-8"?>
-<p:sld xmlns:a="http://schemas.openxmlformats.org/drawingml/2006/main" xmlns:p="http://schemas.openxmlformats.org/presentationml/2006/main" xmlns:r="http://schemas.openxmlformats.org/officeDocument/2006/relationships">
+<p:sld xmlns:a="http://schemas.openxmlformats.org/drawingml/2006/main" xmlns:r="http://schemas.openxmlformats.org/officeDocument/2006/relationships" xmlns:p="http://schemas.openxmlformats.org/presentationml/2006/main">
   <p:cSld>
     <p:spTree>
       <p:nvGrpSpPr>
@@ -8399,7 +9131,14 @@
         <p:cNvGrpSpPr/>
         <p:nvPr/>
       </p:nvGrpSpPr>
-      <p:grpSpPr/>
+      <p:grpSpPr>
+        <a:xfrm>
+          <a:off x="0" y="0"/>
+          <a:ext cx="0" cy="0"/>
+          <a:chOff x="0" y="0"/>
+          <a:chExt cx="0" cy="0"/>
+        </a:xfrm>
+      </p:grpSpPr>
       <p:sp>
         <p:nvSpPr>
           <p:cNvPr id="2" name="Rectangle 1"/>
@@ -8440,6 +9179,7 @@
           <a:lstStyle/>
           <a:p>
             <a:pPr algn="ctr"/>
+            <a:endParaRPr/>
           </a:p>
         </p:txBody>
       </p:sp>
@@ -8483,6 +9223,7 @@
           <a:lstStyle/>
           <a:p>
             <a:pPr algn="ctr"/>
+            <a:endParaRPr/>
           </a:p>
         </p:txBody>
       </p:sp>
@@ -8526,6 +9267,7 @@
           <a:lstStyle/>
           <a:p>
             <a:pPr algn="ctr"/>
+            <a:endParaRPr/>
           </a:p>
         </p:txBody>
       </p:sp>
@@ -8569,6 +9311,7 @@
           <a:lstStyle/>
           <a:p>
             <a:pPr algn="ctr"/>
+            <a:endParaRPr/>
           </a:p>
         </p:txBody>
       </p:sp>
@@ -8612,6 +9355,7 @@
           <a:lstStyle/>
           <a:p>
             <a:pPr algn="ctr"/>
+            <a:endParaRPr/>
           </a:p>
         </p:txBody>
       </p:sp>
@@ -8632,7 +9376,7 @@
           <a:noFill/>
         </p:spPr>
         <p:txBody>
-          <a:bodyPr wrap="square" lIns="127000" rIns="127000" tIns="101600" bIns="101600" anchor="t">
+          <a:bodyPr wrap="square" lIns="127000" tIns="101600" rIns="127000" bIns="101600" anchor="t">
             <a:noAutofit/>
           </a:bodyPr>
           <a:lstStyle/>
@@ -8674,7 +9418,7 @@
           <a:noFill/>
         </p:spPr>
         <p:txBody>
-          <a:bodyPr wrap="square" lIns="127000" rIns="127000" tIns="101600" bIns="101600" anchor="t">
+          <a:bodyPr wrap="square" lIns="127000" tIns="101600" rIns="127000" bIns="101600" anchor="t">
             <a:noAutofit/>
           </a:bodyPr>
           <a:lstStyle/>
@@ -8716,7 +9460,7 @@
           <a:noFill/>
         </p:spPr>
         <p:txBody>
-          <a:bodyPr wrap="square" lIns="127000" rIns="127000" tIns="101600" bIns="101600" anchor="t">
+          <a:bodyPr wrap="square" lIns="127000" tIns="101600" rIns="127000" bIns="101600" anchor="t">
             <a:noAutofit/>
           </a:bodyPr>
           <a:lstStyle/>
@@ -8758,7 +9502,7 @@
           <a:noFill/>
         </p:spPr>
         <p:txBody>
-          <a:bodyPr wrap="square" lIns="127000" rIns="127000" tIns="101600" bIns="101600" anchor="t">
+          <a:bodyPr wrap="square" lIns="127000" tIns="101600" rIns="127000" bIns="101600" anchor="t">
             <a:noAutofit/>
           </a:bodyPr>
           <a:lstStyle/>
@@ -8821,7 +9565,7 @@
           </a:fontRef>
         </p:style>
         <p:txBody>
-          <a:bodyPr rtlCol="0" anchor="t" wrap="square" lIns="228600" rIns="127000" tIns="203200" bIns="101600">
+          <a:bodyPr wrap="square" lIns="228600" tIns="203200" rIns="127000" bIns="101600" rtlCol="0" anchor="t">
             <a:noAutofit/>
           </a:bodyPr>
           <a:lstStyle/>
@@ -8903,7 +9647,7 @@
           </a:fontRef>
         </p:style>
         <p:txBody>
-          <a:bodyPr rtlCol="0" anchor="t" wrap="square" lIns="228600" rIns="127000" tIns="203200" bIns="101600">
+          <a:bodyPr wrap="square" lIns="228600" tIns="203200" rIns="127000" bIns="101600" rtlCol="0" anchor="t">
             <a:noAutofit/>
           </a:bodyPr>
           <a:lstStyle/>
@@ -8985,7 +9729,7 @@
           </a:fontRef>
         </p:style>
         <p:txBody>
-          <a:bodyPr rtlCol="0" anchor="t" wrap="square" lIns="228600" rIns="127000" tIns="203200" bIns="101600">
+          <a:bodyPr wrap="square" lIns="228600" tIns="203200" rIns="127000" bIns="101600" rtlCol="0" anchor="t">
             <a:noAutofit/>
           </a:bodyPr>
           <a:lstStyle/>
@@ -9067,7 +9811,7 @@
           </a:fontRef>
         </p:style>
         <p:txBody>
-          <a:bodyPr rtlCol="0" anchor="t" wrap="square" lIns="228600" rIns="127000" tIns="203200" bIns="101600">
+          <a:bodyPr wrap="square" lIns="228600" tIns="203200" rIns="127000" bIns="101600" rtlCol="0" anchor="t">
             <a:noAutofit/>
           </a:bodyPr>
           <a:lstStyle/>
@@ -9149,7 +9893,7 @@
           </a:fontRef>
         </p:style>
         <p:txBody>
-          <a:bodyPr rtlCol="0" anchor="t" wrap="square" lIns="228600" rIns="127000" tIns="203200" bIns="101600">
+          <a:bodyPr wrap="square" lIns="228600" tIns="203200" rIns="127000" bIns="101600" rtlCol="0" anchor="t">
             <a:noAutofit/>
           </a:bodyPr>
           <a:lstStyle/>
@@ -9231,7 +9975,7 @@
           </a:fontRef>
         </p:style>
         <p:txBody>
-          <a:bodyPr rtlCol="0" anchor="t" wrap="square" lIns="228600" rIns="127000" tIns="203200" bIns="101600">
+          <a:bodyPr wrap="square" lIns="228600" tIns="203200" rIns="127000" bIns="101600" rtlCol="0" anchor="t">
             <a:noAutofit/>
           </a:bodyPr>
           <a:lstStyle/>
@@ -9284,7 +10028,7 @@
 </file>
 
 <file path=ppt/slides/slide16.xml><?xml version="1.0" encoding="utf-8"?>
-<p:sld xmlns:a="http://schemas.openxmlformats.org/drawingml/2006/main" xmlns:p="http://schemas.openxmlformats.org/presentationml/2006/main" xmlns:r="http://schemas.openxmlformats.org/officeDocument/2006/relationships">
+<p:sld xmlns:a="http://schemas.openxmlformats.org/drawingml/2006/main" xmlns:r="http://schemas.openxmlformats.org/officeDocument/2006/relationships" xmlns:p="http://schemas.openxmlformats.org/presentationml/2006/main">
   <p:cSld>
     <p:spTree>
       <p:nvGrpSpPr>
@@ -9292,7 +10036,14 @@
         <p:cNvGrpSpPr/>
         <p:nvPr/>
       </p:nvGrpSpPr>
-      <p:grpSpPr/>
+      <p:grpSpPr>
+        <a:xfrm>
+          <a:off x="0" y="0"/>
+          <a:ext cx="0" cy="0"/>
+          <a:chOff x="0" y="0"/>
+          <a:chExt cx="0" cy="0"/>
+        </a:xfrm>
+      </p:grpSpPr>
       <p:sp>
         <p:nvSpPr>
           <p:cNvPr id="2" name="Rectangle 1"/>
@@ -9333,6 +10084,7 @@
           <a:lstStyle/>
           <a:p>
             <a:pPr algn="ctr"/>
+            <a:endParaRPr/>
           </a:p>
         </p:txBody>
       </p:sp>
@@ -9376,6 +10128,7 @@
           <a:lstStyle/>
           <a:p>
             <a:pPr algn="ctr"/>
+            <a:endParaRPr/>
           </a:p>
         </p:txBody>
       </p:sp>
@@ -9419,6 +10172,7 @@
           <a:lstStyle/>
           <a:p>
             <a:pPr algn="ctr"/>
+            <a:endParaRPr/>
           </a:p>
         </p:txBody>
       </p:sp>
@@ -9462,6 +10216,7 @@
           <a:lstStyle/>
           <a:p>
             <a:pPr algn="ctr"/>
+            <a:endParaRPr/>
           </a:p>
         </p:txBody>
       </p:sp>
@@ -9505,6 +10260,7 @@
           <a:lstStyle/>
           <a:p>
             <a:pPr algn="ctr"/>
+            <a:endParaRPr/>
           </a:p>
         </p:txBody>
       </p:sp>
@@ -9525,7 +10281,7 @@
           <a:noFill/>
         </p:spPr>
         <p:txBody>
-          <a:bodyPr wrap="square" lIns="127000" rIns="127000" tIns="101600" bIns="101600" anchor="t">
+          <a:bodyPr wrap="square" lIns="127000" tIns="101600" rIns="127000" bIns="101600" anchor="t">
             <a:noAutofit/>
           </a:bodyPr>
           <a:lstStyle/>
@@ -9567,7 +10323,7 @@
           <a:noFill/>
         </p:spPr>
         <p:txBody>
-          <a:bodyPr wrap="square" lIns="127000" rIns="127000" tIns="101600" bIns="101600" anchor="t">
+          <a:bodyPr wrap="square" lIns="127000" tIns="101600" rIns="127000" bIns="101600" anchor="t">
             <a:noAutofit/>
           </a:bodyPr>
           <a:lstStyle/>
@@ -9609,7 +10365,7 @@
           <a:noFill/>
         </p:spPr>
         <p:txBody>
-          <a:bodyPr wrap="square" lIns="127000" rIns="127000" tIns="101600" bIns="101600" anchor="t">
+          <a:bodyPr wrap="square" lIns="127000" tIns="101600" rIns="127000" bIns="101600" anchor="t">
             <a:noAutofit/>
           </a:bodyPr>
           <a:lstStyle/>
@@ -9651,7 +10407,7 @@
           <a:noFill/>
         </p:spPr>
         <p:txBody>
-          <a:bodyPr wrap="square" lIns="127000" rIns="127000" tIns="101600" bIns="101600" anchor="t">
+          <a:bodyPr wrap="square" lIns="127000" tIns="101600" rIns="127000" bIns="101600" anchor="t">
             <a:noAutofit/>
           </a:bodyPr>
           <a:lstStyle/>
@@ -9693,7 +10449,7 @@
           <a:noFill/>
         </p:spPr>
         <p:txBody>
-          <a:bodyPr wrap="square" lIns="127000" rIns="127000" tIns="101600" bIns="101600" anchor="t">
+          <a:bodyPr wrap="square" lIns="127000" tIns="101600" rIns="127000" bIns="101600" anchor="t">
             <a:noAutofit/>
           </a:bodyPr>
           <a:lstStyle/>
@@ -9756,7 +10512,7 @@
           </a:fontRef>
         </p:style>
         <p:txBody>
-          <a:bodyPr rtlCol="0" anchor="ctr" wrap="square" lIns="127000" rIns="127000" tIns="101600" bIns="101600">
+          <a:bodyPr wrap="square" lIns="127000" tIns="101600" rIns="127000" bIns="101600" rtlCol="0" anchor="ctr">
             <a:noAutofit/>
           </a:bodyPr>
           <a:lstStyle/>
@@ -9819,7 +10575,7 @@
           </a:fontRef>
         </p:style>
         <p:txBody>
-          <a:bodyPr rtlCol="0" anchor="t" wrap="square" lIns="203200" rIns="127000" tIns="203200" bIns="101600">
+          <a:bodyPr wrap="square" lIns="203200" tIns="203200" rIns="127000" bIns="101600" rtlCol="0" anchor="t">
             <a:noAutofit/>
           </a:bodyPr>
           <a:lstStyle/>
@@ -9977,7 +10733,7 @@
           </a:fontRef>
         </p:style>
         <p:txBody>
-          <a:bodyPr rtlCol="0" anchor="t" wrap="square" lIns="203200" rIns="127000" tIns="203200" bIns="101600">
+          <a:bodyPr wrap="square" lIns="203200" tIns="203200" rIns="127000" bIns="101600" rtlCol="0" anchor="t">
             <a:noAutofit/>
           </a:bodyPr>
           <a:lstStyle/>
@@ -10135,7 +10891,7 @@
           </a:fontRef>
         </p:style>
         <p:txBody>
-          <a:bodyPr rtlCol="0" anchor="t" wrap="square" lIns="203200" rIns="127000" tIns="203200" bIns="101600">
+          <a:bodyPr wrap="square" lIns="203200" tIns="203200" rIns="127000" bIns="101600" rtlCol="0" anchor="t">
             <a:noAutofit/>
           </a:bodyPr>
           <a:lstStyle/>
@@ -10264,7 +11020,7 @@
 </file>
 
 <file path=ppt/slides/slide17.xml><?xml version="1.0" encoding="utf-8"?>
-<p:sld xmlns:a="http://schemas.openxmlformats.org/drawingml/2006/main" xmlns:p="http://schemas.openxmlformats.org/presentationml/2006/main" xmlns:r="http://schemas.openxmlformats.org/officeDocument/2006/relationships">
+<p:sld xmlns:a="http://schemas.openxmlformats.org/drawingml/2006/main" xmlns:r="http://schemas.openxmlformats.org/officeDocument/2006/relationships" xmlns:p="http://schemas.openxmlformats.org/presentationml/2006/main">
   <p:cSld>
     <p:spTree>
       <p:nvGrpSpPr>
@@ -10272,7 +11028,14 @@
         <p:cNvGrpSpPr/>
         <p:nvPr/>
       </p:nvGrpSpPr>
-      <p:grpSpPr/>
+      <p:grpSpPr>
+        <a:xfrm>
+          <a:off x="0" y="0"/>
+          <a:ext cx="0" cy="0"/>
+          <a:chOff x="0" y="0"/>
+          <a:chExt cx="0" cy="0"/>
+        </a:xfrm>
+      </p:grpSpPr>
       <p:sp>
         <p:nvSpPr>
           <p:cNvPr id="2" name="Rectangle 1"/>
@@ -10313,6 +11076,7 @@
           <a:lstStyle/>
           <a:p>
             <a:pPr algn="ctr"/>
+            <a:endParaRPr/>
           </a:p>
         </p:txBody>
       </p:sp>
@@ -10356,6 +11120,7 @@
           <a:lstStyle/>
           <a:p>
             <a:pPr algn="ctr"/>
+            <a:endParaRPr/>
           </a:p>
         </p:txBody>
       </p:sp>
@@ -10399,6 +11164,7 @@
           <a:lstStyle/>
           <a:p>
             <a:pPr algn="ctr"/>
+            <a:endParaRPr/>
           </a:p>
         </p:txBody>
       </p:sp>
@@ -10442,6 +11208,7 @@
           <a:lstStyle/>
           <a:p>
             <a:pPr algn="ctr"/>
+            <a:endParaRPr/>
           </a:p>
         </p:txBody>
       </p:sp>
@@ -10485,6 +11252,7 @@
           <a:lstStyle/>
           <a:p>
             <a:pPr algn="ctr"/>
+            <a:endParaRPr/>
           </a:p>
         </p:txBody>
       </p:sp>
@@ -10505,7 +11273,7 @@
           <a:noFill/>
         </p:spPr>
         <p:txBody>
-          <a:bodyPr wrap="square" lIns="127000" rIns="127000" tIns="101600" bIns="101600" anchor="t">
+          <a:bodyPr wrap="square" lIns="127000" tIns="101600" rIns="127000" bIns="101600" anchor="t">
             <a:noAutofit/>
           </a:bodyPr>
           <a:lstStyle/>
@@ -10547,7 +11315,7 @@
           <a:noFill/>
         </p:spPr>
         <p:txBody>
-          <a:bodyPr wrap="square" lIns="127000" rIns="127000" tIns="101600" bIns="101600" anchor="t">
+          <a:bodyPr wrap="square" lIns="127000" tIns="101600" rIns="127000" bIns="101600" anchor="t">
             <a:noAutofit/>
           </a:bodyPr>
           <a:lstStyle/>
@@ -10589,7 +11357,7 @@
           <a:noFill/>
         </p:spPr>
         <p:txBody>
-          <a:bodyPr wrap="square" lIns="127000" rIns="127000" tIns="101600" bIns="101600" anchor="t">
+          <a:bodyPr wrap="square" lIns="127000" tIns="101600" rIns="127000" bIns="101600" anchor="t">
             <a:noAutofit/>
           </a:bodyPr>
           <a:lstStyle/>
@@ -10631,7 +11399,7 @@
           <a:noFill/>
         </p:spPr>
         <p:txBody>
-          <a:bodyPr wrap="square" lIns="127000" rIns="127000" tIns="101600" bIns="101600" anchor="t">
+          <a:bodyPr wrap="square" lIns="127000" tIns="101600" rIns="127000" bIns="101600" anchor="t">
             <a:noAutofit/>
           </a:bodyPr>
           <a:lstStyle/>
@@ -10694,7 +11462,7 @@
           </a:fontRef>
         </p:style>
         <p:txBody>
-          <a:bodyPr rtlCol="0" anchor="t" wrap="square" lIns="254000" rIns="127000" tIns="228600" bIns="101600">
+          <a:bodyPr wrap="square" lIns="254000" tIns="228600" rIns="127000" bIns="101600" rtlCol="0" anchor="t">
             <a:noAutofit/>
           </a:bodyPr>
           <a:lstStyle/>
@@ -10871,7 +11639,7 @@
           </a:fontRef>
         </p:style>
         <p:txBody>
-          <a:bodyPr rtlCol="0" anchor="t" wrap="square" lIns="254000" rIns="127000" tIns="228600" bIns="101600">
+          <a:bodyPr wrap="square" lIns="254000" tIns="228600" rIns="127000" bIns="101600" rtlCol="0" anchor="t">
             <a:noAutofit/>
           </a:bodyPr>
           <a:lstStyle/>
@@ -11010,7 +11778,7 @@
           </a:fontRef>
         </p:style>
         <p:txBody>
-          <a:bodyPr rtlCol="0" anchor="ctr" wrap="square" lIns="127000" rIns="127000" tIns="101600" bIns="101600">
+          <a:bodyPr wrap="square" lIns="127000" tIns="101600" rIns="127000" bIns="101600" rtlCol="0" anchor="ctr">
             <a:noAutofit/>
           </a:bodyPr>
           <a:lstStyle/>
@@ -11044,7 +11812,7 @@
 </file>
 
 <file path=ppt/slides/slide2.xml><?xml version="1.0" encoding="utf-8"?>
-<p:sld xmlns:a="http://schemas.openxmlformats.org/drawingml/2006/main" xmlns:p="http://schemas.openxmlformats.org/presentationml/2006/main" xmlns:r="http://schemas.openxmlformats.org/officeDocument/2006/relationships">
+<p:sld xmlns:a="http://schemas.openxmlformats.org/drawingml/2006/main" xmlns:r="http://schemas.openxmlformats.org/officeDocument/2006/relationships" xmlns:p="http://schemas.openxmlformats.org/presentationml/2006/main">
   <p:cSld>
     <p:spTree>
       <p:nvGrpSpPr>
@@ -11052,7 +11820,14 @@
         <p:cNvGrpSpPr/>
         <p:nvPr/>
       </p:nvGrpSpPr>
-      <p:grpSpPr/>
+      <p:grpSpPr>
+        <a:xfrm>
+          <a:off x="0" y="0"/>
+          <a:ext cx="0" cy="0"/>
+          <a:chOff x="0" y="0"/>
+          <a:chExt cx="0" cy="0"/>
+        </a:xfrm>
+      </p:grpSpPr>
       <p:sp>
         <p:nvSpPr>
           <p:cNvPr id="2" name="Rectangle 1"/>
@@ -11093,6 +11868,7 @@
           <a:lstStyle/>
           <a:p>
             <a:pPr algn="ctr"/>
+            <a:endParaRPr/>
           </a:p>
         </p:txBody>
       </p:sp>
@@ -11136,6 +11912,7 @@
           <a:lstStyle/>
           <a:p>
             <a:pPr algn="ctr"/>
+            <a:endParaRPr/>
           </a:p>
         </p:txBody>
       </p:sp>
@@ -11179,6 +11956,7 @@
           <a:lstStyle/>
           <a:p>
             <a:pPr algn="ctr"/>
+            <a:endParaRPr/>
           </a:p>
         </p:txBody>
       </p:sp>
@@ -11222,6 +12000,7 @@
           <a:lstStyle/>
           <a:p>
             <a:pPr algn="ctr"/>
+            <a:endParaRPr/>
           </a:p>
         </p:txBody>
       </p:sp>
@@ -11265,6 +12044,7 @@
           <a:lstStyle/>
           <a:p>
             <a:pPr algn="ctr"/>
+            <a:endParaRPr/>
           </a:p>
         </p:txBody>
       </p:sp>
@@ -11285,7 +12065,7 @@
           <a:noFill/>
         </p:spPr>
         <p:txBody>
-          <a:bodyPr wrap="square" lIns="127000" rIns="127000" tIns="101600" bIns="101600" anchor="t">
+          <a:bodyPr wrap="square" lIns="127000" tIns="101600" rIns="127000" bIns="101600" anchor="t">
             <a:noAutofit/>
           </a:bodyPr>
           <a:lstStyle/>
@@ -11327,7 +12107,7 @@
           <a:noFill/>
         </p:spPr>
         <p:txBody>
-          <a:bodyPr wrap="square" lIns="127000" rIns="127000" tIns="101600" bIns="101600" anchor="t">
+          <a:bodyPr wrap="square" lIns="127000" tIns="101600" rIns="127000" bIns="101600" anchor="t">
             <a:noAutofit/>
           </a:bodyPr>
           <a:lstStyle/>
@@ -11369,7 +12149,7 @@
           <a:noFill/>
         </p:spPr>
         <p:txBody>
-          <a:bodyPr wrap="square" lIns="127000" rIns="127000" tIns="101600" bIns="101600" anchor="t">
+          <a:bodyPr wrap="square" lIns="127000" tIns="101600" rIns="127000" bIns="101600" anchor="t">
             <a:noAutofit/>
           </a:bodyPr>
           <a:lstStyle/>
@@ -11411,7 +12191,7 @@
           <a:noFill/>
         </p:spPr>
         <p:txBody>
-          <a:bodyPr wrap="square" lIns="127000" rIns="127000" tIns="101600" bIns="101600" anchor="t">
+          <a:bodyPr wrap="square" lIns="127000" tIns="101600" rIns="127000" bIns="101600" anchor="t">
             <a:noAutofit/>
           </a:bodyPr>
           <a:lstStyle/>
@@ -11478,6 +12258,7 @@
           <a:lstStyle/>
           <a:p>
             <a:pPr algn="ctr"/>
+            <a:endParaRPr/>
           </a:p>
         </p:txBody>
       </p:sp>
@@ -11498,7 +12279,7 @@
           <a:noFill/>
         </p:spPr>
         <p:txBody>
-          <a:bodyPr wrap="square" lIns="127000" rIns="127000" tIns="101600" bIns="101600" anchor="ctr">
+          <a:bodyPr wrap="square" lIns="127000" tIns="101600" rIns="127000" bIns="101600" anchor="ctr">
             <a:noAutofit/>
           </a:bodyPr>
           <a:lstStyle/>
@@ -11540,7 +12321,7 @@
           <a:noFill/>
         </p:spPr>
         <p:txBody>
-          <a:bodyPr wrap="square" lIns="127000" rIns="127000" tIns="101600" bIns="101600" anchor="t">
+          <a:bodyPr wrap="square" lIns="127000" tIns="101600" rIns="127000" bIns="101600" anchor="t">
             <a:noAutofit/>
           </a:bodyPr>
           <a:lstStyle/>
@@ -11626,6 +12407,7 @@
           <a:lstStyle/>
           <a:p>
             <a:pPr algn="ctr"/>
+            <a:endParaRPr/>
           </a:p>
         </p:txBody>
       </p:sp>
@@ -11646,7 +12428,7 @@
           <a:noFill/>
         </p:spPr>
         <p:txBody>
-          <a:bodyPr wrap="square" lIns="127000" rIns="127000" tIns="101600" bIns="101600" anchor="ctr">
+          <a:bodyPr wrap="square" lIns="127000" tIns="101600" rIns="127000" bIns="101600" anchor="ctr">
             <a:noAutofit/>
           </a:bodyPr>
           <a:lstStyle/>
@@ -11688,7 +12470,7 @@
           <a:noFill/>
         </p:spPr>
         <p:txBody>
-          <a:bodyPr wrap="square" lIns="127000" rIns="127000" tIns="101600" bIns="101600" anchor="t">
+          <a:bodyPr wrap="square" lIns="127000" tIns="101600" rIns="127000" bIns="101600" anchor="t">
             <a:noAutofit/>
           </a:bodyPr>
           <a:lstStyle/>
@@ -11774,6 +12556,7 @@
           <a:lstStyle/>
           <a:p>
             <a:pPr algn="ctr"/>
+            <a:endParaRPr/>
           </a:p>
         </p:txBody>
       </p:sp>
@@ -11794,7 +12577,7 @@
           <a:noFill/>
         </p:spPr>
         <p:txBody>
-          <a:bodyPr wrap="square" lIns="127000" rIns="127000" tIns="101600" bIns="101600" anchor="ctr">
+          <a:bodyPr wrap="square" lIns="127000" tIns="101600" rIns="127000" bIns="101600" anchor="ctr">
             <a:noAutofit/>
           </a:bodyPr>
           <a:lstStyle/>
@@ -11836,7 +12619,7 @@
           <a:noFill/>
         </p:spPr>
         <p:txBody>
-          <a:bodyPr wrap="square" lIns="127000" rIns="127000" tIns="101600" bIns="101600" anchor="t">
+          <a:bodyPr wrap="square" lIns="127000" tIns="101600" rIns="127000" bIns="101600" anchor="t">
             <a:noAutofit/>
           </a:bodyPr>
           <a:lstStyle/>
@@ -11922,6 +12705,7 @@
           <a:lstStyle/>
           <a:p>
             <a:pPr algn="ctr"/>
+            <a:endParaRPr/>
           </a:p>
         </p:txBody>
       </p:sp>
@@ -11942,7 +12726,7 @@
           <a:noFill/>
         </p:spPr>
         <p:txBody>
-          <a:bodyPr wrap="square" lIns="127000" rIns="127000" tIns="101600" bIns="101600" anchor="ctr">
+          <a:bodyPr wrap="square" lIns="127000" tIns="101600" rIns="127000" bIns="101600" anchor="ctr">
             <a:noAutofit/>
           </a:bodyPr>
           <a:lstStyle/>
@@ -11984,7 +12768,7 @@
           <a:noFill/>
         </p:spPr>
         <p:txBody>
-          <a:bodyPr wrap="square" lIns="127000" rIns="127000" tIns="101600" bIns="101600" anchor="t">
+          <a:bodyPr wrap="square" lIns="127000" tIns="101600" rIns="127000" bIns="101600" anchor="t">
             <a:noAutofit/>
           </a:bodyPr>
           <a:lstStyle/>
@@ -12070,6 +12854,7 @@
           <a:lstStyle/>
           <a:p>
             <a:pPr algn="ctr"/>
+            <a:endParaRPr/>
           </a:p>
         </p:txBody>
       </p:sp>
@@ -12090,7 +12875,7 @@
           <a:noFill/>
         </p:spPr>
         <p:txBody>
-          <a:bodyPr wrap="square" lIns="127000" rIns="127000" tIns="101600" bIns="101600" anchor="ctr">
+          <a:bodyPr wrap="square" lIns="127000" tIns="101600" rIns="127000" bIns="101600" anchor="ctr">
             <a:noAutofit/>
           </a:bodyPr>
           <a:lstStyle/>
@@ -12132,7 +12917,7 @@
           <a:noFill/>
         </p:spPr>
         <p:txBody>
-          <a:bodyPr wrap="square" lIns="127000" rIns="127000" tIns="101600" bIns="101600" anchor="t">
+          <a:bodyPr wrap="square" lIns="127000" tIns="101600" rIns="127000" bIns="101600" anchor="t">
             <a:noAutofit/>
           </a:bodyPr>
           <a:lstStyle/>
@@ -12218,6 +13003,7 @@
           <a:lstStyle/>
           <a:p>
             <a:pPr algn="ctr"/>
+            <a:endParaRPr/>
           </a:p>
         </p:txBody>
       </p:sp>
@@ -12238,7 +13024,7 @@
           <a:noFill/>
         </p:spPr>
         <p:txBody>
-          <a:bodyPr wrap="square" lIns="127000" rIns="127000" tIns="101600" bIns="101600" anchor="ctr">
+          <a:bodyPr wrap="square" lIns="127000" tIns="101600" rIns="127000" bIns="101600" anchor="ctr">
             <a:noAutofit/>
           </a:bodyPr>
           <a:lstStyle/>
@@ -12280,7 +13066,7 @@
           <a:noFill/>
         </p:spPr>
         <p:txBody>
-          <a:bodyPr wrap="square" lIns="127000" rIns="127000" tIns="101600" bIns="101600" anchor="t">
+          <a:bodyPr wrap="square" lIns="127000" tIns="101600" rIns="127000" bIns="101600" anchor="t">
             <a:noAutofit/>
           </a:bodyPr>
           <a:lstStyle/>
@@ -12333,7 +13119,7 @@
 </file>
 
 <file path=ppt/slides/slide3.xml><?xml version="1.0" encoding="utf-8"?>
-<p:sld xmlns:a="http://schemas.openxmlformats.org/drawingml/2006/main" xmlns:p="http://schemas.openxmlformats.org/presentationml/2006/main" xmlns:r="http://schemas.openxmlformats.org/officeDocument/2006/relationships">
+<p:sld xmlns:a="http://schemas.openxmlformats.org/drawingml/2006/main" xmlns:r="http://schemas.openxmlformats.org/officeDocument/2006/relationships" xmlns:p="http://schemas.openxmlformats.org/presentationml/2006/main">
   <p:cSld>
     <p:spTree>
       <p:nvGrpSpPr>
@@ -12341,7 +13127,14 @@
         <p:cNvGrpSpPr/>
         <p:nvPr/>
       </p:nvGrpSpPr>
-      <p:grpSpPr/>
+      <p:grpSpPr>
+        <a:xfrm>
+          <a:off x="0" y="0"/>
+          <a:ext cx="0" cy="0"/>
+          <a:chOff x="0" y="0"/>
+          <a:chExt cx="0" cy="0"/>
+        </a:xfrm>
+      </p:grpSpPr>
       <p:sp>
         <p:nvSpPr>
           <p:cNvPr id="2" name="Rectangle 1"/>
@@ -12382,6 +13175,7 @@
           <a:lstStyle/>
           <a:p>
             <a:pPr algn="ctr"/>
+            <a:endParaRPr/>
           </a:p>
         </p:txBody>
       </p:sp>
@@ -12425,6 +13219,7 @@
           <a:lstStyle/>
           <a:p>
             <a:pPr algn="ctr"/>
+            <a:endParaRPr/>
           </a:p>
         </p:txBody>
       </p:sp>
@@ -12468,6 +13263,7 @@
           <a:lstStyle/>
           <a:p>
             <a:pPr algn="ctr"/>
+            <a:endParaRPr/>
           </a:p>
         </p:txBody>
       </p:sp>
@@ -12511,6 +13307,7 @@
           <a:lstStyle/>
           <a:p>
             <a:pPr algn="ctr"/>
+            <a:endParaRPr/>
           </a:p>
         </p:txBody>
       </p:sp>
@@ -12554,6 +13351,7 @@
           <a:lstStyle/>
           <a:p>
             <a:pPr algn="ctr"/>
+            <a:endParaRPr/>
           </a:p>
         </p:txBody>
       </p:sp>
@@ -12574,7 +13372,7 @@
           <a:noFill/>
         </p:spPr>
         <p:txBody>
-          <a:bodyPr wrap="square" lIns="127000" rIns="127000" tIns="101600" bIns="101600" anchor="t">
+          <a:bodyPr wrap="square" lIns="127000" tIns="101600" rIns="127000" bIns="101600" anchor="t">
             <a:noAutofit/>
           </a:bodyPr>
           <a:lstStyle/>
@@ -12616,7 +13414,7 @@
           <a:noFill/>
         </p:spPr>
         <p:txBody>
-          <a:bodyPr wrap="square" lIns="127000" rIns="127000" tIns="101600" bIns="101600" anchor="t">
+          <a:bodyPr wrap="square" lIns="127000" tIns="101600" rIns="127000" bIns="101600" anchor="t">
             <a:noAutofit/>
           </a:bodyPr>
           <a:lstStyle/>
@@ -12658,7 +13456,7 @@
           <a:noFill/>
         </p:spPr>
         <p:txBody>
-          <a:bodyPr wrap="square" lIns="127000" rIns="127000" tIns="101600" bIns="101600" anchor="t">
+          <a:bodyPr wrap="square" lIns="127000" tIns="101600" rIns="127000" bIns="101600" anchor="t">
             <a:noAutofit/>
           </a:bodyPr>
           <a:lstStyle/>
@@ -12700,7 +13498,7 @@
           <a:noFill/>
         </p:spPr>
         <p:txBody>
-          <a:bodyPr wrap="square" lIns="127000" rIns="127000" tIns="101600" bIns="101600" anchor="t">
+          <a:bodyPr wrap="square" lIns="127000" tIns="101600" rIns="127000" bIns="101600" anchor="t">
             <a:noAutofit/>
           </a:bodyPr>
           <a:lstStyle/>
@@ -12767,6 +13565,7 @@
           <a:lstStyle/>
           <a:p>
             <a:pPr algn="ctr"/>
+            <a:endParaRPr/>
           </a:p>
         </p:txBody>
       </p:sp>
@@ -12810,6 +13609,7 @@
           <a:lstStyle/>
           <a:p>
             <a:pPr algn="ctr"/>
+            <a:endParaRPr/>
           </a:p>
         </p:txBody>
       </p:sp>
@@ -12830,7 +13630,7 @@
           <a:noFill/>
         </p:spPr>
         <p:txBody>
-          <a:bodyPr wrap="square" lIns="127000" rIns="127000" tIns="101600" bIns="101600" anchor="t">
+          <a:bodyPr wrap="square" lIns="127000" tIns="101600" rIns="127000" bIns="101600" anchor="t">
             <a:noAutofit/>
           </a:bodyPr>
           <a:lstStyle/>
@@ -12916,6 +13716,7 @@
           <a:lstStyle/>
           <a:p>
             <a:pPr algn="ctr"/>
+            <a:endParaRPr/>
           </a:p>
         </p:txBody>
       </p:sp>
@@ -12959,6 +13760,7 @@
           <a:lstStyle/>
           <a:p>
             <a:pPr algn="ctr"/>
+            <a:endParaRPr/>
           </a:p>
         </p:txBody>
       </p:sp>
@@ -12979,7 +13781,7 @@
           <a:noFill/>
         </p:spPr>
         <p:txBody>
-          <a:bodyPr wrap="square" lIns="127000" rIns="127000" tIns="101600" bIns="101600" anchor="t">
+          <a:bodyPr wrap="square" lIns="127000" tIns="101600" rIns="127000" bIns="101600" anchor="t">
             <a:noAutofit/>
           </a:bodyPr>
           <a:lstStyle/>
@@ -13065,6 +13867,7 @@
           <a:lstStyle/>
           <a:p>
             <a:pPr algn="ctr"/>
+            <a:endParaRPr/>
           </a:p>
         </p:txBody>
       </p:sp>
@@ -13108,6 +13911,7 @@
           <a:lstStyle/>
           <a:p>
             <a:pPr algn="ctr"/>
+            <a:endParaRPr/>
           </a:p>
         </p:txBody>
       </p:sp>
@@ -13128,7 +13932,7 @@
           <a:noFill/>
         </p:spPr>
         <p:txBody>
-          <a:bodyPr wrap="square" lIns="127000" rIns="127000" tIns="101600" bIns="101600" anchor="t">
+          <a:bodyPr wrap="square" lIns="127000" tIns="101600" rIns="127000" bIns="101600" anchor="t">
             <a:noAutofit/>
           </a:bodyPr>
           <a:lstStyle/>
@@ -13214,6 +14018,7 @@
           <a:lstStyle/>
           <a:p>
             <a:pPr algn="ctr"/>
+            <a:endParaRPr/>
           </a:p>
         </p:txBody>
       </p:sp>
@@ -13257,6 +14062,7 @@
           <a:lstStyle/>
           <a:p>
             <a:pPr algn="ctr"/>
+            <a:endParaRPr/>
           </a:p>
         </p:txBody>
       </p:sp>
@@ -13277,7 +14083,7 @@
           <a:noFill/>
         </p:spPr>
         <p:txBody>
-          <a:bodyPr wrap="square" lIns="127000" rIns="127000" tIns="101600" bIns="101600" anchor="t">
+          <a:bodyPr wrap="square" lIns="127000" tIns="101600" rIns="127000" bIns="101600" anchor="t">
             <a:noAutofit/>
           </a:bodyPr>
           <a:lstStyle/>
@@ -13359,7 +14165,7 @@
           </a:fontRef>
         </p:style>
         <p:txBody>
-          <a:bodyPr rtlCol="0" anchor="ctr" wrap="square" lIns="279400" rIns="228600" tIns="101600" bIns="101600">
+          <a:bodyPr wrap="square" lIns="279400" tIns="101600" rIns="228600" bIns="101600" rtlCol="0" anchor="ctr">
             <a:noAutofit/>
           </a:bodyPr>
           <a:lstStyle/>
@@ -13488,7 +14294,7 @@
 </file>
 
 <file path=ppt/slides/slide4.xml><?xml version="1.0" encoding="utf-8"?>
-<p:sld xmlns:a="http://schemas.openxmlformats.org/drawingml/2006/main" xmlns:p="http://schemas.openxmlformats.org/presentationml/2006/main" xmlns:r="http://schemas.openxmlformats.org/officeDocument/2006/relationships">
+<p:sld xmlns:a="http://schemas.openxmlformats.org/drawingml/2006/main" xmlns:r="http://schemas.openxmlformats.org/officeDocument/2006/relationships" xmlns:p="http://schemas.openxmlformats.org/presentationml/2006/main">
   <p:cSld>
     <p:spTree>
       <p:nvGrpSpPr>
@@ -13496,7 +14302,14 @@
         <p:cNvGrpSpPr/>
         <p:nvPr/>
       </p:nvGrpSpPr>
-      <p:grpSpPr/>
+      <p:grpSpPr>
+        <a:xfrm>
+          <a:off x="0" y="0"/>
+          <a:ext cx="0" cy="0"/>
+          <a:chOff x="0" y="0"/>
+          <a:chExt cx="0" cy="0"/>
+        </a:xfrm>
+      </p:grpSpPr>
       <p:sp>
         <p:nvSpPr>
           <p:cNvPr id="2" name="Rectangle 1"/>
@@ -13537,6 +14350,7 @@
           <a:lstStyle/>
           <a:p>
             <a:pPr algn="ctr"/>
+            <a:endParaRPr/>
           </a:p>
         </p:txBody>
       </p:sp>
@@ -13580,6 +14394,7 @@
           <a:lstStyle/>
           <a:p>
             <a:pPr algn="ctr"/>
+            <a:endParaRPr/>
           </a:p>
         </p:txBody>
       </p:sp>
@@ -13623,6 +14438,7 @@
           <a:lstStyle/>
           <a:p>
             <a:pPr algn="ctr"/>
+            <a:endParaRPr/>
           </a:p>
         </p:txBody>
       </p:sp>
@@ -13666,6 +14482,7 @@
           <a:lstStyle/>
           <a:p>
             <a:pPr algn="ctr"/>
+            <a:endParaRPr/>
           </a:p>
         </p:txBody>
       </p:sp>
@@ -13709,6 +14526,7 @@
           <a:lstStyle/>
           <a:p>
             <a:pPr algn="ctr"/>
+            <a:endParaRPr/>
           </a:p>
         </p:txBody>
       </p:sp>
@@ -13729,7 +14547,7 @@
           <a:noFill/>
         </p:spPr>
         <p:txBody>
-          <a:bodyPr wrap="square" lIns="127000" rIns="127000" tIns="101600" bIns="101600" anchor="t">
+          <a:bodyPr wrap="square" lIns="127000" tIns="101600" rIns="127000" bIns="101600" anchor="t">
             <a:noAutofit/>
           </a:bodyPr>
           <a:lstStyle/>
@@ -13771,7 +14589,7 @@
           <a:noFill/>
         </p:spPr>
         <p:txBody>
-          <a:bodyPr wrap="square" lIns="127000" rIns="127000" tIns="101600" bIns="101600" anchor="t">
+          <a:bodyPr wrap="square" lIns="127000" tIns="101600" rIns="127000" bIns="101600" anchor="t">
             <a:noAutofit/>
           </a:bodyPr>
           <a:lstStyle/>
@@ -13813,7 +14631,7 @@
           <a:noFill/>
         </p:spPr>
         <p:txBody>
-          <a:bodyPr wrap="square" lIns="127000" rIns="127000" tIns="101600" bIns="101600" anchor="t">
+          <a:bodyPr wrap="square" lIns="127000" tIns="101600" rIns="127000" bIns="101600" anchor="t">
             <a:noAutofit/>
           </a:bodyPr>
           <a:lstStyle/>
@@ -13855,7 +14673,7 @@
           <a:noFill/>
         </p:spPr>
         <p:txBody>
-          <a:bodyPr wrap="square" lIns="127000" rIns="127000" tIns="101600" bIns="101600" anchor="t">
+          <a:bodyPr wrap="square" lIns="127000" tIns="101600" rIns="127000" bIns="101600" anchor="t">
             <a:noAutofit/>
           </a:bodyPr>
           <a:lstStyle/>
@@ -13897,7 +14715,7 @@
           <a:noFill/>
         </p:spPr>
         <p:txBody>
-          <a:bodyPr wrap="square" lIns="127000" rIns="127000" tIns="101600" bIns="101600" anchor="t">
+          <a:bodyPr wrap="square" lIns="127000" tIns="101600" rIns="127000" bIns="101600" anchor="t">
             <a:noAutofit/>
           </a:bodyPr>
           <a:lstStyle/>
@@ -13960,7 +14778,7 @@
           </a:fontRef>
         </p:style>
         <p:txBody>
-          <a:bodyPr rtlCol="0" anchor="t" wrap="square" lIns="228600" rIns="177800" tIns="228600" bIns="101600">
+          <a:bodyPr wrap="square" lIns="228600" tIns="228600" rIns="177800" bIns="101600" rtlCol="0" anchor="t">
             <a:noAutofit/>
           </a:bodyPr>
           <a:lstStyle/>
@@ -14118,7 +14936,7 @@
           </a:fontRef>
         </p:style>
         <p:txBody>
-          <a:bodyPr rtlCol="0" anchor="t" wrap="square" lIns="228600" rIns="177800" tIns="228600" bIns="101600">
+          <a:bodyPr wrap="square" lIns="228600" tIns="228600" rIns="177800" bIns="101600" rtlCol="0" anchor="t">
             <a:noAutofit/>
           </a:bodyPr>
           <a:lstStyle/>
@@ -14276,7 +15094,7 @@
           </a:fontRef>
         </p:style>
         <p:txBody>
-          <a:bodyPr rtlCol="0" anchor="t" wrap="square" lIns="228600" rIns="177800" tIns="228600" bIns="101600">
+          <a:bodyPr wrap="square" lIns="228600" tIns="228600" rIns="177800" bIns="101600" rtlCol="0" anchor="t">
             <a:noAutofit/>
           </a:bodyPr>
           <a:lstStyle/>
@@ -14436,6 +15254,7 @@
           <a:lstStyle/>
           <a:p>
             <a:pPr algn="ctr"/>
+            <a:endParaRPr/>
           </a:p>
         </p:txBody>
       </p:sp>
@@ -14456,7 +15275,7 @@
           <a:noFill/>
         </p:spPr>
         <p:txBody>
-          <a:bodyPr wrap="square" lIns="127000" rIns="127000" tIns="101600" bIns="101600" anchor="ctr">
+          <a:bodyPr wrap="square" lIns="127000" tIns="101600" rIns="127000" bIns="101600" anchor="ctr">
             <a:noAutofit/>
           </a:bodyPr>
           <a:lstStyle/>
@@ -14490,7 +15309,7 @@
 </file>
 
 <file path=ppt/slides/slide5.xml><?xml version="1.0" encoding="utf-8"?>
-<p:sld xmlns:a="http://schemas.openxmlformats.org/drawingml/2006/main" xmlns:p="http://schemas.openxmlformats.org/presentationml/2006/main" xmlns:r="http://schemas.openxmlformats.org/officeDocument/2006/relationships">
+<p:sld xmlns:a="http://schemas.openxmlformats.org/drawingml/2006/main" xmlns:r="http://schemas.openxmlformats.org/officeDocument/2006/relationships" xmlns:p="http://schemas.openxmlformats.org/presentationml/2006/main">
   <p:cSld>
     <p:spTree>
       <p:nvGrpSpPr>
@@ -14498,7 +15317,14 @@
         <p:cNvGrpSpPr/>
         <p:nvPr/>
       </p:nvGrpSpPr>
-      <p:grpSpPr/>
+      <p:grpSpPr>
+        <a:xfrm>
+          <a:off x="0" y="0"/>
+          <a:ext cx="0" cy="0"/>
+          <a:chOff x="0" y="0"/>
+          <a:chExt cx="0" cy="0"/>
+        </a:xfrm>
+      </p:grpSpPr>
       <p:sp>
         <p:nvSpPr>
           <p:cNvPr id="2" name="Rectangle 1"/>
@@ -14539,6 +15365,7 @@
           <a:lstStyle/>
           <a:p>
             <a:pPr algn="ctr"/>
+            <a:endParaRPr/>
           </a:p>
         </p:txBody>
       </p:sp>
@@ -14582,6 +15409,7 @@
           <a:lstStyle/>
           <a:p>
             <a:pPr algn="ctr"/>
+            <a:endParaRPr/>
           </a:p>
         </p:txBody>
       </p:sp>
@@ -14625,6 +15453,7 @@
           <a:lstStyle/>
           <a:p>
             <a:pPr algn="ctr"/>
+            <a:endParaRPr/>
           </a:p>
         </p:txBody>
       </p:sp>
@@ -14668,6 +15497,7 @@
           <a:lstStyle/>
           <a:p>
             <a:pPr algn="ctr"/>
+            <a:endParaRPr/>
           </a:p>
         </p:txBody>
       </p:sp>
@@ -14711,6 +15541,7 @@
           <a:lstStyle/>
           <a:p>
             <a:pPr algn="ctr"/>
+            <a:endParaRPr/>
           </a:p>
         </p:txBody>
       </p:sp>
@@ -14731,7 +15562,7 @@
           <a:noFill/>
         </p:spPr>
         <p:txBody>
-          <a:bodyPr wrap="square" lIns="127000" rIns="127000" tIns="101600" bIns="101600" anchor="t">
+          <a:bodyPr wrap="square" lIns="127000" tIns="101600" rIns="127000" bIns="101600" anchor="t">
             <a:noAutofit/>
           </a:bodyPr>
           <a:lstStyle/>
@@ -14773,7 +15604,7 @@
           <a:noFill/>
         </p:spPr>
         <p:txBody>
-          <a:bodyPr wrap="square" lIns="127000" rIns="127000" tIns="101600" bIns="101600" anchor="t">
+          <a:bodyPr wrap="square" lIns="127000" tIns="101600" rIns="127000" bIns="101600" anchor="t">
             <a:noAutofit/>
           </a:bodyPr>
           <a:lstStyle/>
@@ -14815,7 +15646,7 @@
           <a:noFill/>
         </p:spPr>
         <p:txBody>
-          <a:bodyPr wrap="square" lIns="127000" rIns="127000" tIns="101600" bIns="101600" anchor="t">
+          <a:bodyPr wrap="square" lIns="127000" tIns="101600" rIns="127000" bIns="101600" anchor="t">
             <a:noAutofit/>
           </a:bodyPr>
           <a:lstStyle/>
@@ -14857,7 +15688,7 @@
           <a:noFill/>
         </p:spPr>
         <p:txBody>
-          <a:bodyPr wrap="square" lIns="127000" rIns="127000" tIns="101600" bIns="101600" anchor="t">
+          <a:bodyPr wrap="square" lIns="127000" tIns="101600" rIns="127000" bIns="101600" anchor="t">
             <a:noAutofit/>
           </a:bodyPr>
           <a:lstStyle/>
@@ -14920,7 +15751,7 @@
           </a:fontRef>
         </p:style>
         <p:txBody>
-          <a:bodyPr rtlCol="0" anchor="ctr" wrap="square" lIns="355600" rIns="355600" tIns="101600" bIns="101600">
+          <a:bodyPr wrap="square" lIns="355600" tIns="101600" rIns="355600" bIns="101600" rtlCol="0" anchor="ctr">
             <a:noAutofit/>
           </a:bodyPr>
           <a:lstStyle/>
@@ -14983,7 +15814,7 @@
           </a:fontRef>
         </p:style>
         <p:txBody>
-          <a:bodyPr rtlCol="0" anchor="ctr" wrap="square" lIns="254000" rIns="203200" tIns="101600" bIns="101600">
+          <a:bodyPr wrap="square" lIns="254000" tIns="101600" rIns="203200" bIns="101600" rtlCol="0" anchor="ctr">
             <a:noAutofit/>
           </a:bodyPr>
           <a:lstStyle/>
@@ -15065,7 +15896,7 @@
           </a:fontRef>
         </p:style>
         <p:txBody>
-          <a:bodyPr rtlCol="0" anchor="ctr" wrap="square" lIns="254000" rIns="203200" tIns="101600" bIns="101600">
+          <a:bodyPr wrap="square" lIns="254000" tIns="101600" rIns="203200" bIns="101600" rtlCol="0" anchor="ctr">
             <a:noAutofit/>
           </a:bodyPr>
           <a:lstStyle/>
@@ -15147,7 +15978,7 @@
           </a:fontRef>
         </p:style>
         <p:txBody>
-          <a:bodyPr rtlCol="0" anchor="ctr" wrap="square" lIns="254000" rIns="203200" tIns="101600" bIns="101600">
+          <a:bodyPr wrap="square" lIns="254000" tIns="101600" rIns="203200" bIns="101600" rtlCol="0" anchor="ctr">
             <a:noAutofit/>
           </a:bodyPr>
           <a:lstStyle/>
@@ -15200,7 +16031,7 @@
 </file>
 
 <file path=ppt/slides/slide6.xml><?xml version="1.0" encoding="utf-8"?>
-<p:sld xmlns:a="http://schemas.openxmlformats.org/drawingml/2006/main" xmlns:p="http://schemas.openxmlformats.org/presentationml/2006/main" xmlns:r="http://schemas.openxmlformats.org/officeDocument/2006/relationships">
+<p:sld xmlns:a="http://schemas.openxmlformats.org/drawingml/2006/main" xmlns:r="http://schemas.openxmlformats.org/officeDocument/2006/relationships" xmlns:p="http://schemas.openxmlformats.org/presentationml/2006/main">
   <p:cSld>
     <p:spTree>
       <p:nvGrpSpPr>
@@ -15208,7 +16039,14 @@
         <p:cNvGrpSpPr/>
         <p:nvPr/>
       </p:nvGrpSpPr>
-      <p:grpSpPr/>
+      <p:grpSpPr>
+        <a:xfrm>
+          <a:off x="0" y="0"/>
+          <a:ext cx="0" cy="0"/>
+          <a:chOff x="0" y="0"/>
+          <a:chExt cx="0" cy="0"/>
+        </a:xfrm>
+      </p:grpSpPr>
       <p:sp>
         <p:nvSpPr>
           <p:cNvPr id="2" name="Rectangle 1"/>
@@ -15249,6 +16087,7 @@
           <a:lstStyle/>
           <a:p>
             <a:pPr algn="ctr"/>
+            <a:endParaRPr/>
           </a:p>
         </p:txBody>
       </p:sp>
@@ -15292,6 +16131,7 @@
           <a:lstStyle/>
           <a:p>
             <a:pPr algn="ctr"/>
+            <a:endParaRPr/>
           </a:p>
         </p:txBody>
       </p:sp>
@@ -15335,6 +16175,7 @@
           <a:lstStyle/>
           <a:p>
             <a:pPr algn="ctr"/>
+            <a:endParaRPr/>
           </a:p>
         </p:txBody>
       </p:sp>
@@ -15378,6 +16219,7 @@
           <a:lstStyle/>
           <a:p>
             <a:pPr algn="ctr"/>
+            <a:endParaRPr/>
           </a:p>
         </p:txBody>
       </p:sp>
@@ -15421,6 +16263,7 @@
           <a:lstStyle/>
           <a:p>
             <a:pPr algn="ctr"/>
+            <a:endParaRPr/>
           </a:p>
         </p:txBody>
       </p:sp>
@@ -15441,7 +16284,7 @@
           <a:noFill/>
         </p:spPr>
         <p:txBody>
-          <a:bodyPr wrap="square" lIns="127000" rIns="127000" tIns="101600" bIns="101600" anchor="t">
+          <a:bodyPr wrap="square" lIns="127000" tIns="101600" rIns="127000" bIns="101600" anchor="t">
             <a:noAutofit/>
           </a:bodyPr>
           <a:lstStyle/>
@@ -15483,7 +16326,7 @@
           <a:noFill/>
         </p:spPr>
         <p:txBody>
-          <a:bodyPr wrap="square" lIns="127000" rIns="127000" tIns="101600" bIns="101600" anchor="t">
+          <a:bodyPr wrap="square" lIns="127000" tIns="101600" rIns="127000" bIns="101600" anchor="t">
             <a:noAutofit/>
           </a:bodyPr>
           <a:lstStyle/>
@@ -15525,7 +16368,7 @@
           <a:noFill/>
         </p:spPr>
         <p:txBody>
-          <a:bodyPr wrap="square" lIns="127000" rIns="127000" tIns="101600" bIns="101600" anchor="t">
+          <a:bodyPr wrap="square" lIns="127000" tIns="101600" rIns="127000" bIns="101600" anchor="t">
             <a:noAutofit/>
           </a:bodyPr>
           <a:lstStyle/>
@@ -15567,7 +16410,7 @@
           <a:noFill/>
         </p:spPr>
         <p:txBody>
-          <a:bodyPr wrap="square" lIns="127000" rIns="127000" tIns="101600" bIns="101600" anchor="t">
+          <a:bodyPr wrap="square" lIns="127000" tIns="101600" rIns="127000" bIns="101600" anchor="t">
             <a:noAutofit/>
           </a:bodyPr>
           <a:lstStyle/>
@@ -15609,7 +16452,7 @@
           <a:noFill/>
         </p:spPr>
         <p:txBody>
-          <a:bodyPr wrap="square" lIns="127000" rIns="127000" tIns="101600" bIns="101600" anchor="t">
+          <a:bodyPr wrap="square" lIns="127000" tIns="101600" rIns="127000" bIns="101600" anchor="t">
             <a:noAutofit/>
           </a:bodyPr>
           <a:lstStyle/>
@@ -15672,7 +16515,7 @@
           </a:fontRef>
         </p:style>
         <p:txBody>
-          <a:bodyPr rtlCol="0" anchor="t" wrap="square" lIns="279400" rIns="127000" tIns="228600" bIns="101600">
+          <a:bodyPr wrap="square" lIns="279400" tIns="228600" rIns="127000" bIns="101600" rtlCol="0" anchor="t">
             <a:noAutofit/>
           </a:bodyPr>
           <a:lstStyle/>
@@ -15849,7 +16692,7 @@
           </a:fontRef>
         </p:style>
         <p:txBody>
-          <a:bodyPr rtlCol="0" anchor="t" wrap="square" lIns="279400" rIns="127000" tIns="228600" bIns="101600">
+          <a:bodyPr wrap="square" lIns="279400" tIns="228600" rIns="127000" bIns="101600" rtlCol="0" anchor="t">
             <a:noAutofit/>
           </a:bodyPr>
           <a:lstStyle/>
@@ -15997,7 +16840,7 @@
 </file>
 
 <file path=ppt/slides/slide7.xml><?xml version="1.0" encoding="utf-8"?>
-<p:sld xmlns:a="http://schemas.openxmlformats.org/drawingml/2006/main" xmlns:p="http://schemas.openxmlformats.org/presentationml/2006/main" xmlns:r="http://schemas.openxmlformats.org/officeDocument/2006/relationships">
+<p:sld xmlns:a="http://schemas.openxmlformats.org/drawingml/2006/main" xmlns:r="http://schemas.openxmlformats.org/officeDocument/2006/relationships" xmlns:p="http://schemas.openxmlformats.org/presentationml/2006/main">
   <p:cSld>
     <p:spTree>
       <p:nvGrpSpPr>
@@ -16005,7 +16848,14 @@
         <p:cNvGrpSpPr/>
         <p:nvPr/>
       </p:nvGrpSpPr>
-      <p:grpSpPr/>
+      <p:grpSpPr>
+        <a:xfrm>
+          <a:off x="0" y="0"/>
+          <a:ext cx="0" cy="0"/>
+          <a:chOff x="0" y="0"/>
+          <a:chExt cx="0" cy="0"/>
+        </a:xfrm>
+      </p:grpSpPr>
       <p:sp>
         <p:nvSpPr>
           <p:cNvPr id="2" name="Rectangle 1"/>
@@ -16046,6 +16896,7 @@
           <a:lstStyle/>
           <a:p>
             <a:pPr algn="ctr"/>
+            <a:endParaRPr/>
           </a:p>
         </p:txBody>
       </p:sp>
@@ -16089,6 +16940,7 @@
           <a:lstStyle/>
           <a:p>
             <a:pPr algn="ctr"/>
+            <a:endParaRPr/>
           </a:p>
         </p:txBody>
       </p:sp>
@@ -16132,6 +16984,7 @@
           <a:lstStyle/>
           <a:p>
             <a:pPr algn="ctr"/>
+            <a:endParaRPr/>
           </a:p>
         </p:txBody>
       </p:sp>
@@ -16175,6 +17028,7 @@
           <a:lstStyle/>
           <a:p>
             <a:pPr algn="ctr"/>
+            <a:endParaRPr/>
           </a:p>
         </p:txBody>
       </p:sp>
@@ -16218,6 +17072,7 @@
           <a:lstStyle/>
           <a:p>
             <a:pPr algn="ctr"/>
+            <a:endParaRPr/>
           </a:p>
         </p:txBody>
       </p:sp>
@@ -16238,7 +17093,7 @@
           <a:noFill/>
         </p:spPr>
         <p:txBody>
-          <a:bodyPr wrap="square" lIns="127000" rIns="127000" tIns="101600" bIns="101600" anchor="t">
+          <a:bodyPr wrap="square" lIns="127000" tIns="101600" rIns="127000" bIns="101600" anchor="t">
             <a:noAutofit/>
           </a:bodyPr>
           <a:lstStyle/>
@@ -16280,7 +17135,7 @@
           <a:noFill/>
         </p:spPr>
         <p:txBody>
-          <a:bodyPr wrap="square" lIns="127000" rIns="127000" tIns="101600" bIns="101600" anchor="t">
+          <a:bodyPr wrap="square" lIns="127000" tIns="101600" rIns="127000" bIns="101600" anchor="t">
             <a:noAutofit/>
           </a:bodyPr>
           <a:lstStyle/>
@@ -16322,7 +17177,7 @@
           <a:noFill/>
         </p:spPr>
         <p:txBody>
-          <a:bodyPr wrap="square" lIns="127000" rIns="127000" tIns="101600" bIns="101600" anchor="t">
+          <a:bodyPr wrap="square" lIns="127000" tIns="101600" rIns="127000" bIns="101600" anchor="t">
             <a:noAutofit/>
           </a:bodyPr>
           <a:lstStyle/>
@@ -16364,7 +17219,7 @@
           <a:noFill/>
         </p:spPr>
         <p:txBody>
-          <a:bodyPr wrap="square" lIns="127000" rIns="127000" tIns="101600" bIns="101600" anchor="t">
+          <a:bodyPr wrap="square" lIns="127000" tIns="101600" rIns="127000" bIns="101600" anchor="t">
             <a:noAutofit/>
           </a:bodyPr>
           <a:lstStyle/>
@@ -16427,7 +17282,7 @@
           </a:fontRef>
         </p:style>
         <p:txBody>
-          <a:bodyPr rtlCol="0" anchor="t" wrap="square" lIns="228600" rIns="127000" tIns="203200" bIns="101600">
+          <a:bodyPr wrap="square" lIns="228600" tIns="203200" rIns="127000" bIns="101600" rtlCol="0" anchor="t">
             <a:noAutofit/>
           </a:bodyPr>
           <a:lstStyle/>
@@ -16529,7 +17384,7 @@
           </a:fontRef>
         </p:style>
         <p:txBody>
-          <a:bodyPr rtlCol="0" anchor="t" wrap="square" lIns="228600" rIns="127000" tIns="203200" bIns="101600">
+          <a:bodyPr wrap="square" lIns="228600" tIns="203200" rIns="127000" bIns="101600" rtlCol="0" anchor="t">
             <a:noAutofit/>
           </a:bodyPr>
           <a:lstStyle/>
@@ -16631,7 +17486,7 @@
           </a:fontRef>
         </p:style>
         <p:txBody>
-          <a:bodyPr rtlCol="0" anchor="t" wrap="square" lIns="228600" rIns="127000" tIns="203200" bIns="101600">
+          <a:bodyPr wrap="square" lIns="228600" tIns="203200" rIns="127000" bIns="101600" rtlCol="0" anchor="t">
             <a:noAutofit/>
           </a:bodyPr>
           <a:lstStyle/>
@@ -16733,7 +17588,7 @@
           </a:fontRef>
         </p:style>
         <p:txBody>
-          <a:bodyPr rtlCol="0" anchor="t" wrap="square" lIns="228600" rIns="127000" tIns="203200" bIns="101600">
+          <a:bodyPr wrap="square" lIns="228600" tIns="203200" rIns="127000" bIns="101600" rtlCol="0" anchor="t">
             <a:noAutofit/>
           </a:bodyPr>
           <a:lstStyle/>
@@ -16835,7 +17690,7 @@
           </a:fontRef>
         </p:style>
         <p:txBody>
-          <a:bodyPr rtlCol="0" anchor="t" wrap="square" lIns="228600" rIns="127000" tIns="203200" bIns="101600">
+          <a:bodyPr wrap="square" lIns="228600" tIns="203200" rIns="127000" bIns="101600" rtlCol="0" anchor="t">
             <a:noAutofit/>
           </a:bodyPr>
           <a:lstStyle/>
@@ -16937,7 +17792,7 @@
           </a:fontRef>
         </p:style>
         <p:txBody>
-          <a:bodyPr rtlCol="0" anchor="t" wrap="square" lIns="228600" rIns="127000" tIns="203200" bIns="101600">
+          <a:bodyPr wrap="square" lIns="228600" tIns="203200" rIns="127000" bIns="101600" rtlCol="0" anchor="t">
             <a:noAutofit/>
           </a:bodyPr>
           <a:lstStyle/>
@@ -17039,7 +17894,7 @@
           </a:fontRef>
         </p:style>
         <p:txBody>
-          <a:bodyPr rtlCol="0" anchor="t" wrap="square" lIns="228600" rIns="127000" tIns="203200" bIns="101600">
+          <a:bodyPr wrap="square" lIns="228600" tIns="203200" rIns="127000" bIns="101600" rtlCol="0" anchor="t">
             <a:noAutofit/>
           </a:bodyPr>
           <a:lstStyle/>
@@ -17141,7 +17996,7 @@
           </a:fontRef>
         </p:style>
         <p:txBody>
-          <a:bodyPr rtlCol="0" anchor="t" wrap="square" lIns="228600" rIns="127000" tIns="203200" bIns="101600">
+          <a:bodyPr wrap="square" lIns="228600" tIns="203200" rIns="127000" bIns="101600" rtlCol="0" anchor="t">
             <a:noAutofit/>
           </a:bodyPr>
           <a:lstStyle/>
@@ -17214,7 +18069,7 @@
 </file>
 
 <file path=ppt/slides/slide8.xml><?xml version="1.0" encoding="utf-8"?>
-<p:sld xmlns:a="http://schemas.openxmlformats.org/drawingml/2006/main" xmlns:p="http://schemas.openxmlformats.org/presentationml/2006/main" xmlns:r="http://schemas.openxmlformats.org/officeDocument/2006/relationships">
+<p:sld xmlns:a="http://schemas.openxmlformats.org/drawingml/2006/main" xmlns:r="http://schemas.openxmlformats.org/officeDocument/2006/relationships" xmlns:p="http://schemas.openxmlformats.org/presentationml/2006/main">
   <p:cSld>
     <p:spTree>
       <p:nvGrpSpPr>
@@ -17222,7 +18077,14 @@
         <p:cNvGrpSpPr/>
         <p:nvPr/>
       </p:nvGrpSpPr>
-      <p:grpSpPr/>
+      <p:grpSpPr>
+        <a:xfrm>
+          <a:off x="0" y="0"/>
+          <a:ext cx="0" cy="0"/>
+          <a:chOff x="0" y="0"/>
+          <a:chExt cx="0" cy="0"/>
+        </a:xfrm>
+      </p:grpSpPr>
       <p:sp>
         <p:nvSpPr>
           <p:cNvPr id="2" name="Rectangle 1"/>
@@ -17263,6 +18125,7 @@
           <a:lstStyle/>
           <a:p>
             <a:pPr algn="ctr"/>
+            <a:endParaRPr/>
           </a:p>
         </p:txBody>
       </p:sp>
@@ -17306,6 +18169,7 @@
           <a:lstStyle/>
           <a:p>
             <a:pPr algn="ctr"/>
+            <a:endParaRPr/>
           </a:p>
         </p:txBody>
       </p:sp>
@@ -17349,6 +18213,7 @@
           <a:lstStyle/>
           <a:p>
             <a:pPr algn="ctr"/>
+            <a:endParaRPr/>
           </a:p>
         </p:txBody>
       </p:sp>
@@ -17392,6 +18257,7 @@
           <a:lstStyle/>
           <a:p>
             <a:pPr algn="ctr"/>
+            <a:endParaRPr/>
           </a:p>
         </p:txBody>
       </p:sp>
@@ -17435,6 +18301,7 @@
           <a:lstStyle/>
           <a:p>
             <a:pPr algn="ctr"/>
+            <a:endParaRPr/>
           </a:p>
         </p:txBody>
       </p:sp>
@@ -17455,7 +18322,7 @@
           <a:noFill/>
         </p:spPr>
         <p:txBody>
-          <a:bodyPr wrap="square" lIns="127000" rIns="127000" tIns="101600" bIns="101600" anchor="t">
+          <a:bodyPr wrap="square" lIns="127000" tIns="101600" rIns="127000" bIns="101600" anchor="t">
             <a:noAutofit/>
           </a:bodyPr>
           <a:lstStyle/>
@@ -17497,7 +18364,7 @@
           <a:noFill/>
         </p:spPr>
         <p:txBody>
-          <a:bodyPr wrap="square" lIns="127000" rIns="127000" tIns="101600" bIns="101600" anchor="t">
+          <a:bodyPr wrap="square" lIns="127000" tIns="101600" rIns="127000" bIns="101600" anchor="t">
             <a:noAutofit/>
           </a:bodyPr>
           <a:lstStyle/>
@@ -17539,7 +18406,7 @@
           <a:noFill/>
         </p:spPr>
         <p:txBody>
-          <a:bodyPr wrap="square" lIns="127000" rIns="127000" tIns="101600" bIns="101600" anchor="t">
+          <a:bodyPr wrap="square" lIns="127000" tIns="101600" rIns="127000" bIns="101600" anchor="t">
             <a:noAutofit/>
           </a:bodyPr>
           <a:lstStyle/>
@@ -17581,7 +18448,7 @@
           <a:noFill/>
         </p:spPr>
         <p:txBody>
-          <a:bodyPr wrap="square" lIns="127000" rIns="127000" tIns="101600" bIns="101600" anchor="t">
+          <a:bodyPr wrap="square" lIns="127000" tIns="101600" rIns="127000" bIns="101600" anchor="t">
             <a:noAutofit/>
           </a:bodyPr>
           <a:lstStyle/>
@@ -17648,6 +18515,7 @@
           <a:lstStyle/>
           <a:p>
             <a:pPr algn="ctr"/>
+            <a:endParaRPr/>
           </a:p>
         </p:txBody>
       </p:sp>
@@ -17691,6 +18559,7 @@
           <a:lstStyle/>
           <a:p>
             <a:pPr algn="ctr"/>
+            <a:endParaRPr/>
           </a:p>
         </p:txBody>
       </p:sp>
@@ -17711,7 +18580,7 @@
           <a:noFill/>
         </p:spPr>
         <p:txBody>
-          <a:bodyPr wrap="square" lIns="127000" rIns="127000" tIns="101600" bIns="101600" anchor="t">
+          <a:bodyPr wrap="square" lIns="127000" tIns="101600" rIns="127000" bIns="101600" anchor="t">
             <a:noAutofit/>
           </a:bodyPr>
           <a:lstStyle/>
@@ -17797,6 +18666,7 @@
           <a:lstStyle/>
           <a:p>
             <a:pPr algn="ctr"/>
+            <a:endParaRPr/>
           </a:p>
         </p:txBody>
       </p:sp>
@@ -17840,6 +18710,7 @@
           <a:lstStyle/>
           <a:p>
             <a:pPr algn="ctr"/>
+            <a:endParaRPr/>
           </a:p>
         </p:txBody>
       </p:sp>
@@ -17860,7 +18731,7 @@
           <a:noFill/>
         </p:spPr>
         <p:txBody>
-          <a:bodyPr wrap="square" lIns="127000" rIns="127000" tIns="101600" bIns="101600" anchor="t">
+          <a:bodyPr wrap="square" lIns="127000" tIns="101600" rIns="127000" bIns="101600" anchor="t">
             <a:noAutofit/>
           </a:bodyPr>
           <a:lstStyle/>
@@ -17946,6 +18817,7 @@
           <a:lstStyle/>
           <a:p>
             <a:pPr algn="ctr"/>
+            <a:endParaRPr/>
           </a:p>
         </p:txBody>
       </p:sp>
@@ -17989,6 +18861,7 @@
           <a:lstStyle/>
           <a:p>
             <a:pPr algn="ctr"/>
+            <a:endParaRPr/>
           </a:p>
         </p:txBody>
       </p:sp>
@@ -18009,7 +18882,7 @@
           <a:noFill/>
         </p:spPr>
         <p:txBody>
-          <a:bodyPr wrap="square" lIns="127000" rIns="127000" tIns="101600" bIns="101600" anchor="t">
+          <a:bodyPr wrap="square" lIns="127000" tIns="101600" rIns="127000" bIns="101600" anchor="t">
             <a:noAutofit/>
           </a:bodyPr>
           <a:lstStyle/>
@@ -18095,6 +18968,7 @@
           <a:lstStyle/>
           <a:p>
             <a:pPr algn="ctr"/>
+            <a:endParaRPr/>
           </a:p>
         </p:txBody>
       </p:sp>
@@ -18138,6 +19012,7 @@
           <a:lstStyle/>
           <a:p>
             <a:pPr algn="ctr"/>
+            <a:endParaRPr/>
           </a:p>
         </p:txBody>
       </p:sp>
@@ -18158,7 +19033,7 @@
           <a:noFill/>
         </p:spPr>
         <p:txBody>
-          <a:bodyPr wrap="square" lIns="127000" rIns="127000" tIns="101600" bIns="101600" anchor="t">
+          <a:bodyPr wrap="square" lIns="127000" tIns="101600" rIns="127000" bIns="101600" anchor="t">
             <a:noAutofit/>
           </a:bodyPr>
           <a:lstStyle/>
@@ -18244,6 +19119,7 @@
           <a:lstStyle/>
           <a:p>
             <a:pPr algn="ctr"/>
+            <a:endParaRPr/>
           </a:p>
         </p:txBody>
       </p:sp>
@@ -18287,6 +19163,7 @@
           <a:lstStyle/>
           <a:p>
             <a:pPr algn="ctr"/>
+            <a:endParaRPr/>
           </a:p>
         </p:txBody>
       </p:sp>
@@ -18307,7 +19184,7 @@
           <a:noFill/>
         </p:spPr>
         <p:txBody>
-          <a:bodyPr wrap="square" lIns="127000" rIns="127000" tIns="101600" bIns="101600" anchor="t">
+          <a:bodyPr wrap="square" lIns="127000" tIns="101600" rIns="127000" bIns="101600" anchor="t">
             <a:noAutofit/>
           </a:bodyPr>
           <a:lstStyle/>
@@ -18393,6 +19270,7 @@
           <a:lstStyle/>
           <a:p>
             <a:pPr algn="ctr"/>
+            <a:endParaRPr/>
           </a:p>
         </p:txBody>
       </p:sp>
@@ -18436,6 +19314,7 @@
           <a:lstStyle/>
           <a:p>
             <a:pPr algn="ctr"/>
+            <a:endParaRPr/>
           </a:p>
         </p:txBody>
       </p:sp>
@@ -18456,7 +19335,7 @@
           <a:noFill/>
         </p:spPr>
         <p:txBody>
-          <a:bodyPr wrap="square" lIns="127000" rIns="127000" tIns="101600" bIns="101600" anchor="t">
+          <a:bodyPr wrap="square" lIns="127000" tIns="101600" rIns="127000" bIns="101600" anchor="t">
             <a:noAutofit/>
           </a:bodyPr>
           <a:lstStyle/>
@@ -18542,6 +19421,7 @@
           <a:lstStyle/>
           <a:p>
             <a:pPr algn="ctr"/>
+            <a:endParaRPr/>
           </a:p>
         </p:txBody>
       </p:sp>
@@ -18585,6 +19465,7 @@
           <a:lstStyle/>
           <a:p>
             <a:pPr algn="ctr"/>
+            <a:endParaRPr/>
           </a:p>
         </p:txBody>
       </p:sp>
@@ -18605,7 +19486,7 @@
           <a:noFill/>
         </p:spPr>
         <p:txBody>
-          <a:bodyPr wrap="square" lIns="127000" rIns="127000" tIns="101600" bIns="101600" anchor="t">
+          <a:bodyPr wrap="square" lIns="127000" tIns="101600" rIns="127000" bIns="101600" anchor="t">
             <a:noAutofit/>
           </a:bodyPr>
           <a:lstStyle/>
@@ -18691,6 +19572,7 @@
           <a:lstStyle/>
           <a:p>
             <a:pPr algn="ctr"/>
+            <a:endParaRPr/>
           </a:p>
         </p:txBody>
       </p:sp>
@@ -18734,6 +19616,7 @@
           <a:lstStyle/>
           <a:p>
             <a:pPr algn="ctr"/>
+            <a:endParaRPr/>
           </a:p>
         </p:txBody>
       </p:sp>
@@ -18754,7 +19637,7 @@
           <a:noFill/>
         </p:spPr>
         <p:txBody>
-          <a:bodyPr wrap="square" lIns="127000" rIns="127000" tIns="101600" bIns="101600" anchor="t">
+          <a:bodyPr wrap="square" lIns="127000" tIns="101600" rIns="127000" bIns="101600" anchor="t">
             <a:noAutofit/>
           </a:bodyPr>
           <a:lstStyle/>
@@ -18807,7 +19690,7 @@
 </file>
 
 <file path=ppt/slides/slide9.xml><?xml version="1.0" encoding="utf-8"?>
-<p:sld xmlns:a="http://schemas.openxmlformats.org/drawingml/2006/main" xmlns:p="http://schemas.openxmlformats.org/presentationml/2006/main" xmlns:r="http://schemas.openxmlformats.org/officeDocument/2006/relationships">
+<p:sld xmlns:a="http://schemas.openxmlformats.org/drawingml/2006/main" xmlns:r="http://schemas.openxmlformats.org/officeDocument/2006/relationships" xmlns:p="http://schemas.openxmlformats.org/presentationml/2006/main">
   <p:cSld>
     <p:spTree>
       <p:nvGrpSpPr>
@@ -18815,7 +19698,14 @@
         <p:cNvGrpSpPr/>
         <p:nvPr/>
       </p:nvGrpSpPr>
-      <p:grpSpPr/>
+      <p:grpSpPr>
+        <a:xfrm>
+          <a:off x="0" y="0"/>
+          <a:ext cx="0" cy="0"/>
+          <a:chOff x="0" y="0"/>
+          <a:chExt cx="0" cy="0"/>
+        </a:xfrm>
+      </p:grpSpPr>
       <p:sp>
         <p:nvSpPr>
           <p:cNvPr id="2" name="Rectangle 1"/>
@@ -18856,6 +19746,7 @@
           <a:lstStyle/>
           <a:p>
             <a:pPr algn="ctr"/>
+            <a:endParaRPr/>
           </a:p>
         </p:txBody>
       </p:sp>
@@ -18899,6 +19790,7 @@
           <a:lstStyle/>
           <a:p>
             <a:pPr algn="ctr"/>
+            <a:endParaRPr/>
           </a:p>
         </p:txBody>
       </p:sp>
@@ -18942,6 +19834,7 @@
           <a:lstStyle/>
           <a:p>
             <a:pPr algn="ctr"/>
+            <a:endParaRPr/>
           </a:p>
         </p:txBody>
       </p:sp>
@@ -18985,6 +19878,7 @@
           <a:lstStyle/>
           <a:p>
             <a:pPr algn="ctr"/>
+            <a:endParaRPr/>
           </a:p>
         </p:txBody>
       </p:sp>
@@ -19028,6 +19922,7 @@
           <a:lstStyle/>
           <a:p>
             <a:pPr algn="ctr"/>
+            <a:endParaRPr/>
           </a:p>
         </p:txBody>
       </p:sp>
@@ -19048,7 +19943,7 @@
           <a:noFill/>
         </p:spPr>
         <p:txBody>
-          <a:bodyPr wrap="square" lIns="127000" rIns="127000" tIns="101600" bIns="101600" anchor="t">
+          <a:bodyPr wrap="square" lIns="127000" tIns="101600" rIns="127000" bIns="101600" anchor="t">
             <a:noAutofit/>
           </a:bodyPr>
           <a:lstStyle/>
@@ -19090,7 +19985,7 @@
           <a:noFill/>
         </p:spPr>
         <p:txBody>
-          <a:bodyPr wrap="square" lIns="127000" rIns="127000" tIns="101600" bIns="101600" anchor="t">
+          <a:bodyPr wrap="square" lIns="127000" tIns="101600" rIns="127000" bIns="101600" anchor="t">
             <a:noAutofit/>
           </a:bodyPr>
           <a:lstStyle/>
@@ -19132,7 +20027,7 @@
           <a:noFill/>
         </p:spPr>
         <p:txBody>
-          <a:bodyPr wrap="square" lIns="127000" rIns="127000" tIns="101600" bIns="101600" anchor="t">
+          <a:bodyPr wrap="square" lIns="127000" tIns="101600" rIns="127000" bIns="101600" anchor="t">
             <a:noAutofit/>
           </a:bodyPr>
           <a:lstStyle/>
@@ -19174,7 +20069,7 @@
           <a:noFill/>
         </p:spPr>
         <p:txBody>
-          <a:bodyPr wrap="square" lIns="127000" rIns="127000" tIns="101600" bIns="101600" anchor="t">
+          <a:bodyPr wrap="square" lIns="127000" tIns="101600" rIns="127000" bIns="101600" anchor="t">
             <a:noAutofit/>
           </a:bodyPr>
           <a:lstStyle/>
@@ -19216,7 +20111,7 @@
           <a:noFill/>
         </p:spPr>
         <p:txBody>
-          <a:bodyPr wrap="square" lIns="127000" rIns="127000" tIns="101600" bIns="101600" anchor="t">
+          <a:bodyPr wrap="square" lIns="127000" tIns="101600" rIns="127000" bIns="101600" anchor="t">
             <a:noAutofit/>
           </a:bodyPr>
           <a:lstStyle/>
@@ -19279,7 +20174,7 @@
           </a:fontRef>
         </p:style>
         <p:txBody>
-          <a:bodyPr rtlCol="0" anchor="t" wrap="square" lIns="228600" rIns="127000" tIns="203200" bIns="101600">
+          <a:bodyPr wrap="square" lIns="228600" tIns="203200" rIns="127000" bIns="101600" rtlCol="0" anchor="t">
             <a:noAutofit/>
           </a:bodyPr>
           <a:lstStyle/>
@@ -19380,7 +20275,7 @@
           </a:fontRef>
         </p:style>
         <p:txBody>
-          <a:bodyPr rtlCol="0" anchor="t" wrap="square" lIns="228600" rIns="127000" tIns="203200" bIns="101600">
+          <a:bodyPr wrap="square" lIns="228600" tIns="203200" rIns="127000" bIns="101600" rtlCol="0" anchor="t">
             <a:noAutofit/>
           </a:bodyPr>
           <a:lstStyle/>
@@ -19481,7 +20376,7 @@
           </a:fontRef>
         </p:style>
         <p:txBody>
-          <a:bodyPr rtlCol="0" anchor="t" wrap="square" lIns="228600" rIns="127000" tIns="203200" bIns="101600">
+          <a:bodyPr wrap="square" lIns="228600" tIns="203200" rIns="127000" bIns="101600" rtlCol="0" anchor="t">
             <a:noAutofit/>
           </a:bodyPr>
           <a:lstStyle/>
@@ -19582,7 +20477,7 @@
           </a:fontRef>
         </p:style>
         <p:txBody>
-          <a:bodyPr rtlCol="0" anchor="t" wrap="square" lIns="228600" rIns="127000" tIns="203200" bIns="101600">
+          <a:bodyPr wrap="square" lIns="228600" tIns="203200" rIns="127000" bIns="101600" rtlCol="0" anchor="t">
             <a:noAutofit/>
           </a:bodyPr>
           <a:lstStyle/>
@@ -19683,7 +20578,7 @@
           </a:fontRef>
         </p:style>
         <p:txBody>
-          <a:bodyPr rtlCol="0" anchor="t" wrap="square" lIns="228600" rIns="127000" tIns="203200" bIns="101600">
+          <a:bodyPr wrap="square" lIns="228600" tIns="203200" rIns="127000" bIns="101600" rtlCol="0" anchor="t">
             <a:noAutofit/>
           </a:bodyPr>
           <a:lstStyle/>
@@ -19784,7 +20679,7 @@
           </a:fontRef>
         </p:style>
         <p:txBody>
-          <a:bodyPr rtlCol="0" anchor="t" wrap="square" lIns="228600" rIns="127000" tIns="203200" bIns="101600">
+          <a:bodyPr wrap="square" lIns="228600" tIns="203200" rIns="127000" bIns="101600" rtlCol="0" anchor="t">
             <a:noAutofit/>
           </a:bodyPr>
           <a:lstStyle/>

--- a/docs/Аудитор_ИИ-агент_презентация.pptx
+++ b/docs/Аудитор_ИИ-агент_презентация.pptx
@@ -4603,7 +4603,7 @@
                 </a:solidFill>
                 <a:latin typeface="Calibri"/>
               </a:rPr>
-              <a:t>Две полки</a:t>
+              <a:t>Закон отдельно</a:t>
             </a:r>
           </a:p>
         </p:txBody>
@@ -4636,7 +4636,7 @@
                 </a:solidFill>
                 <a:latin typeface="Calibri"/>
               </a:rPr>
-              <a:t>Закон и цифры клиента не смешиваются. Excel клиента в базу законов класть нельзя.</a:t>
+              <a:t>Закон и цифры клиента лежат раздельно. Excel клиента в базу законов класть нельзя.</a:t>
             </a:r>
           </a:p>
         </p:txBody>
@@ -4747,7 +4747,7 @@
                 </a:solidFill>
                 <a:latin typeface="Calibri"/>
               </a:rPr>
-              <a:t>Чат и сервер слушают localhost. С соседнего компьютера контур не открывается.</a:t>
+              <a:t>Чат открывается только на этой машине. С соседнего компьютера зайти нельзя.</a:t>
             </a:r>
           </a:p>
         </p:txBody>
@@ -5568,7 +5568,7 @@
                 </a:solidFill>
                 <a:latin typeface="Calibri"/>
               </a:rPr>
-              <a:t>Промпты методолога ВА банка РБ.</a:t>
+              <a:t>Промпты методолога внутреннего аудита.</a:t>
             </a:r>
             <a:br/>
             <a:r>
@@ -8903,7 +8903,7 @@
                 </a:solidFill>
                 <a:latin typeface="Calibri"/>
               </a:rPr>
-              <a:t>Берём готовый чат и модели. Своё пишем только там, где рынку нечего дать аудиту банка РБ.</a:t>
+              <a:t>Берём готовый чат и модели. Своё — только то, чего нет на рынке: проверка банка РБ.</a:t>
             </a:r>
           </a:p>
         </p:txBody>
@@ -12946,7 +12946,7 @@
                 </a:solidFill>
                 <a:latin typeface="Calibri"/>
               </a:rPr>
-              <a:t>Одно окно для аудитора. Вход, файлы, статусы. Свой сайт не пишем.</a:t>
+              <a:t>Одно окно для аудитора: вход, файлы, статусы. Отдельный сайт не нужен.</a:t>
             </a:r>
           </a:p>
         </p:txBody>
@@ -13767,7 +13767,7 @@
                 </a:solidFill>
                 <a:latin typeface="Calibri"/>
               </a:rPr>
-              <a:t>На «вопрос …» в ответ кладутся куски утверждённых актов. Нет куска — нет статьи.</a:t>
+              <a:t>На вопрос агент отвечает кусками из утверждённых законов. Нет куска — статью не выдумывает.</a:t>
             </a:r>
           </a:p>
         </p:txBody>
